--- a/marketing/campanhas/fabrica-de-analytics-q3-2026/Fabrica_Analytics_ABM_Q3_2026.pptx
+++ b/marketing/campanhas/fabrica-de-analytics-q3-2026/Fabrica_Analytics_ABM_Q3_2026.pptx
@@ -3513,7 +3513,7 @@
                   <a:srgbClr val="F5A800"/>
                 </a:solidFill>
               </a:rPr>
-              <a:t>156</a:t>
+              <a:t>39</a:t>
             </a:r>
           </a:p>
         </p:txBody>
@@ -3547,7 +3547,7 @@
                   <a:srgbClr val="FFFFFF"/>
                 </a:solidFill>
               </a:rPr>
-              <a:t>empresas mapeadas</a:t>
+              <a:t>contas-alvo definidas</a:t>
             </a:r>
           </a:p>
         </p:txBody>
@@ -3624,7 +3624,7 @@
                   <a:srgbClr val="F5A800"/>
                 </a:solidFill>
               </a:rPr>
-              <a:t>7</a:t>
+              <a:t>8</a:t>
             </a:r>
           </a:p>
         </p:txBody>
@@ -3658,7 +3658,7 @@
                   <a:srgbClr val="FFFFFF"/>
                 </a:solidFill>
               </a:rPr>
-              <a:t>contas Tier 1 (VoC)</a:t>
+              <a:t>contas Tier 1 (prioritárias)</a:t>
             </a:r>
           </a:p>
         </p:txBody>
@@ -4394,7 +4394,7 @@
                   <a:srgbClr val="FFFFFF"/>
                 </a:solidFill>
               </a:rPr>
-              <a:t>Exportar lista 156 empresas do Leads_Geral.xlsx em CSV para LinkedIn</a:t>
+              <a:t>Upload lista-contas-abm.csv (39 empresas) no LinkedIn Campaign Manager</a:t>
             </a:r>
           </a:p>
         </p:txBody>
@@ -4539,7 +4539,7 @@
                   <a:srgbClr val="FFFFFF"/>
                 </a:solidFill>
               </a:rPr>
-              <a:t>Upload no LinkedIn Campaign Manager — criar 4 audiências Matched por tier</a:t>
+              <a:t>Criar 5 audiências Matched (T1, T2 Agro, T2 Energia/Ind, T2 Log/Saúde, T3)</a:t>
             </a:r>
           </a:p>
         </p:txBody>
@@ -4684,7 +4684,7 @@
                   <a:srgbClr val="FFFFFF"/>
                 </a:solidFill>
               </a:rPr>
-              <a:t>Criar InMails personalizados para 7 contas Tier 1 (dor por empresa)</a:t>
+              <a:t>Criar InMails personalizados para 8 contas Tier 1 (dor por empresa)</a:t>
             </a:r>
           </a:p>
         </p:txBody>
@@ -6573,54 +6573,20 @@
                   <a:srgbClr val="002F6C"/>
                 </a:solidFill>
               </a:rPr>
-              <a:t>Segmentação ABM — 156 Empresas em 3 Tiers</a:t>
-            </a:r>
-          </a:p>
-        </p:txBody>
-      </p:sp>
-      <p:sp>
-        <p:nvSpPr>
-          <p:cNvPr id="5" name="TextBox 4"/>
-          <p:cNvSpPr txBox="1"/>
-          <p:nvPr/>
-        </p:nvSpPr>
-        <p:spPr>
-          <a:xfrm>
-            <a:off x="457200" y="685800"/>
-            <a:ext cx="10972800" cy="274320"/>
-          </a:xfrm>
-          <a:prstGeom prst="rect">
-            <a:avLst/>
-          </a:prstGeom>
-          <a:noFill/>
-        </p:spPr>
-        <p:txBody>
-          <a:bodyPr wrap="square">
-            <a:spAutoFit/>
-          </a:bodyPr>
-          <a:lstStyle/>
-          <a:p>
-            <a:pPr algn="l"/>
-            <a:r>
-              <a:rPr sz="1000" b="0" i="1">
-                <a:solidFill>
-                  <a:srgbClr val="444444"/>
-                </a:solidFill>
-              </a:rPr>
-              <a:t>Base: eventos SAP BTP Experience + IT Summit Agro 2026</a:t>
-            </a:r>
-          </a:p>
-        </p:txBody>
-      </p:sp>
-      <p:sp>
-        <p:nvSpPr>
-          <p:cNvPr id="6" name="Rectangle 5"/>
+              <a:t>Segmentação ABM — 39 Contas em 3 Tiers</a:t>
+            </a:r>
+          </a:p>
+        </p:txBody>
+      </p:sp>
+      <p:sp>
+        <p:nvSpPr>
+          <p:cNvPr id="5" name="Rectangle 4"/>
           <p:cNvSpPr/>
           <p:nvPr/>
         </p:nvSpPr>
         <p:spPr>
           <a:xfrm>
-            <a:off x="457200" y="868680"/>
+            <a:off x="457200" y="777240"/>
             <a:ext cx="11247120" cy="45720"/>
           </a:xfrm>
           <a:prstGeom prst="rect">
@@ -6657,7 +6623,7 @@
       </p:sp>
       <p:sp>
         <p:nvSpPr>
-          <p:cNvPr id="7" name="Rectangle 6"/>
+          <p:cNvPr id="6" name="Rectangle 5"/>
           <p:cNvSpPr/>
           <p:nvPr/>
         </p:nvSpPr>
@@ -6700,7 +6666,7 @@
       </p:sp>
       <p:sp>
         <p:nvSpPr>
-          <p:cNvPr id="8" name="Rectangle 7"/>
+          <p:cNvPr id="7" name="Rectangle 6"/>
           <p:cNvSpPr/>
           <p:nvPr/>
         </p:nvSpPr>
@@ -6743,7 +6709,7 @@
       </p:sp>
       <p:sp>
         <p:nvSpPr>
-          <p:cNvPr id="9" name="TextBox 8"/>
+          <p:cNvPr id="8" name="TextBox 7"/>
           <p:cNvSpPr txBox="1"/>
           <p:nvPr/>
         </p:nvSpPr>
@@ -6777,7 +6743,7 @@
       </p:sp>
       <p:sp>
         <p:nvSpPr>
-          <p:cNvPr id="10" name="TextBox 9"/>
+          <p:cNvPr id="9" name="TextBox 8"/>
           <p:cNvSpPr txBox="1"/>
           <p:nvPr/>
         </p:nvSpPr>
@@ -6811,7 +6777,7 @@
       </p:sp>
       <p:sp>
         <p:nvSpPr>
-          <p:cNvPr id="11" name="TextBox 10"/>
+          <p:cNvPr id="10" name="TextBox 9"/>
           <p:cNvSpPr txBox="1"/>
           <p:nvPr/>
         </p:nvSpPr>
@@ -6838,14 +6804,14 @@
                   <a:srgbClr val="C0392B"/>
                 </a:solidFill>
               </a:rPr>
-              <a:t>7 contas</a:t>
-            </a:r>
-          </a:p>
-        </p:txBody>
-      </p:sp>
-      <p:sp>
-        <p:nvSpPr>
-          <p:cNvPr id="12" name="Rectangle 11"/>
+              <a:t>8 contas</a:t>
+            </a:r>
+          </a:p>
+        </p:txBody>
+      </p:sp>
+      <p:sp>
+        <p:nvSpPr>
+          <p:cNvPr id="11" name="Rectangle 10"/>
           <p:cNvSpPr/>
           <p:nvPr/>
         </p:nvSpPr>
@@ -6888,7 +6854,7 @@
       </p:sp>
       <p:sp>
         <p:nvSpPr>
-          <p:cNvPr id="13" name="TextBox 12"/>
+          <p:cNvPr id="12" name="TextBox 11"/>
           <p:cNvSpPr txBox="1"/>
           <p:nvPr/>
         </p:nvSpPr>
@@ -6922,7 +6888,7 @@
       </p:sp>
       <p:sp>
         <p:nvSpPr>
-          <p:cNvPr id="14" name="TextBox 13"/>
+          <p:cNvPr id="13" name="TextBox 12"/>
           <p:cNvSpPr txBox="1"/>
           <p:nvPr/>
         </p:nvSpPr>
@@ -6949,15 +6915,15 @@
                   <a:srgbClr val="444444"/>
                 </a:solidFill>
               </a:rPr>
-              <a:t>Contas do VoC com dor
-explícita identificada</a:t>
-            </a:r>
-          </a:p>
-        </p:txBody>
-      </p:sp>
-      <p:sp>
-        <p:nvSpPr>
-          <p:cNvPr id="15" name="TextBox 14"/>
+              <a:t>Maior porte e potencial
+Mensagem por empresa</a:t>
+            </a:r>
+          </a:p>
+        </p:txBody>
+      </p:sp>
+      <p:sp>
+        <p:nvSpPr>
+          <p:cNvPr id="14" name="TextBox 13"/>
           <p:cNvSpPr txBox="1"/>
           <p:nvPr/>
         </p:nvSpPr>
@@ -6991,7 +6957,7 @@
       </p:sp>
       <p:sp>
         <p:nvSpPr>
-          <p:cNvPr id="16" name="TextBox 15"/>
+          <p:cNvPr id="15" name="TextBox 14"/>
           <p:cNvSpPr txBox="1"/>
           <p:nvPr/>
         </p:nvSpPr>
@@ -7027,7 +6993,7 @@
       </p:sp>
       <p:sp>
         <p:nvSpPr>
-          <p:cNvPr id="17" name="TextBox 16"/>
+          <p:cNvPr id="16" name="TextBox 15"/>
           <p:cNvSpPr txBox="1"/>
           <p:nvPr/>
         </p:nvSpPr>
@@ -7061,7 +7027,7 @@
       </p:sp>
       <p:sp>
         <p:nvSpPr>
-          <p:cNvPr id="18" name="TextBox 17"/>
+          <p:cNvPr id="17" name="TextBox 16"/>
           <p:cNvSpPr txBox="1"/>
           <p:nvPr/>
         </p:nvSpPr>
@@ -7095,7 +7061,7 @@
       </p:sp>
       <p:sp>
         <p:nvSpPr>
-          <p:cNvPr id="19" name="TextBox 18"/>
+          <p:cNvPr id="18" name="TextBox 17"/>
           <p:cNvSpPr txBox="1"/>
           <p:nvPr/>
         </p:nvSpPr>
@@ -7129,7 +7095,7 @@
       </p:sp>
       <p:sp>
         <p:nvSpPr>
-          <p:cNvPr id="20" name="TextBox 19"/>
+          <p:cNvPr id="19" name="TextBox 18"/>
           <p:cNvSpPr txBox="1"/>
           <p:nvPr/>
         </p:nvSpPr>
@@ -7156,16 +7122,17 @@
                   <a:srgbClr val="444444"/>
                 </a:solidFill>
               </a:rPr>
-              <a:t>COMIGO · Geoavia · Tuberfil
-Grupo Soufer · Docol
-Algar · BTG Pactual</a:t>
-            </a:r>
-          </a:p>
-        </p:txBody>
-      </p:sp>
-      <p:sp>
-        <p:nvSpPr>
-          <p:cNvPr id="21" name="Rectangle 20"/>
+              <a:t>Sírio-Libanês · Rede D'Or
+Randon · Norte Energia
+VLI · Arteris
+Grupo Cimed · Grupo Jacto</a:t>
+            </a:r>
+          </a:p>
+        </p:txBody>
+      </p:sp>
+      <p:sp>
+        <p:nvSpPr>
+          <p:cNvPr id="20" name="Rectangle 19"/>
           <p:cNvSpPr/>
           <p:nvPr/>
         </p:nvSpPr>
@@ -7208,7 +7175,7 @@
       </p:sp>
       <p:sp>
         <p:nvSpPr>
-          <p:cNvPr id="22" name="Rectangle 21"/>
+          <p:cNvPr id="21" name="Rectangle 20"/>
           <p:cNvSpPr/>
           <p:nvPr/>
         </p:nvSpPr>
@@ -7251,7 +7218,7 @@
       </p:sp>
       <p:sp>
         <p:nvSpPr>
-          <p:cNvPr id="23" name="TextBox 22"/>
+          <p:cNvPr id="22" name="TextBox 21"/>
           <p:cNvSpPr txBox="1"/>
           <p:nvPr/>
         </p:nvSpPr>
@@ -7285,7 +7252,7 @@
       </p:sp>
       <p:sp>
         <p:nvSpPr>
-          <p:cNvPr id="24" name="TextBox 23"/>
+          <p:cNvPr id="23" name="TextBox 22"/>
           <p:cNvSpPr txBox="1"/>
           <p:nvPr/>
         </p:nvSpPr>
@@ -7319,7 +7286,7 @@
       </p:sp>
       <p:sp>
         <p:nvSpPr>
-          <p:cNvPr id="25" name="TextBox 24"/>
+          <p:cNvPr id="24" name="TextBox 23"/>
           <p:cNvSpPr txBox="1"/>
           <p:nvPr/>
         </p:nvSpPr>
@@ -7346,14 +7313,14 @@
                   <a:srgbClr val="002F6C"/>
                 </a:solidFill>
               </a:rPr>
-              <a:t>~50 contas</a:t>
-            </a:r>
-          </a:p>
-        </p:txBody>
-      </p:sp>
-      <p:sp>
-        <p:nvSpPr>
-          <p:cNvPr id="26" name="Rectangle 25"/>
+              <a:t>23 contas</a:t>
+            </a:r>
+          </a:p>
+        </p:txBody>
+      </p:sp>
+      <p:sp>
+        <p:nvSpPr>
+          <p:cNvPr id="25" name="Rectangle 24"/>
           <p:cNvSpPr/>
           <p:nvPr/>
         </p:nvSpPr>
@@ -7396,7 +7363,7 @@
       </p:sp>
       <p:sp>
         <p:nvSpPr>
-          <p:cNvPr id="27" name="TextBox 26"/>
+          <p:cNvPr id="26" name="TextBox 25"/>
           <p:cNvSpPr txBox="1"/>
           <p:nvPr/>
         </p:nvSpPr>
@@ -7430,7 +7397,7 @@
       </p:sp>
       <p:sp>
         <p:nvSpPr>
-          <p:cNvPr id="28" name="TextBox 27"/>
+          <p:cNvPr id="27" name="TextBox 26"/>
           <p:cNvSpPr txBox="1"/>
           <p:nvPr/>
         </p:nvSpPr>
@@ -7457,15 +7424,15 @@
                   <a:srgbClr val="444444"/>
                 </a:solidFill>
               </a:rPr>
-              <a:t>Líderes de TI/Dados dos
-eventos — agrupados por setor</a:t>
-            </a:r>
-          </a:p>
-        </p:txBody>
-      </p:sp>
-      <p:sp>
-        <p:nvSpPr>
-          <p:cNvPr id="29" name="TextBox 28"/>
+              <a:t>Agrupadas por setor
+Mensagem por vertical</a:t>
+            </a:r>
+          </a:p>
+        </p:txBody>
+      </p:sp>
+      <p:sp>
+        <p:nvSpPr>
+          <p:cNvPr id="28" name="TextBox 27"/>
           <p:cNvSpPr txBox="1"/>
           <p:nvPr/>
         </p:nvSpPr>
@@ -7499,7 +7466,7 @@
       </p:sp>
       <p:sp>
         <p:nvSpPr>
-          <p:cNvPr id="30" name="TextBox 29"/>
+          <p:cNvPr id="29" name="TextBox 28"/>
           <p:cNvSpPr txBox="1"/>
           <p:nvPr/>
         </p:nvSpPr>
@@ -7535,7 +7502,7 @@
       </p:sp>
       <p:sp>
         <p:nvSpPr>
-          <p:cNvPr id="31" name="TextBox 30"/>
+          <p:cNvPr id="30" name="TextBox 29"/>
           <p:cNvSpPr txBox="1"/>
           <p:nvPr/>
         </p:nvSpPr>
@@ -7569,7 +7536,7 @@
       </p:sp>
       <p:sp>
         <p:nvSpPr>
-          <p:cNvPr id="32" name="TextBox 31"/>
+          <p:cNvPr id="31" name="TextBox 30"/>
           <p:cNvSpPr txBox="1"/>
           <p:nvPr/>
         </p:nvSpPr>
@@ -7603,7 +7570,7 @@
       </p:sp>
       <p:sp>
         <p:nvSpPr>
-          <p:cNvPr id="33" name="TextBox 32"/>
+          <p:cNvPr id="32" name="TextBox 31"/>
           <p:cNvSpPr txBox="1"/>
           <p:nvPr/>
         </p:nvSpPr>
@@ -7637,7 +7604,7 @@
       </p:sp>
       <p:sp>
         <p:nvSpPr>
-          <p:cNvPr id="34" name="TextBox 33"/>
+          <p:cNvPr id="33" name="TextBox 32"/>
           <p:cNvSpPr txBox="1"/>
           <p:nvPr/>
         </p:nvSpPr>
@@ -7664,15 +7631,16 @@
                   <a:srgbClr val="444444"/>
                 </a:solidFill>
               </a:rPr>
-              <a:t>Agro/Bioenergia · Energia/Utilities
-Indústria/Manufatura</a:t>
-            </a:r>
-          </a:p>
-        </p:txBody>
-      </p:sp>
-      <p:sp>
-        <p:nvSpPr>
-          <p:cNvPr id="35" name="Rectangle 34"/>
+              <a:t>Agro · Energia · Indústria
+Logística · Saúde / Farma
+(5 verticais)</a:t>
+            </a:r>
+          </a:p>
+        </p:txBody>
+      </p:sp>
+      <p:sp>
+        <p:nvSpPr>
+          <p:cNvPr id="34" name="Rectangle 33"/>
           <p:cNvSpPr/>
           <p:nvPr/>
         </p:nvSpPr>
@@ -7715,7 +7683,7 @@
       </p:sp>
       <p:sp>
         <p:nvSpPr>
-          <p:cNvPr id="36" name="Rectangle 35"/>
+          <p:cNvPr id="35" name="Rectangle 34"/>
           <p:cNvSpPr/>
           <p:nvPr/>
         </p:nvSpPr>
@@ -7758,7 +7726,7 @@
       </p:sp>
       <p:sp>
         <p:nvSpPr>
-          <p:cNvPr id="37" name="TextBox 36"/>
+          <p:cNvPr id="36" name="TextBox 35"/>
           <p:cNvSpPr txBox="1"/>
           <p:nvPr/>
         </p:nvSpPr>
@@ -7792,7 +7760,7 @@
       </p:sp>
       <p:sp>
         <p:nvSpPr>
-          <p:cNvPr id="38" name="TextBox 37"/>
+          <p:cNvPr id="37" name="TextBox 36"/>
           <p:cNvSpPr txBox="1"/>
           <p:nvPr/>
         </p:nvSpPr>
@@ -7826,7 +7794,7 @@
       </p:sp>
       <p:sp>
         <p:nvSpPr>
-          <p:cNvPr id="39" name="TextBox 38"/>
+          <p:cNvPr id="38" name="TextBox 37"/>
           <p:cNvSpPr txBox="1"/>
           <p:nvPr/>
         </p:nvSpPr>
@@ -7853,14 +7821,14 @@
                   <a:srgbClr val="002F6C"/>
                 </a:solidFill>
               </a:rPr>
-              <a:t>~99 contas</a:t>
-            </a:r>
-          </a:p>
-        </p:txBody>
-      </p:sp>
-      <p:sp>
-        <p:nvSpPr>
-          <p:cNvPr id="40" name="Rectangle 39"/>
+              <a:t>8 contas</a:t>
+            </a:r>
+          </a:p>
+        </p:txBody>
+      </p:sp>
+      <p:sp>
+        <p:nvSpPr>
+          <p:cNvPr id="39" name="Rectangle 38"/>
           <p:cNvSpPr/>
           <p:nvPr/>
         </p:nvSpPr>
@@ -7903,7 +7871,7 @@
       </p:sp>
       <p:sp>
         <p:nvSpPr>
-          <p:cNvPr id="41" name="TextBox 40"/>
+          <p:cNvPr id="40" name="TextBox 39"/>
           <p:cNvSpPr txBox="1"/>
           <p:nvPr/>
         </p:nvSpPr>
@@ -7937,7 +7905,7 @@
       </p:sp>
       <p:sp>
         <p:nvSpPr>
-          <p:cNvPr id="42" name="TextBox 41"/>
+          <p:cNvPr id="41" name="TextBox 40"/>
           <p:cNvSpPr txBox="1"/>
           <p:nvPr/>
         </p:nvSpPr>
@@ -7964,15 +7932,15 @@
                   <a:srgbClr val="444444"/>
                 </a:solidFill>
               </a:rPr>
-              <a:t>Demais empresas dos eventos
-com perfil SAP</a:t>
-            </a:r>
-          </a:p>
-        </p:txBody>
-      </p:sp>
-      <p:sp>
-        <p:nvSpPr>
-          <p:cNvPr id="43" name="TextBox 42"/>
+              <a:t>Perfil SAP identificado
+Mensagem guarda-chuva</a:t>
+            </a:r>
+          </a:p>
+        </p:txBody>
+      </p:sp>
+      <p:sp>
+        <p:nvSpPr>
+          <p:cNvPr id="42" name="TextBox 41"/>
           <p:cNvSpPr txBox="1"/>
           <p:nvPr/>
         </p:nvSpPr>
@@ -8006,7 +7974,7 @@
       </p:sp>
       <p:sp>
         <p:nvSpPr>
-          <p:cNvPr id="44" name="TextBox 43"/>
+          <p:cNvPr id="43" name="TextBox 42"/>
           <p:cNvSpPr txBox="1"/>
           <p:nvPr/>
         </p:nvSpPr>
@@ -8034,14 +8002,14 @@
                 </a:solidFill>
               </a:rPr>
               <a:t>Matched Audience LinkedIn
-Mensagem guarda-chuva</a:t>
-            </a:r>
-          </a:p>
-        </p:txBody>
-      </p:sp>
-      <p:sp>
-        <p:nvSpPr>
-          <p:cNvPr id="45" name="TextBox 44"/>
+Mensagem ICP geral</a:t>
+            </a:r>
+          </a:p>
+        </p:txBody>
+      </p:sp>
+      <p:sp>
+        <p:nvSpPr>
+          <p:cNvPr id="44" name="TextBox 43"/>
           <p:cNvSpPr txBox="1"/>
           <p:nvPr/>
         </p:nvSpPr>
@@ -8075,7 +8043,7 @@
       </p:sp>
       <p:sp>
         <p:nvSpPr>
-          <p:cNvPr id="46" name="TextBox 45"/>
+          <p:cNvPr id="45" name="TextBox 44"/>
           <p:cNvSpPr txBox="1"/>
           <p:nvPr/>
         </p:nvSpPr>
@@ -8109,7 +8077,7 @@
       </p:sp>
       <p:sp>
         <p:nvSpPr>
-          <p:cNvPr id="47" name="TextBox 46"/>
+          <p:cNvPr id="46" name="TextBox 45"/>
           <p:cNvSpPr txBox="1"/>
           <p:nvPr/>
         </p:nvSpPr>
@@ -8143,7 +8111,7 @@
       </p:sp>
       <p:sp>
         <p:nvSpPr>
-          <p:cNvPr id="48" name="TextBox 47"/>
+          <p:cNvPr id="47" name="TextBox 46"/>
           <p:cNvSpPr txBox="1"/>
           <p:nvPr/>
         </p:nvSpPr>
@@ -8170,9 +8138,9 @@
                   <a:srgbClr val="444444"/>
                 </a:solidFill>
               </a:rPr>
-              <a:t>Vale · B3 · LATAM · GOL
-Gerdau · Braskem
-e outras 93 empresas</a:t>
+              <a:t>OCP Brasil · Grupo DMA
+Cadastra · Grupo Positivo
+Ferroeste · e outras</a:t>
             </a:r>
           </a:p>
         </p:txBody>
@@ -8310,7 +8278,7 @@
                   <a:srgbClr val="002F6C"/>
                 </a:solidFill>
               </a:rPr>
-              <a:t>Tier 1 — 7 Contas Estratégicas (Dores Identificadas no VoC)</a:t>
+              <a:t>Tier 1 — 8 Contas Estratégicas — Mensagem Personalizada por Empresa</a:t>
             </a:r>
           </a:p>
         </p:txBody>
@@ -8595,7 +8563,7 @@
             <a:avLst/>
           </a:prstGeom>
           <a:solidFill>
-            <a:srgbClr val="C0392B"/>
+            <a:srgbClr val="002F6C"/>
           </a:solidFill>
           <a:ln>
             <a:noFill/>
@@ -8652,7 +8620,7 @@
                   <a:srgbClr val="002F6C"/>
                 </a:solidFill>
               </a:rPr>
-              <a:t>COMIGO</a:t>
+              <a:t>Hospital Sírio-Libanês</a:t>
             </a:r>
           </a:p>
         </p:txBody>
@@ -8686,7 +8654,7 @@
                   <a:srgbClr val="444444"/>
                 </a:solidFill>
               </a:rPr>
-              <a:t>RFC + S4 pesado</a:t>
+              <a:t>Saúde</a:t>
             </a:r>
           </a:p>
         </p:txBody>
@@ -8720,7 +8688,7 @@
                   <a:srgbClr val="444444"/>
                 </a:solidFill>
               </a:rPr>
-              <a:t>RFC urgente — a fábrica pode parar</a:t>
+              <a:t>Quem cuida do SAC depois da implantação?</a:t>
             </a:r>
           </a:p>
         </p:txBody>
@@ -8735,6 +8703,656 @@
           <a:xfrm>
             <a:off x="10149840" y="1481328"/>
             <a:ext cx="1645920" cy="347472"/>
+          </a:xfrm>
+          <a:prstGeom prst="rect">
+            <a:avLst/>
+          </a:prstGeom>
+          <a:solidFill>
+            <a:srgbClr val="002F6C"/>
+          </a:solidFill>
+          <a:ln>
+            <a:noFill/>
+          </a:ln>
+        </p:spPr>
+        <p:style>
+          <a:lnRef idx="1">
+            <a:schemeClr val="accent1"/>
+          </a:lnRef>
+          <a:fillRef idx="3">
+            <a:schemeClr val="accent1"/>
+          </a:fillRef>
+          <a:effectRef idx="2">
+            <a:schemeClr val="accent1"/>
+          </a:effectRef>
+          <a:fontRef idx="minor">
+            <a:schemeClr val="lt1"/>
+          </a:fontRef>
+        </p:style>
+        <p:txBody>
+          <a:bodyPr rtlCol="0" anchor="ctr"/>
+          <a:lstStyle/>
+          <a:p>
+            <a:pPr algn="ctr"/>
+          </a:p>
+        </p:txBody>
+      </p:sp>
+      <p:sp>
+        <p:nvSpPr>
+          <p:cNvPr id="17" name="TextBox 16"/>
+          <p:cNvSpPr txBox="1"/>
+          <p:nvPr/>
+        </p:nvSpPr>
+        <p:spPr>
+          <a:xfrm>
+            <a:off x="10149840" y="1481328"/>
+            <a:ext cx="1645920" cy="347472"/>
+          </a:xfrm>
+          <a:prstGeom prst="rect">
+            <a:avLst/>
+          </a:prstGeom>
+          <a:noFill/>
+        </p:spPr>
+        <p:txBody>
+          <a:bodyPr wrap="square">
+            <a:spAutoFit/>
+          </a:bodyPr>
+          <a:lstStyle/>
+          <a:p>
+            <a:pPr algn="ctr"/>
+            <a:r>
+              <a:rPr sz="900" b="1" i="0">
+                <a:solidFill>
+                  <a:srgbClr val="FFFFFF"/>
+                </a:solidFill>
+              </a:rPr>
+              <a:t>Suporte</a:t>
+            </a:r>
+          </a:p>
+        </p:txBody>
+      </p:sp>
+      <p:sp>
+        <p:nvSpPr>
+          <p:cNvPr id="18" name="Rectangle 17"/>
+          <p:cNvSpPr/>
+          <p:nvPr/>
+        </p:nvSpPr>
+        <p:spPr>
+          <a:xfrm>
+            <a:off x="365760" y="1965960"/>
+            <a:ext cx="11430000" cy="548640"/>
+          </a:xfrm>
+          <a:prstGeom prst="rect">
+            <a:avLst/>
+          </a:prstGeom>
+          <a:solidFill>
+            <a:srgbClr val="FFFFFF"/>
+          </a:solidFill>
+          <a:ln>
+            <a:noFill/>
+          </a:ln>
+        </p:spPr>
+        <p:style>
+          <a:lnRef idx="1">
+            <a:schemeClr val="accent1"/>
+          </a:lnRef>
+          <a:fillRef idx="3">
+            <a:schemeClr val="accent1"/>
+          </a:fillRef>
+          <a:effectRef idx="2">
+            <a:schemeClr val="accent1"/>
+          </a:effectRef>
+          <a:fontRef idx="minor">
+            <a:schemeClr val="lt1"/>
+          </a:fontRef>
+        </p:style>
+        <p:txBody>
+          <a:bodyPr rtlCol="0" anchor="ctr"/>
+          <a:lstStyle/>
+          <a:p>
+            <a:pPr algn="ctr"/>
+          </a:p>
+        </p:txBody>
+      </p:sp>
+      <p:sp>
+        <p:nvSpPr>
+          <p:cNvPr id="19" name="Rectangle 18"/>
+          <p:cNvSpPr/>
+          <p:nvPr/>
+        </p:nvSpPr>
+        <p:spPr>
+          <a:xfrm>
+            <a:off x="365760" y="1965960"/>
+            <a:ext cx="54864" cy="548640"/>
+          </a:xfrm>
+          <a:prstGeom prst="rect">
+            <a:avLst/>
+          </a:prstGeom>
+          <a:solidFill>
+            <a:srgbClr val="002F6C"/>
+          </a:solidFill>
+          <a:ln>
+            <a:noFill/>
+          </a:ln>
+        </p:spPr>
+        <p:style>
+          <a:lnRef idx="1">
+            <a:schemeClr val="accent1"/>
+          </a:lnRef>
+          <a:fillRef idx="3">
+            <a:schemeClr val="accent1"/>
+          </a:fillRef>
+          <a:effectRef idx="2">
+            <a:schemeClr val="accent1"/>
+          </a:effectRef>
+          <a:fontRef idx="minor">
+            <a:schemeClr val="lt1"/>
+          </a:fontRef>
+        </p:style>
+        <p:txBody>
+          <a:bodyPr rtlCol="0" anchor="ctr"/>
+          <a:lstStyle/>
+          <a:p>
+            <a:pPr algn="ctr"/>
+          </a:p>
+        </p:txBody>
+      </p:sp>
+      <p:sp>
+        <p:nvSpPr>
+          <p:cNvPr id="20" name="TextBox 19"/>
+          <p:cNvSpPr txBox="1"/>
+          <p:nvPr/>
+        </p:nvSpPr>
+        <p:spPr>
+          <a:xfrm>
+            <a:off x="475488" y="2075688"/>
+            <a:ext cx="2286000" cy="329184"/>
+          </a:xfrm>
+          <a:prstGeom prst="rect">
+            <a:avLst/>
+          </a:prstGeom>
+          <a:noFill/>
+        </p:spPr>
+        <p:txBody>
+          <a:bodyPr wrap="square">
+            <a:spAutoFit/>
+          </a:bodyPr>
+          <a:lstStyle/>
+          <a:p>
+            <a:pPr algn="l"/>
+            <a:r>
+              <a:rPr sz="1100" b="1" i="0">
+                <a:solidFill>
+                  <a:srgbClr val="002F6C"/>
+                </a:solidFill>
+              </a:rPr>
+              <a:t>Rede D'Or São Luiz</a:t>
+            </a:r>
+          </a:p>
+        </p:txBody>
+      </p:sp>
+      <p:sp>
+        <p:nvSpPr>
+          <p:cNvPr id="21" name="TextBox 20"/>
+          <p:cNvSpPr txBox="1"/>
+          <p:nvPr/>
+        </p:nvSpPr>
+        <p:spPr>
+          <a:xfrm>
+            <a:off x="2834640" y="2075688"/>
+            <a:ext cx="2560320" cy="329184"/>
+          </a:xfrm>
+          <a:prstGeom prst="rect">
+            <a:avLst/>
+          </a:prstGeom>
+          <a:noFill/>
+        </p:spPr>
+        <p:txBody>
+          <a:bodyPr wrap="square">
+            <a:spAutoFit/>
+          </a:bodyPr>
+          <a:lstStyle/>
+          <a:p>
+            <a:pPr algn="l"/>
+            <a:r>
+              <a:rPr sz="1000" b="0" i="0">
+                <a:solidFill>
+                  <a:srgbClr val="444444"/>
+                </a:solidFill>
+              </a:rPr>
+              <a:t>Saúde</a:t>
+            </a:r>
+          </a:p>
+        </p:txBody>
+      </p:sp>
+      <p:sp>
+        <p:nvSpPr>
+          <p:cNvPr id="22" name="TextBox 21"/>
+          <p:cNvSpPr txBox="1"/>
+          <p:nvPr/>
+        </p:nvSpPr>
+        <p:spPr>
+          <a:xfrm>
+            <a:off x="5577840" y="2075688"/>
+            <a:ext cx="4389120" cy="329184"/>
+          </a:xfrm>
+          <a:prstGeom prst="rect">
+            <a:avLst/>
+          </a:prstGeom>
+          <a:noFill/>
+        </p:spPr>
+        <p:txBody>
+          <a:bodyPr wrap="square">
+            <a:spAutoFit/>
+          </a:bodyPr>
+          <a:lstStyle/>
+          <a:p>
+            <a:pPr algn="l"/>
+            <a:r>
+              <a:rPr sz="1000" b="0" i="1">
+                <a:solidFill>
+                  <a:srgbClr val="444444"/>
+                </a:solidFill>
+              </a:rPr>
+              <a:t>Sem parceiro técnico para evoluir o SAC</a:t>
+            </a:r>
+          </a:p>
+        </p:txBody>
+      </p:sp>
+      <p:sp>
+        <p:nvSpPr>
+          <p:cNvPr id="23" name="Rectangle 22"/>
+          <p:cNvSpPr/>
+          <p:nvPr/>
+        </p:nvSpPr>
+        <p:spPr>
+          <a:xfrm>
+            <a:off x="10149840" y="2057400"/>
+            <a:ext cx="1645920" cy="347472"/>
+          </a:xfrm>
+          <a:prstGeom prst="rect">
+            <a:avLst/>
+          </a:prstGeom>
+          <a:solidFill>
+            <a:srgbClr val="002F6C"/>
+          </a:solidFill>
+          <a:ln>
+            <a:noFill/>
+          </a:ln>
+        </p:spPr>
+        <p:style>
+          <a:lnRef idx="1">
+            <a:schemeClr val="accent1"/>
+          </a:lnRef>
+          <a:fillRef idx="3">
+            <a:schemeClr val="accent1"/>
+          </a:fillRef>
+          <a:effectRef idx="2">
+            <a:schemeClr val="accent1"/>
+          </a:effectRef>
+          <a:fontRef idx="minor">
+            <a:schemeClr val="lt1"/>
+          </a:fontRef>
+        </p:style>
+        <p:txBody>
+          <a:bodyPr rtlCol="0" anchor="ctr"/>
+          <a:lstStyle/>
+          <a:p>
+            <a:pPr algn="ctr"/>
+          </a:p>
+        </p:txBody>
+      </p:sp>
+      <p:sp>
+        <p:nvSpPr>
+          <p:cNvPr id="24" name="TextBox 23"/>
+          <p:cNvSpPr txBox="1"/>
+          <p:nvPr/>
+        </p:nvSpPr>
+        <p:spPr>
+          <a:xfrm>
+            <a:off x="10149840" y="2057400"/>
+            <a:ext cx="1645920" cy="347472"/>
+          </a:xfrm>
+          <a:prstGeom prst="rect">
+            <a:avLst/>
+          </a:prstGeom>
+          <a:noFill/>
+        </p:spPr>
+        <p:txBody>
+          <a:bodyPr wrap="square">
+            <a:spAutoFit/>
+          </a:bodyPr>
+          <a:lstStyle/>
+          <a:p>
+            <a:pPr algn="ctr"/>
+            <a:r>
+              <a:rPr sz="900" b="1" i="0">
+                <a:solidFill>
+                  <a:srgbClr val="FFFFFF"/>
+                </a:solidFill>
+              </a:rPr>
+              <a:t>Suporte</a:t>
+            </a:r>
+          </a:p>
+        </p:txBody>
+      </p:sp>
+      <p:sp>
+        <p:nvSpPr>
+          <p:cNvPr id="25" name="Rectangle 24"/>
+          <p:cNvSpPr/>
+          <p:nvPr/>
+        </p:nvSpPr>
+        <p:spPr>
+          <a:xfrm>
+            <a:off x="365760" y="2542032"/>
+            <a:ext cx="11430000" cy="548640"/>
+          </a:xfrm>
+          <a:prstGeom prst="rect">
+            <a:avLst/>
+          </a:prstGeom>
+          <a:solidFill>
+            <a:srgbClr val="E8F0FE"/>
+          </a:solidFill>
+          <a:ln>
+            <a:noFill/>
+          </a:ln>
+        </p:spPr>
+        <p:style>
+          <a:lnRef idx="1">
+            <a:schemeClr val="accent1"/>
+          </a:lnRef>
+          <a:fillRef idx="3">
+            <a:schemeClr val="accent1"/>
+          </a:fillRef>
+          <a:effectRef idx="2">
+            <a:schemeClr val="accent1"/>
+          </a:effectRef>
+          <a:fontRef idx="minor">
+            <a:schemeClr val="lt1"/>
+          </a:fontRef>
+        </p:style>
+        <p:txBody>
+          <a:bodyPr rtlCol="0" anchor="ctr"/>
+          <a:lstStyle/>
+          <a:p>
+            <a:pPr algn="ctr"/>
+          </a:p>
+        </p:txBody>
+      </p:sp>
+      <p:sp>
+        <p:nvSpPr>
+          <p:cNvPr id="26" name="Rectangle 25"/>
+          <p:cNvSpPr/>
+          <p:nvPr/>
+        </p:nvSpPr>
+        <p:spPr>
+          <a:xfrm>
+            <a:off x="365760" y="2542032"/>
+            <a:ext cx="54864" cy="548640"/>
+          </a:xfrm>
+          <a:prstGeom prst="rect">
+            <a:avLst/>
+          </a:prstGeom>
+          <a:solidFill>
+            <a:srgbClr val="E67E22"/>
+          </a:solidFill>
+          <a:ln>
+            <a:noFill/>
+          </a:ln>
+        </p:spPr>
+        <p:style>
+          <a:lnRef idx="1">
+            <a:schemeClr val="accent1"/>
+          </a:lnRef>
+          <a:fillRef idx="3">
+            <a:schemeClr val="accent1"/>
+          </a:fillRef>
+          <a:effectRef idx="2">
+            <a:schemeClr val="accent1"/>
+          </a:effectRef>
+          <a:fontRef idx="minor">
+            <a:schemeClr val="lt1"/>
+          </a:fontRef>
+        </p:style>
+        <p:txBody>
+          <a:bodyPr rtlCol="0" anchor="ctr"/>
+          <a:lstStyle/>
+          <a:p>
+            <a:pPr algn="ctr"/>
+          </a:p>
+        </p:txBody>
+      </p:sp>
+      <p:sp>
+        <p:nvSpPr>
+          <p:cNvPr id="27" name="TextBox 26"/>
+          <p:cNvSpPr txBox="1"/>
+          <p:nvPr/>
+        </p:nvSpPr>
+        <p:spPr>
+          <a:xfrm>
+            <a:off x="475488" y="2651760"/>
+            <a:ext cx="2286000" cy="329184"/>
+          </a:xfrm>
+          <a:prstGeom prst="rect">
+            <a:avLst/>
+          </a:prstGeom>
+          <a:noFill/>
+        </p:spPr>
+        <p:txBody>
+          <a:bodyPr wrap="square">
+            <a:spAutoFit/>
+          </a:bodyPr>
+          <a:lstStyle/>
+          <a:p>
+            <a:pPr algn="l"/>
+            <a:r>
+              <a:rPr sz="1100" b="1" i="0">
+                <a:solidFill>
+                  <a:srgbClr val="002F6C"/>
+                </a:solidFill>
+              </a:rPr>
+              <a:t>Empresas Randon</a:t>
+            </a:r>
+          </a:p>
+        </p:txBody>
+      </p:sp>
+      <p:sp>
+        <p:nvSpPr>
+          <p:cNvPr id="28" name="TextBox 27"/>
+          <p:cNvSpPr txBox="1"/>
+          <p:nvPr/>
+        </p:nvSpPr>
+        <p:spPr>
+          <a:xfrm>
+            <a:off x="2834640" y="2651760"/>
+            <a:ext cx="2560320" cy="329184"/>
+          </a:xfrm>
+          <a:prstGeom prst="rect">
+            <a:avLst/>
+          </a:prstGeom>
+          <a:noFill/>
+        </p:spPr>
+        <p:txBody>
+          <a:bodyPr wrap="square">
+            <a:spAutoFit/>
+          </a:bodyPr>
+          <a:lstStyle/>
+          <a:p>
+            <a:pPr algn="l"/>
+            <a:r>
+              <a:rPr sz="1000" b="0" i="0">
+                <a:solidFill>
+                  <a:srgbClr val="444444"/>
+                </a:solidFill>
+              </a:rPr>
+              <a:t>Indústria</a:t>
+            </a:r>
+          </a:p>
+        </p:txBody>
+      </p:sp>
+      <p:sp>
+        <p:nvSpPr>
+          <p:cNvPr id="29" name="TextBox 28"/>
+          <p:cNvSpPr txBox="1"/>
+          <p:nvPr/>
+        </p:nvSpPr>
+        <p:spPr>
+          <a:xfrm>
+            <a:off x="5577840" y="2651760"/>
+            <a:ext cx="4389120" cy="329184"/>
+          </a:xfrm>
+          <a:prstGeom prst="rect">
+            <a:avLst/>
+          </a:prstGeom>
+          <a:noFill/>
+        </p:spPr>
+        <p:txBody>
+          <a:bodyPr wrap="square">
+            <a:spAutoFit/>
+          </a:bodyPr>
+          <a:lstStyle/>
+          <a:p>
+            <a:pPr algn="l"/>
+            <a:r>
+              <a:rPr sz="1000" b="0" i="1">
+                <a:solidFill>
+                  <a:srgbClr val="444444"/>
+                </a:solidFill>
+              </a:rPr>
+              <a:t>S4 pesado — cada query aparece na fatura</a:t>
+            </a:r>
+          </a:p>
+        </p:txBody>
+      </p:sp>
+      <p:sp>
+        <p:nvSpPr>
+          <p:cNvPr id="30" name="Rectangle 29"/>
+          <p:cNvSpPr/>
+          <p:nvPr/>
+        </p:nvSpPr>
+        <p:spPr>
+          <a:xfrm>
+            <a:off x="10149840" y="2633472"/>
+            <a:ext cx="1645920" cy="347472"/>
+          </a:xfrm>
+          <a:prstGeom prst="rect">
+            <a:avLst/>
+          </a:prstGeom>
+          <a:solidFill>
+            <a:srgbClr val="E67E22"/>
+          </a:solidFill>
+          <a:ln>
+            <a:noFill/>
+          </a:ln>
+        </p:spPr>
+        <p:style>
+          <a:lnRef idx="1">
+            <a:schemeClr val="accent1"/>
+          </a:lnRef>
+          <a:fillRef idx="3">
+            <a:schemeClr val="accent1"/>
+          </a:fillRef>
+          <a:effectRef idx="2">
+            <a:schemeClr val="accent1"/>
+          </a:effectRef>
+          <a:fontRef idx="minor">
+            <a:schemeClr val="lt1"/>
+          </a:fontRef>
+        </p:style>
+        <p:txBody>
+          <a:bodyPr rtlCol="0" anchor="ctr"/>
+          <a:lstStyle/>
+          <a:p>
+            <a:pPr algn="ctr"/>
+          </a:p>
+        </p:txBody>
+      </p:sp>
+      <p:sp>
+        <p:nvSpPr>
+          <p:cNvPr id="31" name="TextBox 30"/>
+          <p:cNvSpPr txBox="1"/>
+          <p:nvPr/>
+        </p:nvSpPr>
+        <p:spPr>
+          <a:xfrm>
+            <a:off x="10149840" y="2633472"/>
+            <a:ext cx="1645920" cy="347472"/>
+          </a:xfrm>
+          <a:prstGeom prst="rect">
+            <a:avLst/>
+          </a:prstGeom>
+          <a:noFill/>
+        </p:spPr>
+        <p:txBody>
+          <a:bodyPr wrap="square">
+            <a:spAutoFit/>
+          </a:bodyPr>
+          <a:lstStyle/>
+          <a:p>
+            <a:pPr algn="ctr"/>
+            <a:r>
+              <a:rPr sz="900" b="1" i="0">
+                <a:solidFill>
+                  <a:srgbClr val="FFFFFF"/>
+                </a:solidFill>
+              </a:rPr>
+              <a:t>S4 Pesado</a:t>
+            </a:r>
+          </a:p>
+        </p:txBody>
+      </p:sp>
+      <p:sp>
+        <p:nvSpPr>
+          <p:cNvPr id="32" name="Rectangle 31"/>
+          <p:cNvSpPr/>
+          <p:nvPr/>
+        </p:nvSpPr>
+        <p:spPr>
+          <a:xfrm>
+            <a:off x="365760" y="3118103"/>
+            <a:ext cx="11430000" cy="548640"/>
+          </a:xfrm>
+          <a:prstGeom prst="rect">
+            <a:avLst/>
+          </a:prstGeom>
+          <a:solidFill>
+            <a:srgbClr val="FFFFFF"/>
+          </a:solidFill>
+          <a:ln>
+            <a:noFill/>
+          </a:ln>
+        </p:spPr>
+        <p:style>
+          <a:lnRef idx="1">
+            <a:schemeClr val="accent1"/>
+          </a:lnRef>
+          <a:fillRef idx="3">
+            <a:schemeClr val="accent1"/>
+          </a:fillRef>
+          <a:effectRef idx="2">
+            <a:schemeClr val="accent1"/>
+          </a:effectRef>
+          <a:fontRef idx="minor">
+            <a:schemeClr val="lt1"/>
+          </a:fontRef>
+        </p:style>
+        <p:txBody>
+          <a:bodyPr rtlCol="0" anchor="ctr"/>
+          <a:lstStyle/>
+          <a:p>
+            <a:pPr algn="ctr"/>
+          </a:p>
+        </p:txBody>
+      </p:sp>
+      <p:sp>
+        <p:nvSpPr>
+          <p:cNvPr id="33" name="Rectangle 32"/>
+          <p:cNvSpPr/>
+          <p:nvPr/>
+        </p:nvSpPr>
+        <p:spPr>
+          <a:xfrm>
+            <a:off x="365760" y="3118103"/>
+            <a:ext cx="54864" cy="548640"/>
           </a:xfrm>
           <a:prstGeom prst="rect">
             <a:avLst/>
@@ -8770,18 +9388,163 @@
       </p:sp>
       <p:sp>
         <p:nvSpPr>
-          <p:cNvPr id="17" name="TextBox 16"/>
-          <p:cNvSpPr txBox="1"/>
-          <p:nvPr/>
-        </p:nvSpPr>
-        <p:spPr>
-          <a:xfrm>
-            <a:off x="10149840" y="1481328"/>
+          <p:cNvPr id="34" name="TextBox 33"/>
+          <p:cNvSpPr txBox="1"/>
+          <p:nvPr/>
+        </p:nvSpPr>
+        <p:spPr>
+          <a:xfrm>
+            <a:off x="475488" y="3227832"/>
+            <a:ext cx="2286000" cy="329184"/>
+          </a:xfrm>
+          <a:prstGeom prst="rect">
+            <a:avLst/>
+          </a:prstGeom>
+          <a:noFill/>
+        </p:spPr>
+        <p:txBody>
+          <a:bodyPr wrap="square">
+            <a:spAutoFit/>
+          </a:bodyPr>
+          <a:lstStyle/>
+          <a:p>
+            <a:pPr algn="l"/>
+            <a:r>
+              <a:rPr sz="1100" b="1" i="0">
+                <a:solidFill>
+                  <a:srgbClr val="002F6C"/>
+                </a:solidFill>
+              </a:rPr>
+              <a:t>Norte Energia</a:t>
+            </a:r>
+          </a:p>
+        </p:txBody>
+      </p:sp>
+      <p:sp>
+        <p:nvSpPr>
+          <p:cNvPr id="35" name="TextBox 34"/>
+          <p:cNvSpPr txBox="1"/>
+          <p:nvPr/>
+        </p:nvSpPr>
+        <p:spPr>
+          <a:xfrm>
+            <a:off x="2834640" y="3227832"/>
+            <a:ext cx="2560320" cy="329184"/>
+          </a:xfrm>
+          <a:prstGeom prst="rect">
+            <a:avLst/>
+          </a:prstGeom>
+          <a:noFill/>
+        </p:spPr>
+        <p:txBody>
+          <a:bodyPr wrap="square">
+            <a:spAutoFit/>
+          </a:bodyPr>
+          <a:lstStyle/>
+          <a:p>
+            <a:pPr algn="l"/>
+            <a:r>
+              <a:rPr sz="1000" b="0" i="0">
+                <a:solidFill>
+                  <a:srgbClr val="444444"/>
+                </a:solidFill>
+              </a:rPr>
+              <a:t>Energia</a:t>
+            </a:r>
+          </a:p>
+        </p:txBody>
+      </p:sp>
+      <p:sp>
+        <p:nvSpPr>
+          <p:cNvPr id="36" name="TextBox 35"/>
+          <p:cNvSpPr txBox="1"/>
+          <p:nvPr/>
+        </p:nvSpPr>
+        <p:spPr>
+          <a:xfrm>
+            <a:off x="5577840" y="3227832"/>
+            <a:ext cx="4389120" cy="329184"/>
+          </a:xfrm>
+          <a:prstGeom prst="rect">
+            <a:avLst/>
+          </a:prstGeom>
+          <a:noFill/>
+        </p:spPr>
+        <p:txBody>
+          <a:bodyPr wrap="square">
+            <a:spAutoFit/>
+          </a:bodyPr>
+          <a:lstStyle/>
+          <a:p>
+            <a:pPr algn="l"/>
+            <a:r>
+              <a:rPr sz="1000" b="0" i="1">
+                <a:solidFill>
+                  <a:srgbClr val="444444"/>
+                </a:solidFill>
+              </a:rPr>
+              <a:t>RFC urgente — migração antes do bloqueio</a:t>
+            </a:r>
+          </a:p>
+        </p:txBody>
+      </p:sp>
+      <p:sp>
+        <p:nvSpPr>
+          <p:cNvPr id="37" name="Rectangle 36"/>
+          <p:cNvSpPr/>
+          <p:nvPr/>
+        </p:nvSpPr>
+        <p:spPr>
+          <a:xfrm>
+            <a:off x="10149840" y="3209544"/>
             <a:ext cx="1645920" cy="347472"/>
           </a:xfrm>
           <a:prstGeom prst="rect">
             <a:avLst/>
           </a:prstGeom>
+          <a:solidFill>
+            <a:srgbClr val="C0392B"/>
+          </a:solidFill>
+          <a:ln>
+            <a:noFill/>
+          </a:ln>
+        </p:spPr>
+        <p:style>
+          <a:lnRef idx="1">
+            <a:schemeClr val="accent1"/>
+          </a:lnRef>
+          <a:fillRef idx="3">
+            <a:schemeClr val="accent1"/>
+          </a:fillRef>
+          <a:effectRef idx="2">
+            <a:schemeClr val="accent1"/>
+          </a:effectRef>
+          <a:fontRef idx="minor">
+            <a:schemeClr val="lt1"/>
+          </a:fontRef>
+        </p:style>
+        <p:txBody>
+          <a:bodyPr rtlCol="0" anchor="ctr"/>
+          <a:lstStyle/>
+          <a:p>
+            <a:pPr algn="ctr"/>
+          </a:p>
+        </p:txBody>
+      </p:sp>
+      <p:sp>
+        <p:nvSpPr>
+          <p:cNvPr id="38" name="TextBox 37"/>
+          <p:cNvSpPr txBox="1"/>
+          <p:nvPr/>
+        </p:nvSpPr>
+        <p:spPr>
+          <a:xfrm>
+            <a:off x="10149840" y="3209544"/>
+            <a:ext cx="1645920" cy="347472"/>
+          </a:xfrm>
+          <a:prstGeom prst="rect">
+            <a:avLst/>
+          </a:prstGeom>
           <a:noFill/>
         </p:spPr>
         <p:txBody>
@@ -8804,13 +9567,278 @@
       </p:sp>
       <p:sp>
         <p:nvSpPr>
-          <p:cNvPr id="18" name="Rectangle 17"/>
+          <p:cNvPr id="39" name="Rectangle 38"/>
           <p:cNvSpPr/>
           <p:nvPr/>
         </p:nvSpPr>
         <p:spPr>
           <a:xfrm>
-            <a:off x="365760" y="1965960"/>
+            <a:off x="365760" y="3694176"/>
+            <a:ext cx="11430000" cy="548640"/>
+          </a:xfrm>
+          <a:prstGeom prst="rect">
+            <a:avLst/>
+          </a:prstGeom>
+          <a:solidFill>
+            <a:srgbClr val="E8F0FE"/>
+          </a:solidFill>
+          <a:ln>
+            <a:noFill/>
+          </a:ln>
+        </p:spPr>
+        <p:style>
+          <a:lnRef idx="1">
+            <a:schemeClr val="accent1"/>
+          </a:lnRef>
+          <a:fillRef idx="3">
+            <a:schemeClr val="accent1"/>
+          </a:fillRef>
+          <a:effectRef idx="2">
+            <a:schemeClr val="accent1"/>
+          </a:effectRef>
+          <a:fontRef idx="minor">
+            <a:schemeClr val="lt1"/>
+          </a:fontRef>
+        </p:style>
+        <p:txBody>
+          <a:bodyPr rtlCol="0" anchor="ctr"/>
+          <a:lstStyle/>
+          <a:p>
+            <a:pPr algn="ctr"/>
+          </a:p>
+        </p:txBody>
+      </p:sp>
+      <p:sp>
+        <p:nvSpPr>
+          <p:cNvPr id="40" name="Rectangle 39"/>
+          <p:cNvSpPr/>
+          <p:nvPr/>
+        </p:nvSpPr>
+        <p:spPr>
+          <a:xfrm>
+            <a:off x="365760" y="3694176"/>
+            <a:ext cx="54864" cy="548640"/>
+          </a:xfrm>
+          <a:prstGeom prst="rect">
+            <a:avLst/>
+          </a:prstGeom>
+          <a:solidFill>
+            <a:srgbClr val="1A7A4A"/>
+          </a:solidFill>
+          <a:ln>
+            <a:noFill/>
+          </a:ln>
+        </p:spPr>
+        <p:style>
+          <a:lnRef idx="1">
+            <a:schemeClr val="accent1"/>
+          </a:lnRef>
+          <a:fillRef idx="3">
+            <a:schemeClr val="accent1"/>
+          </a:fillRef>
+          <a:effectRef idx="2">
+            <a:schemeClr val="accent1"/>
+          </a:effectRef>
+          <a:fontRef idx="minor">
+            <a:schemeClr val="lt1"/>
+          </a:fontRef>
+        </p:style>
+        <p:txBody>
+          <a:bodyPr rtlCol="0" anchor="ctr"/>
+          <a:lstStyle/>
+          <a:p>
+            <a:pPr algn="ctr"/>
+          </a:p>
+        </p:txBody>
+      </p:sp>
+      <p:sp>
+        <p:nvSpPr>
+          <p:cNvPr id="41" name="TextBox 40"/>
+          <p:cNvSpPr txBox="1"/>
+          <p:nvPr/>
+        </p:nvSpPr>
+        <p:spPr>
+          <a:xfrm>
+            <a:off x="475488" y="3803904"/>
+            <a:ext cx="2286000" cy="329184"/>
+          </a:xfrm>
+          <a:prstGeom prst="rect">
+            <a:avLst/>
+          </a:prstGeom>
+          <a:noFill/>
+        </p:spPr>
+        <p:txBody>
+          <a:bodyPr wrap="square">
+            <a:spAutoFit/>
+          </a:bodyPr>
+          <a:lstStyle/>
+          <a:p>
+            <a:pPr algn="l"/>
+            <a:r>
+              <a:rPr sz="1100" b="1" i="0">
+                <a:solidFill>
+                  <a:srgbClr val="002F6C"/>
+                </a:solidFill>
+              </a:rPr>
+              <a:t>VLI Logística</a:t>
+            </a:r>
+          </a:p>
+        </p:txBody>
+      </p:sp>
+      <p:sp>
+        <p:nvSpPr>
+          <p:cNvPr id="42" name="TextBox 41"/>
+          <p:cNvSpPr txBox="1"/>
+          <p:nvPr/>
+        </p:nvSpPr>
+        <p:spPr>
+          <a:xfrm>
+            <a:off x="2834640" y="3803904"/>
+            <a:ext cx="2560320" cy="329184"/>
+          </a:xfrm>
+          <a:prstGeom prst="rect">
+            <a:avLst/>
+          </a:prstGeom>
+          <a:noFill/>
+        </p:spPr>
+        <p:txBody>
+          <a:bodyPr wrap="square">
+            <a:spAutoFit/>
+          </a:bodyPr>
+          <a:lstStyle/>
+          <a:p>
+            <a:pPr algn="l"/>
+            <a:r>
+              <a:rPr sz="1000" b="0" i="0">
+                <a:solidFill>
+                  <a:srgbClr val="444444"/>
+                </a:solidFill>
+              </a:rPr>
+              <a:t>Logística</a:t>
+            </a:r>
+          </a:p>
+        </p:txBody>
+      </p:sp>
+      <p:sp>
+        <p:nvSpPr>
+          <p:cNvPr id="43" name="TextBox 42"/>
+          <p:cNvSpPr txBox="1"/>
+          <p:nvPr/>
+        </p:nvSpPr>
+        <p:spPr>
+          <a:xfrm>
+            <a:off x="5577840" y="3803904"/>
+            <a:ext cx="4389120" cy="329184"/>
+          </a:xfrm>
+          <a:prstGeom prst="rect">
+            <a:avLst/>
+          </a:prstGeom>
+          <a:noFill/>
+        </p:spPr>
+        <p:txBody>
+          <a:bodyPr wrap="square">
+            <a:spAutoFit/>
+          </a:bodyPr>
+          <a:lstStyle/>
+          <a:p>
+            <a:pPr algn="l"/>
+            <a:r>
+              <a:rPr sz="1000" b="0" i="1">
+                <a:solidFill>
+                  <a:srgbClr val="444444"/>
+                </a:solidFill>
+              </a:rPr>
+              <a:t>SAC só como BI — planning esperando</a:t>
+            </a:r>
+          </a:p>
+        </p:txBody>
+      </p:sp>
+      <p:sp>
+        <p:nvSpPr>
+          <p:cNvPr id="44" name="Rectangle 43"/>
+          <p:cNvSpPr/>
+          <p:nvPr/>
+        </p:nvSpPr>
+        <p:spPr>
+          <a:xfrm>
+            <a:off x="10149840" y="3785615"/>
+            <a:ext cx="1645920" cy="347472"/>
+          </a:xfrm>
+          <a:prstGeom prst="rect">
+            <a:avLst/>
+          </a:prstGeom>
+          <a:solidFill>
+            <a:srgbClr val="1A7A4A"/>
+          </a:solidFill>
+          <a:ln>
+            <a:noFill/>
+          </a:ln>
+        </p:spPr>
+        <p:style>
+          <a:lnRef idx="1">
+            <a:schemeClr val="accent1"/>
+          </a:lnRef>
+          <a:fillRef idx="3">
+            <a:schemeClr val="accent1"/>
+          </a:fillRef>
+          <a:effectRef idx="2">
+            <a:schemeClr val="accent1"/>
+          </a:effectRef>
+          <a:fontRef idx="minor">
+            <a:schemeClr val="lt1"/>
+          </a:fontRef>
+        </p:style>
+        <p:txBody>
+          <a:bodyPr rtlCol="0" anchor="ctr"/>
+          <a:lstStyle/>
+          <a:p>
+            <a:pPr algn="ctr"/>
+          </a:p>
+        </p:txBody>
+      </p:sp>
+      <p:sp>
+        <p:nvSpPr>
+          <p:cNvPr id="45" name="TextBox 44"/>
+          <p:cNvSpPr txBox="1"/>
+          <p:nvPr/>
+        </p:nvSpPr>
+        <p:spPr>
+          <a:xfrm>
+            <a:off x="10149840" y="3785615"/>
+            <a:ext cx="1645920" cy="347472"/>
+          </a:xfrm>
+          <a:prstGeom prst="rect">
+            <a:avLst/>
+          </a:prstGeom>
+          <a:noFill/>
+        </p:spPr>
+        <p:txBody>
+          <a:bodyPr wrap="square">
+            <a:spAutoFit/>
+          </a:bodyPr>
+          <a:lstStyle/>
+          <a:p>
+            <a:pPr algn="ctr"/>
+            <a:r>
+              <a:rPr sz="900" b="1" i="0">
+                <a:solidFill>
+                  <a:srgbClr val="FFFFFF"/>
+                </a:solidFill>
+              </a:rPr>
+              <a:t>Sem Parceiro</a:t>
+            </a:r>
+          </a:p>
+        </p:txBody>
+      </p:sp>
+      <p:sp>
+        <p:nvSpPr>
+          <p:cNvPr id="46" name="Rectangle 45"/>
+          <p:cNvSpPr/>
+          <p:nvPr/>
+        </p:nvSpPr>
+        <p:spPr>
+          <a:xfrm>
+            <a:off x="365760" y="4270248"/>
             <a:ext cx="11430000" cy="548640"/>
           </a:xfrm>
           <a:prstGeom prst="rect">
@@ -8847,20 +9875,20 @@
       </p:sp>
       <p:sp>
         <p:nvSpPr>
-          <p:cNvPr id="19" name="Rectangle 18"/>
+          <p:cNvPr id="47" name="Rectangle 46"/>
           <p:cNvSpPr/>
           <p:nvPr/>
         </p:nvSpPr>
         <p:spPr>
           <a:xfrm>
-            <a:off x="365760" y="1965960"/>
+            <a:off x="365760" y="4270248"/>
             <a:ext cx="54864" cy="548640"/>
           </a:xfrm>
           <a:prstGeom prst="rect">
             <a:avLst/>
           </a:prstGeom>
           <a:solidFill>
-            <a:srgbClr val="C0392B"/>
+            <a:srgbClr val="1A7A4A"/>
           </a:solidFill>
           <a:ln>
             <a:noFill/>
@@ -8890,13 +9918,13 @@
       </p:sp>
       <p:sp>
         <p:nvSpPr>
-          <p:cNvPr id="20" name="TextBox 19"/>
-          <p:cNvSpPr txBox="1"/>
-          <p:nvPr/>
-        </p:nvSpPr>
-        <p:spPr>
-          <a:xfrm>
-            <a:off x="475488" y="2075688"/>
+          <p:cNvPr id="48" name="TextBox 47"/>
+          <p:cNvSpPr txBox="1"/>
+          <p:nvPr/>
+        </p:nvSpPr>
+        <p:spPr>
+          <a:xfrm>
+            <a:off x="475488" y="4379976"/>
             <a:ext cx="2286000" cy="329184"/>
           </a:xfrm>
           <a:prstGeom prst="rect">
@@ -8917,20 +9945,20 @@
                   <a:srgbClr val="002F6C"/>
                 </a:solidFill>
               </a:rPr>
-              <a:t>Geoavia</a:t>
-            </a:r>
-          </a:p>
-        </p:txBody>
-      </p:sp>
-      <p:sp>
-        <p:nvSpPr>
-          <p:cNvPr id="21" name="TextBox 20"/>
-          <p:cNvSpPr txBox="1"/>
-          <p:nvPr/>
-        </p:nvSpPr>
-        <p:spPr>
-          <a:xfrm>
-            <a:off x="2834640" y="2075688"/>
+              <a:t>Arteris</a:t>
+            </a:r>
+          </a:p>
+        </p:txBody>
+      </p:sp>
+      <p:sp>
+        <p:nvSpPr>
+          <p:cNvPr id="49" name="TextBox 48"/>
+          <p:cNvSpPr txBox="1"/>
+          <p:nvPr/>
+        </p:nvSpPr>
+        <p:spPr>
+          <a:xfrm>
+            <a:off x="2834640" y="4379976"/>
             <a:ext cx="2560320" cy="329184"/>
           </a:xfrm>
           <a:prstGeom prst="rect">
@@ -8951,20 +9979,20 @@
                   <a:srgbClr val="444444"/>
                 </a:solidFill>
               </a:rPr>
-              <a:t>RFC em risco</a:t>
-            </a:r>
-          </a:p>
-        </p:txBody>
-      </p:sp>
-      <p:sp>
-        <p:nvSpPr>
-          <p:cNvPr id="22" name="TextBox 21"/>
-          <p:cNvSpPr txBox="1"/>
-          <p:nvPr/>
-        </p:nvSpPr>
-        <p:spPr>
-          <a:xfrm>
-            <a:off x="5577840" y="2075688"/>
+              <a:t>Infraestrutura</a:t>
+            </a:r>
+          </a:p>
+        </p:txBody>
+      </p:sp>
+      <p:sp>
+        <p:nvSpPr>
+          <p:cNvPr id="50" name="TextBox 49"/>
+          <p:cNvSpPr txBox="1"/>
+          <p:nvPr/>
+        </p:nvSpPr>
+        <p:spPr>
+          <a:xfrm>
+            <a:off x="5577840" y="4379976"/>
             <a:ext cx="4389120" cy="329184"/>
           </a:xfrm>
           <a:prstGeom prst="rect">
@@ -8985,27 +10013,27 @@
                   <a:srgbClr val="444444"/>
                 </a:solidFill>
               </a:rPr>
-              <a:t>RFC urgente — migração antes do bloqueio</a:t>
-            </a:r>
-          </a:p>
-        </p:txBody>
-      </p:sp>
-      <p:sp>
-        <p:nvSpPr>
-          <p:cNvPr id="23" name="Rectangle 22"/>
+              <a:t>Sem parceiro técnico para o que vem depois</a:t>
+            </a:r>
+          </a:p>
+        </p:txBody>
+      </p:sp>
+      <p:sp>
+        <p:nvSpPr>
+          <p:cNvPr id="51" name="Rectangle 50"/>
           <p:cNvSpPr/>
           <p:nvPr/>
         </p:nvSpPr>
         <p:spPr>
           <a:xfrm>
-            <a:off x="10149840" y="2057400"/>
+            <a:off x="10149840" y="4361688"/>
             <a:ext cx="1645920" cy="347472"/>
           </a:xfrm>
           <a:prstGeom prst="rect">
             <a:avLst/>
           </a:prstGeom>
           <a:solidFill>
-            <a:srgbClr val="C0392B"/>
+            <a:srgbClr val="1A7A4A"/>
           </a:solidFill>
           <a:ln>
             <a:noFill/>
@@ -9035,13 +10063,13 @@
       </p:sp>
       <p:sp>
         <p:nvSpPr>
-          <p:cNvPr id="24" name="TextBox 23"/>
-          <p:cNvSpPr txBox="1"/>
-          <p:nvPr/>
-        </p:nvSpPr>
-        <p:spPr>
-          <a:xfrm>
-            <a:off x="10149840" y="2057400"/>
+          <p:cNvPr id="52" name="TextBox 51"/>
+          <p:cNvSpPr txBox="1"/>
+          <p:nvPr/>
+        </p:nvSpPr>
+        <p:spPr>
+          <a:xfrm>
+            <a:off x="10149840" y="4361688"/>
             <a:ext cx="1645920" cy="347472"/>
           </a:xfrm>
           <a:prstGeom prst="rect">
@@ -9062,20 +10090,20 @@
                   <a:srgbClr val="FFFFFF"/>
                 </a:solidFill>
               </a:rPr>
-              <a:t>RFC Urgente</a:t>
-            </a:r>
-          </a:p>
-        </p:txBody>
-      </p:sp>
-      <p:sp>
-        <p:nvSpPr>
-          <p:cNvPr id="25" name="Rectangle 24"/>
+              <a:t>Sem Parceiro</a:t>
+            </a:r>
+          </a:p>
+        </p:txBody>
+      </p:sp>
+      <p:sp>
+        <p:nvSpPr>
+          <p:cNvPr id="53" name="Rectangle 52"/>
           <p:cNvSpPr/>
           <p:nvPr/>
         </p:nvSpPr>
         <p:spPr>
           <a:xfrm>
-            <a:off x="365760" y="2542032"/>
+            <a:off x="365760" y="4846320"/>
             <a:ext cx="11430000" cy="548640"/>
           </a:xfrm>
           <a:prstGeom prst="rect">
@@ -9112,20 +10140,20 @@
       </p:sp>
       <p:sp>
         <p:nvSpPr>
-          <p:cNvPr id="26" name="Rectangle 25"/>
+          <p:cNvPr id="54" name="Rectangle 53"/>
           <p:cNvSpPr/>
           <p:nvPr/>
         </p:nvSpPr>
         <p:spPr>
           <a:xfrm>
-            <a:off x="365760" y="2542032"/>
+            <a:off x="365760" y="4846320"/>
             <a:ext cx="54864" cy="548640"/>
           </a:xfrm>
           <a:prstGeom prst="rect">
             <a:avLst/>
           </a:prstGeom>
           <a:solidFill>
-            <a:srgbClr val="1A7A4A"/>
+            <a:srgbClr val="F5A800"/>
           </a:solidFill>
           <a:ln>
             <a:noFill/>
@@ -9155,13 +10183,13 @@
       </p:sp>
       <p:sp>
         <p:nvSpPr>
-          <p:cNvPr id="27" name="TextBox 26"/>
-          <p:cNvSpPr txBox="1"/>
-          <p:nvPr/>
-        </p:nvSpPr>
-        <p:spPr>
-          <a:xfrm>
-            <a:off x="475488" y="2651760"/>
+          <p:cNvPr id="55" name="TextBox 54"/>
+          <p:cNvSpPr txBox="1"/>
+          <p:nvPr/>
+        </p:nvSpPr>
+        <p:spPr>
+          <a:xfrm>
+            <a:off x="475488" y="4956048"/>
             <a:ext cx="2286000" cy="329184"/>
           </a:xfrm>
           <a:prstGeom prst="rect">
@@ -9182,20 +10210,20 @@
                   <a:srgbClr val="002F6C"/>
                 </a:solidFill>
               </a:rPr>
-              <a:t>Tuberfil</a:t>
-            </a:r>
-          </a:p>
-        </p:txBody>
-      </p:sp>
-      <p:sp>
-        <p:nvSpPr>
-          <p:cNvPr id="28" name="TextBox 27"/>
-          <p:cNvSpPr txBox="1"/>
-          <p:nvPr/>
-        </p:nvSpPr>
-        <p:spPr>
-          <a:xfrm>
-            <a:off x="2834640" y="2651760"/>
+              <a:t>Grupo Cimed</a:t>
+            </a:r>
+          </a:p>
+        </p:txBody>
+      </p:sp>
+      <p:sp>
+        <p:nvSpPr>
+          <p:cNvPr id="56" name="TextBox 55"/>
+          <p:cNvSpPr txBox="1"/>
+          <p:nvPr/>
+        </p:nvSpPr>
+        <p:spPr>
+          <a:xfrm>
+            <a:off x="2834640" y="4956048"/>
             <a:ext cx="2560320" cy="329184"/>
           </a:xfrm>
           <a:prstGeom prst="rect">
@@ -9216,20 +10244,20 @@
                   <a:srgbClr val="444444"/>
                 </a:solidFill>
               </a:rPr>
-              <a:t>SAC + RFC + suporte</a:t>
-            </a:r>
-          </a:p>
-        </p:txBody>
-      </p:sp>
-      <p:sp>
-        <p:nvSpPr>
-          <p:cNvPr id="29" name="TextBox 28"/>
-          <p:cNvSpPr txBox="1"/>
-          <p:nvPr/>
-        </p:nvSpPr>
-        <p:spPr>
-          <a:xfrm>
-            <a:off x="5577840" y="2651760"/>
+              <a:t>Farma</a:t>
+            </a:r>
+          </a:p>
+        </p:txBody>
+      </p:sp>
+      <p:sp>
+        <p:nvSpPr>
+          <p:cNvPr id="57" name="TextBox 56"/>
+          <p:cNvSpPr txBox="1"/>
+          <p:nvPr/>
+        </p:nvSpPr>
+        <p:spPr>
+          <a:xfrm>
+            <a:off x="5577840" y="4956048"/>
             <a:ext cx="4389120" cy="329184"/>
           </a:xfrm>
           <a:prstGeom prst="rect">
@@ -9250,27 +10278,27 @@
                   <a:srgbClr val="444444"/>
                 </a:solidFill>
               </a:rPr>
-              <a:t>Sem parceiro — quem sustenta o ambiente?</a:t>
-            </a:r>
-          </a:p>
-        </p:txBody>
-      </p:sp>
-      <p:sp>
-        <p:nvSpPr>
-          <p:cNvPr id="30" name="Rectangle 29"/>
+              <a:t>SAC parado — licença paga, nada em uso</a:t>
+            </a:r>
+          </a:p>
+        </p:txBody>
+      </p:sp>
+      <p:sp>
+        <p:nvSpPr>
+          <p:cNvPr id="58" name="Rectangle 57"/>
           <p:cNvSpPr/>
           <p:nvPr/>
         </p:nvSpPr>
         <p:spPr>
           <a:xfrm>
-            <a:off x="10149840" y="2633472"/>
+            <a:off x="10149840" y="4937759"/>
             <a:ext cx="1645920" cy="347472"/>
           </a:xfrm>
           <a:prstGeom prst="rect">
             <a:avLst/>
           </a:prstGeom>
           <a:solidFill>
-            <a:srgbClr val="1A7A4A"/>
+            <a:srgbClr val="F5A800"/>
           </a:solidFill>
           <a:ln>
             <a:noFill/>
@@ -9300,13 +10328,13 @@
       </p:sp>
       <p:sp>
         <p:nvSpPr>
-          <p:cNvPr id="31" name="TextBox 30"/>
-          <p:cNvSpPr txBox="1"/>
-          <p:nvPr/>
-        </p:nvSpPr>
-        <p:spPr>
-          <a:xfrm>
-            <a:off x="10149840" y="2633472"/>
+          <p:cNvPr id="59" name="TextBox 58"/>
+          <p:cNvSpPr txBox="1"/>
+          <p:nvPr/>
+        </p:nvSpPr>
+        <p:spPr>
+          <a:xfrm>
+            <a:off x="10149840" y="4937759"/>
             <a:ext cx="1645920" cy="347472"/>
           </a:xfrm>
           <a:prstGeom prst="rect">
@@ -9324,23 +10352,23 @@
             <a:r>
               <a:rPr sz="900" b="1" i="0">
                 <a:solidFill>
-                  <a:srgbClr val="FFFFFF"/>
-                </a:solidFill>
-              </a:rPr>
-              <a:t>Sem Parceiro</a:t>
-            </a:r>
-          </a:p>
-        </p:txBody>
-      </p:sp>
-      <p:sp>
-        <p:nvSpPr>
-          <p:cNvPr id="32" name="Rectangle 31"/>
+                  <a:srgbClr val="002F6C"/>
+                </a:solidFill>
+              </a:rPr>
+              <a:t>SAC Parado</a:t>
+            </a:r>
+          </a:p>
+        </p:txBody>
+      </p:sp>
+      <p:sp>
+        <p:nvSpPr>
+          <p:cNvPr id="60" name="Rectangle 59"/>
           <p:cNvSpPr/>
           <p:nvPr/>
         </p:nvSpPr>
         <p:spPr>
           <a:xfrm>
-            <a:off x="365760" y="3118103"/>
+            <a:off x="365760" y="5422392"/>
             <a:ext cx="11430000" cy="548640"/>
           </a:xfrm>
           <a:prstGeom prst="rect">
@@ -9377,20 +10405,20 @@
       </p:sp>
       <p:sp>
         <p:nvSpPr>
-          <p:cNvPr id="33" name="Rectangle 32"/>
+          <p:cNvPr id="61" name="Rectangle 60"/>
           <p:cNvSpPr/>
           <p:nvPr/>
         </p:nvSpPr>
         <p:spPr>
           <a:xfrm>
-            <a:off x="365760" y="3118103"/>
+            <a:off x="365760" y="5422392"/>
             <a:ext cx="54864" cy="548640"/>
           </a:xfrm>
           <a:prstGeom prst="rect">
             <a:avLst/>
           </a:prstGeom>
           <a:solidFill>
-            <a:srgbClr val="F5A800"/>
+            <a:srgbClr val="E67E22"/>
           </a:solidFill>
           <a:ln>
             <a:noFill/>
@@ -9420,13 +10448,13 @@
       </p:sp>
       <p:sp>
         <p:nvSpPr>
-          <p:cNvPr id="34" name="TextBox 33"/>
-          <p:cNvSpPr txBox="1"/>
-          <p:nvPr/>
-        </p:nvSpPr>
-        <p:spPr>
-          <a:xfrm>
-            <a:off x="475488" y="3227832"/>
+          <p:cNvPr id="62" name="TextBox 61"/>
+          <p:cNvSpPr txBox="1"/>
+          <p:nvPr/>
+        </p:nvSpPr>
+        <p:spPr>
+          <a:xfrm>
+            <a:off x="475488" y="5532120"/>
             <a:ext cx="2286000" cy="329184"/>
           </a:xfrm>
           <a:prstGeom prst="rect">
@@ -9447,20 +10475,20 @@
                   <a:srgbClr val="002F6C"/>
                 </a:solidFill>
               </a:rPr>
-              <a:t>Grupo Soufer</a:t>
-            </a:r>
-          </a:p>
-        </p:txBody>
-      </p:sp>
-      <p:sp>
-        <p:nvSpPr>
-          <p:cNvPr id="35" name="TextBox 34"/>
-          <p:cNvSpPr txBox="1"/>
-          <p:nvPr/>
-        </p:nvSpPr>
-        <p:spPr>
-          <a:xfrm>
-            <a:off x="2834640" y="3227832"/>
+              <a:t>Grupo Jacto</a:t>
+            </a:r>
+          </a:p>
+        </p:txBody>
+      </p:sp>
+      <p:sp>
+        <p:nvSpPr>
+          <p:cNvPr id="63" name="TextBox 62"/>
+          <p:cNvSpPr txBox="1"/>
+          <p:nvPr/>
+        </p:nvSpPr>
+        <p:spPr>
+          <a:xfrm>
+            <a:off x="2834640" y="5532120"/>
             <a:ext cx="2560320" cy="329184"/>
           </a:xfrm>
           <a:prstGeom prst="rect">
@@ -9481,20 +10509,20 @@
                   <a:srgbClr val="444444"/>
                 </a:solidFill>
               </a:rPr>
-              <a:t>SAC parado</a:t>
-            </a:r>
-          </a:p>
-        </p:txBody>
-      </p:sp>
-      <p:sp>
-        <p:nvSpPr>
-          <p:cNvPr id="36" name="TextBox 35"/>
-          <p:cNvSpPr txBox="1"/>
-          <p:nvPr/>
-        </p:nvSpPr>
-        <p:spPr>
-          <a:xfrm>
-            <a:off x="5577840" y="3227832"/>
+              <a:t>Agro / Equipamentos</a:t>
+            </a:r>
+          </a:p>
+        </p:txBody>
+      </p:sp>
+      <p:sp>
+        <p:nvSpPr>
+          <p:cNvPr id="64" name="TextBox 63"/>
+          <p:cNvSpPr txBox="1"/>
+          <p:nvPr/>
+        </p:nvSpPr>
+        <p:spPr>
+          <a:xfrm>
+            <a:off x="5577840" y="5532120"/>
             <a:ext cx="4389120" cy="329184"/>
           </a:xfrm>
           <a:prstGeom prst="rect">
@@ -9515,27 +10543,27 @@
                   <a:srgbClr val="444444"/>
                 </a:solidFill>
               </a:rPr>
-              <a:t>SAC parado — licença paga, nada em uso</a:t>
-            </a:r>
-          </a:p>
-        </p:txBody>
-      </p:sp>
-      <p:sp>
-        <p:nvSpPr>
-          <p:cNvPr id="37" name="Rectangle 36"/>
+              <a:t>S4 pesado + SAC sem planning</a:t>
+            </a:r>
+          </a:p>
+        </p:txBody>
+      </p:sp>
+      <p:sp>
+        <p:nvSpPr>
+          <p:cNvPr id="65" name="Rectangle 64"/>
           <p:cNvSpPr/>
           <p:nvPr/>
         </p:nvSpPr>
         <p:spPr>
           <a:xfrm>
-            <a:off x="10149840" y="3209544"/>
+            <a:off x="10149840" y="5513831"/>
             <a:ext cx="1645920" cy="347472"/>
           </a:xfrm>
           <a:prstGeom prst="rect">
             <a:avLst/>
           </a:prstGeom>
           <a:solidFill>
-            <a:srgbClr val="F5A800"/>
+            <a:srgbClr val="E67E22"/>
           </a:solidFill>
           <a:ln>
             <a:noFill/>
@@ -9565,13 +10593,13 @@
       </p:sp>
       <p:sp>
         <p:nvSpPr>
-          <p:cNvPr id="38" name="TextBox 37"/>
-          <p:cNvSpPr txBox="1"/>
-          <p:nvPr/>
-        </p:nvSpPr>
-        <p:spPr>
-          <a:xfrm>
-            <a:off x="10149840" y="3209544"/>
+          <p:cNvPr id="66" name="TextBox 65"/>
+          <p:cNvSpPr txBox="1"/>
+          <p:nvPr/>
+        </p:nvSpPr>
+        <p:spPr>
+          <a:xfrm>
+            <a:off x="10149840" y="5513831"/>
             <a:ext cx="1645920" cy="347472"/>
           </a:xfrm>
           <a:prstGeom prst="rect">
@@ -9589,24 +10617,24 @@
             <a:r>
               <a:rPr sz="900" b="1" i="0">
                 <a:solidFill>
-                  <a:srgbClr val="002F6C"/>
-                </a:solidFill>
-              </a:rPr>
-              <a:t>SAC Parado</a:t>
-            </a:r>
-          </a:p>
-        </p:txBody>
-      </p:sp>
-      <p:sp>
-        <p:nvSpPr>
-          <p:cNvPr id="39" name="Rectangle 38"/>
+                  <a:srgbClr val="FFFFFF"/>
+                </a:solidFill>
+              </a:rPr>
+              <a:t>S4 Pesado</a:t>
+            </a:r>
+          </a:p>
+        </p:txBody>
+      </p:sp>
+      <p:sp>
+        <p:nvSpPr>
+          <p:cNvPr id="67" name="Rectangle 66"/>
           <p:cNvSpPr/>
           <p:nvPr/>
         </p:nvSpPr>
         <p:spPr>
           <a:xfrm>
-            <a:off x="365760" y="3694176"/>
-            <a:ext cx="11430000" cy="548640"/>
+            <a:off x="365760" y="6089903"/>
+            <a:ext cx="11430000" cy="457200"/>
           </a:xfrm>
           <a:prstGeom prst="rect">
             <a:avLst/>
@@ -9642,808 +10670,13 @@
       </p:sp>
       <p:sp>
         <p:nvSpPr>
-          <p:cNvPr id="40" name="Rectangle 39"/>
-          <p:cNvSpPr/>
-          <p:nvPr/>
-        </p:nvSpPr>
-        <p:spPr>
-          <a:xfrm>
-            <a:off x="365760" y="3694176"/>
-            <a:ext cx="54864" cy="548640"/>
-          </a:xfrm>
-          <a:prstGeom prst="rect">
-            <a:avLst/>
-          </a:prstGeom>
-          <a:solidFill>
-            <a:srgbClr val="F5A800"/>
-          </a:solidFill>
-          <a:ln>
-            <a:noFill/>
-          </a:ln>
-        </p:spPr>
-        <p:style>
-          <a:lnRef idx="1">
-            <a:schemeClr val="accent1"/>
-          </a:lnRef>
-          <a:fillRef idx="3">
-            <a:schemeClr val="accent1"/>
-          </a:fillRef>
-          <a:effectRef idx="2">
-            <a:schemeClr val="accent1"/>
-          </a:effectRef>
-          <a:fontRef idx="minor">
-            <a:schemeClr val="lt1"/>
-          </a:fontRef>
-        </p:style>
-        <p:txBody>
-          <a:bodyPr rtlCol="0" anchor="ctr"/>
-          <a:lstStyle/>
-          <a:p>
-            <a:pPr algn="ctr"/>
-          </a:p>
-        </p:txBody>
-      </p:sp>
-      <p:sp>
-        <p:nvSpPr>
-          <p:cNvPr id="41" name="TextBox 40"/>
-          <p:cNvSpPr txBox="1"/>
-          <p:nvPr/>
-        </p:nvSpPr>
-        <p:spPr>
-          <a:xfrm>
-            <a:off x="475488" y="3803904"/>
-            <a:ext cx="2286000" cy="329184"/>
-          </a:xfrm>
-          <a:prstGeom prst="rect">
-            <a:avLst/>
-          </a:prstGeom>
-          <a:noFill/>
-        </p:spPr>
-        <p:txBody>
-          <a:bodyPr wrap="square">
-            <a:spAutoFit/>
-          </a:bodyPr>
-          <a:lstStyle/>
-          <a:p>
-            <a:pPr algn="l"/>
-            <a:r>
-              <a:rPr sz="1100" b="1" i="0">
-                <a:solidFill>
-                  <a:srgbClr val="002F6C"/>
-                </a:solidFill>
-              </a:rPr>
-              <a:t>Docol</a:t>
-            </a:r>
-          </a:p>
-        </p:txBody>
-      </p:sp>
-      <p:sp>
-        <p:nvSpPr>
-          <p:cNvPr id="42" name="TextBox 41"/>
-          <p:cNvSpPr txBox="1"/>
-          <p:nvPr/>
-        </p:nvSpPr>
-        <p:spPr>
-          <a:xfrm>
-            <a:off x="2834640" y="3803904"/>
-            <a:ext cx="2560320" cy="329184"/>
-          </a:xfrm>
-          <a:prstGeom prst="rect">
-            <a:avLst/>
-          </a:prstGeom>
-          <a:noFill/>
-        </p:spPr>
-        <p:txBody>
-          <a:bodyPr wrap="square">
-            <a:spAutoFit/>
-          </a:bodyPr>
-          <a:lstStyle/>
-          <a:p>
-            <a:pPr algn="l"/>
-            <a:r>
-              <a:rPr sz="1000" b="0" i="0">
-                <a:solidFill>
-                  <a:srgbClr val="444444"/>
-                </a:solidFill>
-              </a:rPr>
-              <a:t>SAC parado</a:t>
-            </a:r>
-          </a:p>
-        </p:txBody>
-      </p:sp>
-      <p:sp>
-        <p:nvSpPr>
-          <p:cNvPr id="43" name="TextBox 42"/>
-          <p:cNvSpPr txBox="1"/>
-          <p:nvPr/>
-        </p:nvSpPr>
-        <p:spPr>
-          <a:xfrm>
-            <a:off x="5577840" y="3803904"/>
-            <a:ext cx="4389120" cy="329184"/>
-          </a:xfrm>
-          <a:prstGeom prst="rect">
-            <a:avLst/>
-          </a:prstGeom>
-          <a:noFill/>
-        </p:spPr>
-        <p:txBody>
-          <a:bodyPr wrap="square">
-            <a:spAutoFit/>
-          </a:bodyPr>
-          <a:lstStyle/>
-          <a:p>
-            <a:pPr algn="l"/>
-            <a:r>
-              <a:rPr sz="1000" b="0" i="1">
-                <a:solidFill>
-                  <a:srgbClr val="444444"/>
-                </a:solidFill>
-              </a:rPr>
-              <a:t>SAC parado — licença paga, nada em uso</a:t>
-            </a:r>
-          </a:p>
-        </p:txBody>
-      </p:sp>
-      <p:sp>
-        <p:nvSpPr>
-          <p:cNvPr id="44" name="Rectangle 43"/>
-          <p:cNvSpPr/>
-          <p:nvPr/>
-        </p:nvSpPr>
-        <p:spPr>
-          <a:xfrm>
-            <a:off x="10149840" y="3785615"/>
-            <a:ext cx="1645920" cy="347472"/>
-          </a:xfrm>
-          <a:prstGeom prst="rect">
-            <a:avLst/>
-          </a:prstGeom>
-          <a:solidFill>
-            <a:srgbClr val="F5A800"/>
-          </a:solidFill>
-          <a:ln>
-            <a:noFill/>
-          </a:ln>
-        </p:spPr>
-        <p:style>
-          <a:lnRef idx="1">
-            <a:schemeClr val="accent1"/>
-          </a:lnRef>
-          <a:fillRef idx="3">
-            <a:schemeClr val="accent1"/>
-          </a:fillRef>
-          <a:effectRef idx="2">
-            <a:schemeClr val="accent1"/>
-          </a:effectRef>
-          <a:fontRef idx="minor">
-            <a:schemeClr val="lt1"/>
-          </a:fontRef>
-        </p:style>
-        <p:txBody>
-          <a:bodyPr rtlCol="0" anchor="ctr"/>
-          <a:lstStyle/>
-          <a:p>
-            <a:pPr algn="ctr"/>
-          </a:p>
-        </p:txBody>
-      </p:sp>
-      <p:sp>
-        <p:nvSpPr>
-          <p:cNvPr id="45" name="TextBox 44"/>
-          <p:cNvSpPr txBox="1"/>
-          <p:nvPr/>
-        </p:nvSpPr>
-        <p:spPr>
-          <a:xfrm>
-            <a:off x="10149840" y="3785615"/>
-            <a:ext cx="1645920" cy="347472"/>
-          </a:xfrm>
-          <a:prstGeom prst="rect">
-            <a:avLst/>
-          </a:prstGeom>
-          <a:noFill/>
-        </p:spPr>
-        <p:txBody>
-          <a:bodyPr wrap="square">
-            <a:spAutoFit/>
-          </a:bodyPr>
-          <a:lstStyle/>
-          <a:p>
-            <a:pPr algn="ctr"/>
-            <a:r>
-              <a:rPr sz="900" b="1" i="0">
-                <a:solidFill>
-                  <a:srgbClr val="002F6C"/>
-                </a:solidFill>
-              </a:rPr>
-              <a:t>SAC Parado</a:t>
-            </a:r>
-          </a:p>
-        </p:txBody>
-      </p:sp>
-      <p:sp>
-        <p:nvSpPr>
-          <p:cNvPr id="46" name="Rectangle 45"/>
-          <p:cNvSpPr/>
-          <p:nvPr/>
-        </p:nvSpPr>
-        <p:spPr>
-          <a:xfrm>
-            <a:off x="365760" y="4270248"/>
-            <a:ext cx="11430000" cy="548640"/>
-          </a:xfrm>
-          <a:prstGeom prst="rect">
-            <a:avLst/>
-          </a:prstGeom>
-          <a:solidFill>
-            <a:srgbClr val="FFFFFF"/>
-          </a:solidFill>
-          <a:ln>
-            <a:noFill/>
-          </a:ln>
-        </p:spPr>
-        <p:style>
-          <a:lnRef idx="1">
-            <a:schemeClr val="accent1"/>
-          </a:lnRef>
-          <a:fillRef idx="3">
-            <a:schemeClr val="accent1"/>
-          </a:fillRef>
-          <a:effectRef idx="2">
-            <a:schemeClr val="accent1"/>
-          </a:effectRef>
-          <a:fontRef idx="minor">
-            <a:schemeClr val="lt1"/>
-          </a:fontRef>
-        </p:style>
-        <p:txBody>
-          <a:bodyPr rtlCol="0" anchor="ctr"/>
-          <a:lstStyle/>
-          <a:p>
-            <a:pPr algn="ctr"/>
-          </a:p>
-        </p:txBody>
-      </p:sp>
-      <p:sp>
-        <p:nvSpPr>
-          <p:cNvPr id="47" name="Rectangle 46"/>
-          <p:cNvSpPr/>
-          <p:nvPr/>
-        </p:nvSpPr>
-        <p:spPr>
-          <a:xfrm>
-            <a:off x="365760" y="4270248"/>
-            <a:ext cx="54864" cy="548640"/>
-          </a:xfrm>
-          <a:prstGeom prst="rect">
-            <a:avLst/>
-          </a:prstGeom>
-          <a:solidFill>
-            <a:srgbClr val="002F6C"/>
-          </a:solidFill>
-          <a:ln>
-            <a:noFill/>
-          </a:ln>
-        </p:spPr>
-        <p:style>
-          <a:lnRef idx="1">
-            <a:schemeClr val="accent1"/>
-          </a:lnRef>
-          <a:fillRef idx="3">
-            <a:schemeClr val="accent1"/>
-          </a:fillRef>
-          <a:effectRef idx="2">
-            <a:schemeClr val="accent1"/>
-          </a:effectRef>
-          <a:fontRef idx="minor">
-            <a:schemeClr val="lt1"/>
-          </a:fontRef>
-        </p:style>
-        <p:txBody>
-          <a:bodyPr rtlCol="0" anchor="ctr"/>
-          <a:lstStyle/>
-          <a:p>
-            <a:pPr algn="ctr"/>
-          </a:p>
-        </p:txBody>
-      </p:sp>
-      <p:sp>
-        <p:nvSpPr>
-          <p:cNvPr id="48" name="TextBox 47"/>
-          <p:cNvSpPr txBox="1"/>
-          <p:nvPr/>
-        </p:nvSpPr>
-        <p:spPr>
-          <a:xfrm>
-            <a:off x="475488" y="4379976"/>
-            <a:ext cx="2286000" cy="329184"/>
-          </a:xfrm>
-          <a:prstGeom prst="rect">
-            <a:avLst/>
-          </a:prstGeom>
-          <a:noFill/>
-        </p:spPr>
-        <p:txBody>
-          <a:bodyPr wrap="square">
-            <a:spAutoFit/>
-          </a:bodyPr>
-          <a:lstStyle/>
-          <a:p>
-            <a:pPr algn="l"/>
-            <a:r>
-              <a:rPr sz="1100" b="1" i="0">
-                <a:solidFill>
-                  <a:srgbClr val="002F6C"/>
-                </a:solidFill>
-              </a:rPr>
-              <a:t>Algar</a:t>
-            </a:r>
-          </a:p>
-        </p:txBody>
-      </p:sp>
-      <p:sp>
-        <p:nvSpPr>
-          <p:cNvPr id="49" name="TextBox 48"/>
-          <p:cNvSpPr txBox="1"/>
-          <p:nvPr/>
-        </p:nvSpPr>
-        <p:spPr>
-          <a:xfrm>
-            <a:off x="2834640" y="4379976"/>
-            <a:ext cx="2560320" cy="329184"/>
-          </a:xfrm>
-          <a:prstGeom prst="rect">
-            <a:avLst/>
-          </a:prstGeom>
-          <a:noFill/>
-        </p:spPr>
-        <p:txBody>
-          <a:bodyPr wrap="square">
-            <a:spAutoFit/>
-          </a:bodyPr>
-          <a:lstStyle/>
-          <a:p>
-            <a:pPr algn="l"/>
-            <a:r>
-              <a:rPr sz="1000" b="0" i="0">
-                <a:solidFill>
-                  <a:srgbClr val="444444"/>
-                </a:solidFill>
-              </a:rPr>
-              <a:t>SAC parado</a:t>
-            </a:r>
-          </a:p>
-        </p:txBody>
-      </p:sp>
-      <p:sp>
-        <p:nvSpPr>
-          <p:cNvPr id="50" name="TextBox 49"/>
-          <p:cNvSpPr txBox="1"/>
-          <p:nvPr/>
-        </p:nvSpPr>
-        <p:spPr>
-          <a:xfrm>
-            <a:off x="5577840" y="4379976"/>
-            <a:ext cx="4389120" cy="329184"/>
-          </a:xfrm>
-          <a:prstGeom prst="rect">
-            <a:avLst/>
-          </a:prstGeom>
-          <a:noFill/>
-        </p:spPr>
-        <p:txBody>
-          <a:bodyPr wrap="square">
-            <a:spAutoFit/>
-          </a:bodyPr>
-          <a:lstStyle/>
-          <a:p>
-            <a:pPr algn="l"/>
-            <a:r>
-              <a:rPr sz="1000" b="0" i="1">
-                <a:solidFill>
-                  <a:srgbClr val="444444"/>
-                </a:solidFill>
-              </a:rPr>
-              <a:t>SAC parado + evolução para planning</a:t>
-            </a:r>
-          </a:p>
-        </p:txBody>
-      </p:sp>
-      <p:sp>
-        <p:nvSpPr>
-          <p:cNvPr id="51" name="Rectangle 50"/>
-          <p:cNvSpPr/>
-          <p:nvPr/>
-        </p:nvSpPr>
-        <p:spPr>
-          <a:xfrm>
-            <a:off x="10149840" y="4361688"/>
-            <a:ext cx="1645920" cy="347472"/>
-          </a:xfrm>
-          <a:prstGeom prst="rect">
-            <a:avLst/>
-          </a:prstGeom>
-          <a:solidFill>
-            <a:srgbClr val="002F6C"/>
-          </a:solidFill>
-          <a:ln>
-            <a:noFill/>
-          </a:ln>
-        </p:spPr>
-        <p:style>
-          <a:lnRef idx="1">
-            <a:schemeClr val="accent1"/>
-          </a:lnRef>
-          <a:fillRef idx="3">
-            <a:schemeClr val="accent1"/>
-          </a:fillRef>
-          <a:effectRef idx="2">
-            <a:schemeClr val="accent1"/>
-          </a:effectRef>
-          <a:fontRef idx="minor">
-            <a:schemeClr val="lt1"/>
-          </a:fontRef>
-        </p:style>
-        <p:txBody>
-          <a:bodyPr rtlCol="0" anchor="ctr"/>
-          <a:lstStyle/>
-          <a:p>
-            <a:pPr algn="ctr"/>
-          </a:p>
-        </p:txBody>
-      </p:sp>
-      <p:sp>
-        <p:nvSpPr>
-          <p:cNvPr id="52" name="TextBox 51"/>
-          <p:cNvSpPr txBox="1"/>
-          <p:nvPr/>
-        </p:nvSpPr>
-        <p:spPr>
-          <a:xfrm>
-            <a:off x="10149840" y="4361688"/>
-            <a:ext cx="1645920" cy="347472"/>
-          </a:xfrm>
-          <a:prstGeom prst="rect">
-            <a:avLst/>
-          </a:prstGeom>
-          <a:noFill/>
-        </p:spPr>
-        <p:txBody>
-          <a:bodyPr wrap="square">
-            <a:spAutoFit/>
-          </a:bodyPr>
-          <a:lstStyle/>
-          <a:p>
-            <a:pPr algn="ctr"/>
-            <a:r>
-              <a:rPr sz="900" b="1" i="0">
-                <a:solidFill>
-                  <a:srgbClr val="FFFFFF"/>
-                </a:solidFill>
-              </a:rPr>
-              <a:t>Suporte</a:t>
-            </a:r>
-          </a:p>
-        </p:txBody>
-      </p:sp>
-      <p:sp>
-        <p:nvSpPr>
-          <p:cNvPr id="53" name="Rectangle 52"/>
-          <p:cNvSpPr/>
-          <p:nvPr/>
-        </p:nvSpPr>
-        <p:spPr>
-          <a:xfrm>
-            <a:off x="365760" y="4846320"/>
-            <a:ext cx="11430000" cy="548640"/>
-          </a:xfrm>
-          <a:prstGeom prst="rect">
-            <a:avLst/>
-          </a:prstGeom>
-          <a:solidFill>
-            <a:srgbClr val="E8F0FE"/>
-          </a:solidFill>
-          <a:ln>
-            <a:noFill/>
-          </a:ln>
-        </p:spPr>
-        <p:style>
-          <a:lnRef idx="1">
-            <a:schemeClr val="accent1"/>
-          </a:lnRef>
-          <a:fillRef idx="3">
-            <a:schemeClr val="accent1"/>
-          </a:fillRef>
-          <a:effectRef idx="2">
-            <a:schemeClr val="accent1"/>
-          </a:effectRef>
-          <a:fontRef idx="minor">
-            <a:schemeClr val="lt1"/>
-          </a:fontRef>
-        </p:style>
-        <p:txBody>
-          <a:bodyPr rtlCol="0" anchor="ctr"/>
-          <a:lstStyle/>
-          <a:p>
-            <a:pPr algn="ctr"/>
-          </a:p>
-        </p:txBody>
-      </p:sp>
-      <p:sp>
-        <p:nvSpPr>
-          <p:cNvPr id="54" name="Rectangle 53"/>
-          <p:cNvSpPr/>
-          <p:nvPr/>
-        </p:nvSpPr>
-        <p:spPr>
-          <a:xfrm>
-            <a:off x="365760" y="4846320"/>
-            <a:ext cx="54864" cy="548640"/>
-          </a:xfrm>
-          <a:prstGeom prst="rect">
-            <a:avLst/>
-          </a:prstGeom>
-          <a:solidFill>
-            <a:srgbClr val="E67E22"/>
-          </a:solidFill>
-          <a:ln>
-            <a:noFill/>
-          </a:ln>
-        </p:spPr>
-        <p:style>
-          <a:lnRef idx="1">
-            <a:schemeClr val="accent1"/>
-          </a:lnRef>
-          <a:fillRef idx="3">
-            <a:schemeClr val="accent1"/>
-          </a:fillRef>
-          <a:effectRef idx="2">
-            <a:schemeClr val="accent1"/>
-          </a:effectRef>
-          <a:fontRef idx="minor">
-            <a:schemeClr val="lt1"/>
-          </a:fontRef>
-        </p:style>
-        <p:txBody>
-          <a:bodyPr rtlCol="0" anchor="ctr"/>
-          <a:lstStyle/>
-          <a:p>
-            <a:pPr algn="ctr"/>
-          </a:p>
-        </p:txBody>
-      </p:sp>
-      <p:sp>
-        <p:nvSpPr>
-          <p:cNvPr id="55" name="TextBox 54"/>
-          <p:cNvSpPr txBox="1"/>
-          <p:nvPr/>
-        </p:nvSpPr>
-        <p:spPr>
-          <a:xfrm>
-            <a:off x="475488" y="4956048"/>
-            <a:ext cx="2286000" cy="329184"/>
-          </a:xfrm>
-          <a:prstGeom prst="rect">
-            <a:avLst/>
-          </a:prstGeom>
-          <a:noFill/>
-        </p:spPr>
-        <p:txBody>
-          <a:bodyPr wrap="square">
-            <a:spAutoFit/>
-          </a:bodyPr>
-          <a:lstStyle/>
-          <a:p>
-            <a:pPr algn="l"/>
-            <a:r>
-              <a:rPr sz="1100" b="1" i="0">
-                <a:solidFill>
-                  <a:srgbClr val="002F6C"/>
-                </a:solidFill>
-              </a:rPr>
-              <a:t>BTG Pactual</a:t>
-            </a:r>
-          </a:p>
-        </p:txBody>
-      </p:sp>
-      <p:sp>
-        <p:nvSpPr>
-          <p:cNvPr id="56" name="TextBox 55"/>
-          <p:cNvSpPr txBox="1"/>
-          <p:nvPr/>
-        </p:nvSpPr>
-        <p:spPr>
-          <a:xfrm>
-            <a:off x="2834640" y="4956048"/>
-            <a:ext cx="2560320" cy="329184"/>
-          </a:xfrm>
-          <a:prstGeom prst="rect">
-            <a:avLst/>
-          </a:prstGeom>
-          <a:noFill/>
-        </p:spPr>
-        <p:txBody>
-          <a:bodyPr wrap="square">
-            <a:spAutoFit/>
-          </a:bodyPr>
-          <a:lstStyle/>
-          <a:p>
-            <a:pPr algn="l"/>
-            <a:r>
-              <a:rPr sz="1000" b="0" i="0">
-                <a:solidFill>
-                  <a:srgbClr val="444444"/>
-                </a:solidFill>
-              </a:rPr>
-              <a:t>S4 sobrecarregado</a:t>
-            </a:r>
-          </a:p>
-        </p:txBody>
-      </p:sp>
-      <p:sp>
-        <p:nvSpPr>
-          <p:cNvPr id="57" name="TextBox 56"/>
-          <p:cNvSpPr txBox="1"/>
-          <p:nvPr/>
-        </p:nvSpPr>
-        <p:spPr>
-          <a:xfrm>
-            <a:off x="5577840" y="4956048"/>
-            <a:ext cx="4389120" cy="329184"/>
-          </a:xfrm>
-          <a:prstGeom prst="rect">
-            <a:avLst/>
-          </a:prstGeom>
-          <a:noFill/>
-        </p:spPr>
-        <p:txBody>
-          <a:bodyPr wrap="square">
-            <a:spAutoFit/>
-          </a:bodyPr>
-          <a:lstStyle/>
-          <a:p>
-            <a:pPr algn="l"/>
-            <a:r>
-              <a:rPr sz="1000" b="0" i="1">
-                <a:solidFill>
-                  <a:srgbClr val="444444"/>
-                </a:solidFill>
-              </a:rPr>
-              <a:t>S4 pesado — cada query aparece na fatura</a:t>
-            </a:r>
-          </a:p>
-        </p:txBody>
-      </p:sp>
-      <p:sp>
-        <p:nvSpPr>
-          <p:cNvPr id="58" name="Rectangle 57"/>
-          <p:cNvSpPr/>
-          <p:nvPr/>
-        </p:nvSpPr>
-        <p:spPr>
-          <a:xfrm>
-            <a:off x="10149840" y="4937759"/>
-            <a:ext cx="1645920" cy="347472"/>
-          </a:xfrm>
-          <a:prstGeom prst="rect">
-            <a:avLst/>
-          </a:prstGeom>
-          <a:solidFill>
-            <a:srgbClr val="E67E22"/>
-          </a:solidFill>
-          <a:ln>
-            <a:noFill/>
-          </a:ln>
-        </p:spPr>
-        <p:style>
-          <a:lnRef idx="1">
-            <a:schemeClr val="accent1"/>
-          </a:lnRef>
-          <a:fillRef idx="3">
-            <a:schemeClr val="accent1"/>
-          </a:fillRef>
-          <a:effectRef idx="2">
-            <a:schemeClr val="accent1"/>
-          </a:effectRef>
-          <a:fontRef idx="minor">
-            <a:schemeClr val="lt1"/>
-          </a:fontRef>
-        </p:style>
-        <p:txBody>
-          <a:bodyPr rtlCol="0" anchor="ctr"/>
-          <a:lstStyle/>
-          <a:p>
-            <a:pPr algn="ctr"/>
-          </a:p>
-        </p:txBody>
-      </p:sp>
-      <p:sp>
-        <p:nvSpPr>
-          <p:cNvPr id="59" name="TextBox 58"/>
-          <p:cNvSpPr txBox="1"/>
-          <p:nvPr/>
-        </p:nvSpPr>
-        <p:spPr>
-          <a:xfrm>
-            <a:off x="10149840" y="4937759"/>
-            <a:ext cx="1645920" cy="347472"/>
-          </a:xfrm>
-          <a:prstGeom prst="rect">
-            <a:avLst/>
-          </a:prstGeom>
-          <a:noFill/>
-        </p:spPr>
-        <p:txBody>
-          <a:bodyPr wrap="square">
-            <a:spAutoFit/>
-          </a:bodyPr>
-          <a:lstStyle/>
-          <a:p>
-            <a:pPr algn="ctr"/>
-            <a:r>
-              <a:rPr sz="900" b="1" i="0">
-                <a:solidFill>
-                  <a:srgbClr val="FFFFFF"/>
-                </a:solidFill>
-              </a:rPr>
-              <a:t>S4 Pesado</a:t>
-            </a:r>
-          </a:p>
-        </p:txBody>
-      </p:sp>
-      <p:sp>
-        <p:nvSpPr>
-          <p:cNvPr id="60" name="Rectangle 59"/>
-          <p:cNvSpPr/>
-          <p:nvPr/>
-        </p:nvSpPr>
-        <p:spPr>
-          <a:xfrm>
-            <a:off x="365760" y="5513831"/>
-            <a:ext cx="11430000" cy="457200"/>
-          </a:xfrm>
-          <a:prstGeom prst="rect">
-            <a:avLst/>
-          </a:prstGeom>
-          <a:solidFill>
-            <a:srgbClr val="E8F0FE"/>
-          </a:solidFill>
-          <a:ln>
-            <a:noFill/>
-          </a:ln>
-        </p:spPr>
-        <p:style>
-          <a:lnRef idx="1">
-            <a:schemeClr val="accent1"/>
-          </a:lnRef>
-          <a:fillRef idx="3">
-            <a:schemeClr val="accent1"/>
-          </a:fillRef>
-          <a:effectRef idx="2">
-            <a:schemeClr val="accent1"/>
-          </a:effectRef>
-          <a:fontRef idx="minor">
-            <a:schemeClr val="lt1"/>
-          </a:fontRef>
-        </p:style>
-        <p:txBody>
-          <a:bodyPr rtlCol="0" anchor="ctr"/>
-          <a:lstStyle/>
-          <a:p>
-            <a:pPr algn="ctr"/>
-          </a:p>
-        </p:txBody>
-      </p:sp>
-      <p:sp>
-        <p:nvSpPr>
-          <p:cNvPr id="61" name="TextBox 60"/>
-          <p:cNvSpPr txBox="1"/>
-          <p:nvPr/>
-        </p:nvSpPr>
-        <p:spPr>
-          <a:xfrm>
-            <a:off x="502920" y="5559552"/>
+          <p:cNvPr id="68" name="TextBox 67"/>
+          <p:cNvSpPr txBox="1"/>
+          <p:nvPr/>
+        </p:nvSpPr>
+        <p:spPr>
+          <a:xfrm>
+            <a:off x="502920" y="6135624"/>
             <a:ext cx="11155680" cy="347472"/>
           </a:xfrm>
           <a:prstGeom prst="rect">
@@ -10602,7 +10835,7 @@
                   <a:srgbClr val="002F6C"/>
                 </a:solidFill>
               </a:rPr>
-              <a:t>Tier 2 — Mensagens por Vertical (50 Contas)</a:t>
+              <a:t>Tier 2 — Mensagens por Vertical (23 Contas)</a:t>
             </a:r>
           </a:p>
         </p:txBody>
@@ -10766,7 +10999,7 @@
                 </a:solidFill>
               </a:rPr>
               <a:t>Agro /
-Bioenergia</a:t>
+Alimentos</a:t>
             </a:r>
           </a:p>
         </p:txBody>
@@ -10843,7 +11076,7 @@
                   <a:srgbClr val="FFFFFF"/>
                 </a:solidFill>
               </a:rPr>
-              <a:t>25 contas</a:t>
+              <a:t>10 contas</a:t>
             </a:r>
           </a:p>
         </p:txBody>
@@ -10954,7 +11187,7 @@
                   <a:srgbClr val="444444"/>
                 </a:solidFill>
               </a:rPr>
-              <a:t>"Na safra, seu S4 não pode travar. Cada relatório no transacional custa performance."</a:t>
+              <a:t>"Na safra, seu S4 não pode travar. Cada relatório no transacional custa performance e aparece na fatura."</a:t>
             </a:r>
           </a:p>
         </p:txBody>
@@ -11133,7 +11366,10 @@
                   <a:srgbClr val="444444"/>
                 </a:solidFill>
               </a:rPr>
-              <a:t>Atvos, São Martinho, Citrosuco, CTC, Coopercitrus, Copercana, Usina Coruripe, Tereos + 17 outras</a:t>
+              <a:t>Cocatrel · Usina São Manoel · VB Alimentos
+TMG · BrasilAgro · Cotrijal
+Sementes Jotabasso · Verde Campo
+Alvoar · Cornélio Brennand</a:t>
             </a:r>
           </a:p>
         </p:txBody>
@@ -11196,7 +11432,7 @@
             <a:avLst/>
           </a:prstGeom>
           <a:solidFill>
-            <a:srgbClr val="002F6C"/>
+            <a:srgbClr val="C0392B"/>
           </a:solidFill>
           <a:ln>
             <a:noFill/>
@@ -11254,7 +11490,7 @@
                 </a:solidFill>
               </a:rPr>
               <a:t>Energia /
-Utilities</a:t>
+Indústria</a:t>
             </a:r>
           </a:p>
         </p:txBody>
@@ -11269,6 +11505,418 @@
           <a:xfrm>
             <a:off x="6894576" y="1051560"/>
             <a:ext cx="1188720" cy="384048"/>
+          </a:xfrm>
+          <a:prstGeom prst="rect">
+            <a:avLst/>
+          </a:prstGeom>
+          <a:solidFill>
+            <a:srgbClr val="C0392B"/>
+          </a:solidFill>
+          <a:ln>
+            <a:noFill/>
+          </a:ln>
+        </p:spPr>
+        <p:style>
+          <a:lnRef idx="1">
+            <a:schemeClr val="accent1"/>
+          </a:lnRef>
+          <a:fillRef idx="3">
+            <a:schemeClr val="accent1"/>
+          </a:fillRef>
+          <a:effectRef idx="2">
+            <a:schemeClr val="accent1"/>
+          </a:effectRef>
+          <a:fontRef idx="minor">
+            <a:schemeClr val="lt1"/>
+          </a:fontRef>
+        </p:style>
+        <p:txBody>
+          <a:bodyPr rtlCol="0" anchor="ctr"/>
+          <a:lstStyle/>
+          <a:p>
+            <a:pPr algn="ctr"/>
+          </a:p>
+        </p:txBody>
+      </p:sp>
+      <p:sp>
+        <p:nvSpPr>
+          <p:cNvPr id="23" name="TextBox 22"/>
+          <p:cNvSpPr txBox="1"/>
+          <p:nvPr/>
+        </p:nvSpPr>
+        <p:spPr>
+          <a:xfrm>
+            <a:off x="6894576" y="1051560"/>
+            <a:ext cx="1188720" cy="384048"/>
+          </a:xfrm>
+          <a:prstGeom prst="rect">
+            <a:avLst/>
+          </a:prstGeom>
+          <a:noFill/>
+        </p:spPr>
+        <p:txBody>
+          <a:bodyPr wrap="square">
+            <a:spAutoFit/>
+          </a:bodyPr>
+          <a:lstStyle/>
+          <a:p>
+            <a:pPr algn="ctr"/>
+            <a:r>
+              <a:rPr sz="1100" b="1" i="0">
+                <a:solidFill>
+                  <a:srgbClr val="FFFFFF"/>
+                </a:solidFill>
+              </a:rPr>
+              <a:t>8 contas</a:t>
+            </a:r>
+          </a:p>
+        </p:txBody>
+      </p:sp>
+      <p:sp>
+        <p:nvSpPr>
+          <p:cNvPr id="24" name="Rectangle 23"/>
+          <p:cNvSpPr/>
+          <p:nvPr/>
+        </p:nvSpPr>
+        <p:spPr>
+          <a:xfrm>
+            <a:off x="4535424" y="1572768"/>
+            <a:ext cx="3474720" cy="45720"/>
+          </a:xfrm>
+          <a:prstGeom prst="rect">
+            <a:avLst/>
+          </a:prstGeom>
+          <a:solidFill>
+            <a:srgbClr val="C0392B"/>
+          </a:solidFill>
+          <a:ln>
+            <a:noFill/>
+          </a:ln>
+        </p:spPr>
+        <p:style>
+          <a:lnRef idx="1">
+            <a:schemeClr val="accent1"/>
+          </a:lnRef>
+          <a:fillRef idx="3">
+            <a:schemeClr val="accent1"/>
+          </a:fillRef>
+          <a:effectRef idx="2">
+            <a:schemeClr val="accent1"/>
+          </a:effectRef>
+          <a:fontRef idx="minor">
+            <a:schemeClr val="lt1"/>
+          </a:fontRef>
+        </p:style>
+        <p:txBody>
+          <a:bodyPr rtlCol="0" anchor="ctr"/>
+          <a:lstStyle/>
+          <a:p>
+            <a:pPr algn="ctr"/>
+          </a:p>
+        </p:txBody>
+      </p:sp>
+      <p:sp>
+        <p:nvSpPr>
+          <p:cNvPr id="25" name="TextBox 24"/>
+          <p:cNvSpPr txBox="1"/>
+          <p:nvPr/>
+        </p:nvSpPr>
+        <p:spPr>
+          <a:xfrm>
+            <a:off x="4535424" y="1664208"/>
+            <a:ext cx="3474720" cy="256032"/>
+          </a:xfrm>
+          <a:prstGeom prst="rect">
+            <a:avLst/>
+          </a:prstGeom>
+          <a:noFill/>
+        </p:spPr>
+        <p:txBody>
+          <a:bodyPr wrap="square">
+            <a:spAutoFit/>
+          </a:bodyPr>
+          <a:lstStyle/>
+          <a:p>
+            <a:pPr algn="l"/>
+            <a:r>
+              <a:rPr sz="900" b="1" i="0">
+                <a:solidFill>
+                  <a:srgbClr val="002F6C"/>
+                </a:solidFill>
+              </a:rPr>
+              <a:t>Intro text LinkedIn:</a:t>
+            </a:r>
+          </a:p>
+        </p:txBody>
+      </p:sp>
+      <p:sp>
+        <p:nvSpPr>
+          <p:cNvPr id="26" name="TextBox 25"/>
+          <p:cNvSpPr txBox="1"/>
+          <p:nvPr/>
+        </p:nvSpPr>
+        <p:spPr>
+          <a:xfrm>
+            <a:off x="4535424" y="1920240"/>
+            <a:ext cx="3474720" cy="914400"/>
+          </a:xfrm>
+          <a:prstGeom prst="rect">
+            <a:avLst/>
+          </a:prstGeom>
+          <a:noFill/>
+        </p:spPr>
+        <p:txBody>
+          <a:bodyPr wrap="square">
+            <a:spAutoFit/>
+          </a:bodyPr>
+          <a:lstStyle/>
+          <a:p>
+            <a:pPr algn="l"/>
+            <a:r>
+              <a:rPr sz="1000" b="0" i="1">
+                <a:solidFill>
+                  <a:srgbClr val="444444"/>
+                </a:solidFill>
+              </a:rPr>
+              <a:t>"A SAP vai bloquear suas extrações via RFC. Empresas com arquiteturas legadas estão em risco operacional."</a:t>
+            </a:r>
+          </a:p>
+        </p:txBody>
+      </p:sp>
+      <p:sp>
+        <p:nvSpPr>
+          <p:cNvPr id="27" name="TextBox 26"/>
+          <p:cNvSpPr txBox="1"/>
+          <p:nvPr/>
+        </p:nvSpPr>
+        <p:spPr>
+          <a:xfrm>
+            <a:off x="4535424" y="2880360"/>
+            <a:ext cx="3474720" cy="256032"/>
+          </a:xfrm>
+          <a:prstGeom prst="rect">
+            <a:avLst/>
+          </a:prstGeom>
+          <a:noFill/>
+        </p:spPr>
+        <p:txBody>
+          <a:bodyPr wrap="square">
+            <a:spAutoFit/>
+          </a:bodyPr>
+          <a:lstStyle/>
+          <a:p>
+            <a:pPr algn="l"/>
+            <a:r>
+              <a:rPr sz="900" b="1" i="0">
+                <a:solidFill>
+                  <a:srgbClr val="002F6C"/>
+                </a:solidFill>
+              </a:rPr>
+              <a:t>Headline:</a:t>
+            </a:r>
+          </a:p>
+        </p:txBody>
+      </p:sp>
+      <p:sp>
+        <p:nvSpPr>
+          <p:cNvPr id="28" name="Rectangle 27"/>
+          <p:cNvSpPr/>
+          <p:nvPr/>
+        </p:nvSpPr>
+        <p:spPr>
+          <a:xfrm>
+            <a:off x="4535424" y="3154680"/>
+            <a:ext cx="3474720" cy="502920"/>
+          </a:xfrm>
+          <a:prstGeom prst="rect">
+            <a:avLst/>
+          </a:prstGeom>
+          <a:solidFill>
+            <a:srgbClr val="C0392B"/>
+          </a:solidFill>
+          <a:ln>
+            <a:noFill/>
+          </a:ln>
+        </p:spPr>
+        <p:style>
+          <a:lnRef idx="1">
+            <a:schemeClr val="accent1"/>
+          </a:lnRef>
+          <a:fillRef idx="3">
+            <a:schemeClr val="accent1"/>
+          </a:fillRef>
+          <a:effectRef idx="2">
+            <a:schemeClr val="accent1"/>
+          </a:effectRef>
+          <a:fontRef idx="minor">
+            <a:schemeClr val="lt1"/>
+          </a:fontRef>
+        </p:style>
+        <p:txBody>
+          <a:bodyPr rtlCol="0" anchor="ctr"/>
+          <a:lstStyle/>
+          <a:p>
+            <a:pPr algn="ctr"/>
+          </a:p>
+        </p:txBody>
+      </p:sp>
+      <p:sp>
+        <p:nvSpPr>
+          <p:cNvPr id="29" name="TextBox 28"/>
+          <p:cNvSpPr txBox="1"/>
+          <p:nvPr/>
+        </p:nvSpPr>
+        <p:spPr>
+          <a:xfrm>
+            <a:off x="4626864" y="3200400"/>
+            <a:ext cx="3291840" cy="411480"/>
+          </a:xfrm>
+          <a:prstGeom prst="rect">
+            <a:avLst/>
+          </a:prstGeom>
+          <a:noFill/>
+        </p:spPr>
+        <p:txBody>
+          <a:bodyPr wrap="square">
+            <a:spAutoFit/>
+          </a:bodyPr>
+          <a:lstStyle/>
+          <a:p>
+            <a:pPr algn="l"/>
+            <a:r>
+              <a:rPr sz="1100" b="1" i="0">
+                <a:solidFill>
+                  <a:srgbClr val="FFFFFF"/>
+                </a:solidFill>
+              </a:rPr>
+              <a:t>"Sua extração via RFC está em risco"</a:t>
+            </a:r>
+          </a:p>
+        </p:txBody>
+      </p:sp>
+      <p:sp>
+        <p:nvSpPr>
+          <p:cNvPr id="30" name="TextBox 29"/>
+          <p:cNvSpPr txBox="1"/>
+          <p:nvPr/>
+        </p:nvSpPr>
+        <p:spPr>
+          <a:xfrm>
+            <a:off x="4535424" y="3749039"/>
+            <a:ext cx="3474720" cy="256032"/>
+          </a:xfrm>
+          <a:prstGeom prst="rect">
+            <a:avLst/>
+          </a:prstGeom>
+          <a:noFill/>
+        </p:spPr>
+        <p:txBody>
+          <a:bodyPr wrap="square">
+            <a:spAutoFit/>
+          </a:bodyPr>
+          <a:lstStyle/>
+          <a:p>
+            <a:pPr algn="l"/>
+            <a:r>
+              <a:rPr sz="900" b="1" i="0">
+                <a:solidFill>
+                  <a:srgbClr val="002F6C"/>
+                </a:solidFill>
+              </a:rPr>
+              <a:t>Empresas:</a:t>
+            </a:r>
+          </a:p>
+        </p:txBody>
+      </p:sp>
+      <p:sp>
+        <p:nvSpPr>
+          <p:cNvPr id="31" name="TextBox 30"/>
+          <p:cNvSpPr txBox="1"/>
+          <p:nvPr/>
+        </p:nvSpPr>
+        <p:spPr>
+          <a:xfrm>
+            <a:off x="4535424" y="4005072"/>
+            <a:ext cx="3474720" cy="1005840"/>
+          </a:xfrm>
+          <a:prstGeom prst="rect">
+            <a:avLst/>
+          </a:prstGeom>
+          <a:noFill/>
+        </p:spPr>
+        <p:txBody>
+          <a:bodyPr wrap="square">
+            <a:spAutoFit/>
+          </a:bodyPr>
+          <a:lstStyle/>
+          <a:p>
+            <a:pPr algn="l"/>
+            <a:r>
+              <a:rPr sz="900" b="0" i="1">
+                <a:solidFill>
+                  <a:srgbClr val="444444"/>
+                </a:solidFill>
+              </a:rPr>
+              <a:t>Aliança Geração de Energia · Petronas · Argo Energia
+Farmax · Brametal · Morlan
+Cimentos Liz · FCC Química</a:t>
+            </a:r>
+          </a:p>
+        </p:txBody>
+      </p:sp>
+      <p:sp>
+        <p:nvSpPr>
+          <p:cNvPr id="32" name="Rectangle 31"/>
+          <p:cNvSpPr/>
+          <p:nvPr/>
+        </p:nvSpPr>
+        <p:spPr>
+          <a:xfrm>
+            <a:off x="8485632" y="960120"/>
+            <a:ext cx="3749039" cy="5074920"/>
+          </a:xfrm>
+          <a:prstGeom prst="rect">
+            <a:avLst/>
+          </a:prstGeom>
+          <a:solidFill>
+            <a:srgbClr val="E8F0FE"/>
+          </a:solidFill>
+          <a:ln>
+            <a:noFill/>
+          </a:ln>
+        </p:spPr>
+        <p:style>
+          <a:lnRef idx="1">
+            <a:schemeClr val="accent1"/>
+          </a:lnRef>
+          <a:fillRef idx="3">
+            <a:schemeClr val="accent1"/>
+          </a:fillRef>
+          <a:effectRef idx="2">
+            <a:schemeClr val="accent1"/>
+          </a:effectRef>
+          <a:fontRef idx="minor">
+            <a:schemeClr val="lt1"/>
+          </a:fontRef>
+        </p:style>
+        <p:txBody>
+          <a:bodyPr rtlCol="0" anchor="ctr"/>
+          <a:lstStyle/>
+          <a:p>
+            <a:pPr algn="ctr"/>
+          </a:p>
+        </p:txBody>
+      </p:sp>
+      <p:sp>
+        <p:nvSpPr>
+          <p:cNvPr id="33" name="Rectangle 32"/>
+          <p:cNvSpPr/>
+          <p:nvPr/>
+        </p:nvSpPr>
+        <p:spPr>
+          <a:xfrm>
+            <a:off x="8485632" y="960120"/>
+            <a:ext cx="3749039" cy="73152"/>
           </a:xfrm>
           <a:prstGeom prst="rect">
             <a:avLst/>
@@ -11304,48 +11952,49 @@
       </p:sp>
       <p:sp>
         <p:nvSpPr>
-          <p:cNvPr id="23" name="TextBox 22"/>
-          <p:cNvSpPr txBox="1"/>
-          <p:nvPr/>
-        </p:nvSpPr>
-        <p:spPr>
-          <a:xfrm>
-            <a:off x="6894576" y="1051560"/>
+          <p:cNvPr id="34" name="TextBox 33"/>
+          <p:cNvSpPr txBox="1"/>
+          <p:nvPr/>
+        </p:nvSpPr>
+        <p:spPr>
+          <a:xfrm>
+            <a:off x="8595360" y="1051560"/>
+            <a:ext cx="2286000" cy="502920"/>
+          </a:xfrm>
+          <a:prstGeom prst="rect">
+            <a:avLst/>
+          </a:prstGeom>
+          <a:noFill/>
+        </p:spPr>
+        <p:txBody>
+          <a:bodyPr wrap="square">
+            <a:spAutoFit/>
+          </a:bodyPr>
+          <a:lstStyle/>
+          <a:p>
+            <a:pPr algn="l"/>
+            <a:r>
+              <a:rPr sz="1300" b="1" i="0">
+                <a:solidFill>
+                  <a:srgbClr val="002F6C"/>
+                </a:solidFill>
+              </a:rPr>
+              <a:t>Logística /
+Saúde / Farma</a:t>
+            </a:r>
+          </a:p>
+        </p:txBody>
+      </p:sp>
+      <p:sp>
+        <p:nvSpPr>
+          <p:cNvPr id="35" name="Rectangle 34"/>
+          <p:cNvSpPr/>
+          <p:nvPr/>
+        </p:nvSpPr>
+        <p:spPr>
+          <a:xfrm>
+            <a:off x="10954512" y="1051560"/>
             <a:ext cx="1188720" cy="384048"/>
-          </a:xfrm>
-          <a:prstGeom prst="rect">
-            <a:avLst/>
-          </a:prstGeom>
-          <a:noFill/>
-        </p:spPr>
-        <p:txBody>
-          <a:bodyPr wrap="square">
-            <a:spAutoFit/>
-          </a:bodyPr>
-          <a:lstStyle/>
-          <a:p>
-            <a:pPr algn="ctr"/>
-            <a:r>
-              <a:rPr sz="1100" b="1" i="0">
-                <a:solidFill>
-                  <a:srgbClr val="FFFFFF"/>
-                </a:solidFill>
-              </a:rPr>
-              <a:t>12 contas</a:t>
-            </a:r>
-          </a:p>
-        </p:txBody>
-      </p:sp>
-      <p:sp>
-        <p:nvSpPr>
-          <p:cNvPr id="24" name="Rectangle 23"/>
-          <p:cNvSpPr/>
-          <p:nvPr/>
-        </p:nvSpPr>
-        <p:spPr>
-          <a:xfrm>
-            <a:off x="4535424" y="1572768"/>
-            <a:ext cx="3474720" cy="45720"/>
           </a:xfrm>
           <a:prstGeom prst="rect">
             <a:avLst/>
@@ -11381,116 +12030,48 @@
       </p:sp>
       <p:sp>
         <p:nvSpPr>
-          <p:cNvPr id="25" name="TextBox 24"/>
-          <p:cNvSpPr txBox="1"/>
-          <p:nvPr/>
-        </p:nvSpPr>
-        <p:spPr>
-          <a:xfrm>
-            <a:off x="4535424" y="1664208"/>
-            <a:ext cx="3474720" cy="256032"/>
-          </a:xfrm>
-          <a:prstGeom prst="rect">
-            <a:avLst/>
-          </a:prstGeom>
-          <a:noFill/>
-        </p:spPr>
-        <p:txBody>
-          <a:bodyPr wrap="square">
-            <a:spAutoFit/>
-          </a:bodyPr>
-          <a:lstStyle/>
-          <a:p>
-            <a:pPr algn="l"/>
-            <a:r>
-              <a:rPr sz="900" b="1" i="0">
-                <a:solidFill>
-                  <a:srgbClr val="002F6C"/>
-                </a:solidFill>
-              </a:rPr>
-              <a:t>Intro text LinkedIn:</a:t>
-            </a:r>
-          </a:p>
-        </p:txBody>
-      </p:sp>
-      <p:sp>
-        <p:nvSpPr>
-          <p:cNvPr id="26" name="TextBox 25"/>
-          <p:cNvSpPr txBox="1"/>
-          <p:nvPr/>
-        </p:nvSpPr>
-        <p:spPr>
-          <a:xfrm>
-            <a:off x="4535424" y="1920240"/>
-            <a:ext cx="3474720" cy="914400"/>
-          </a:xfrm>
-          <a:prstGeom prst="rect">
-            <a:avLst/>
-          </a:prstGeom>
-          <a:noFill/>
-        </p:spPr>
-        <p:txBody>
-          <a:bodyPr wrap="square">
-            <a:spAutoFit/>
-          </a:bodyPr>
-          <a:lstStyle/>
-          <a:p>
-            <a:pPr algn="l"/>
-            <a:r>
-              <a:rPr sz="1000" b="0" i="1">
-                <a:solidFill>
-                  <a:srgbClr val="444444"/>
-                </a:solidFill>
-              </a:rPr>
-              <a:t>"A SAP vai bloquear extrações via RFC. Empresas de energia com arquiteturas legadas estão em alerta."</a:t>
-            </a:r>
-          </a:p>
-        </p:txBody>
-      </p:sp>
-      <p:sp>
-        <p:nvSpPr>
-          <p:cNvPr id="27" name="TextBox 26"/>
-          <p:cNvSpPr txBox="1"/>
-          <p:nvPr/>
-        </p:nvSpPr>
-        <p:spPr>
-          <a:xfrm>
-            <a:off x="4535424" y="2880360"/>
-            <a:ext cx="3474720" cy="256032"/>
-          </a:xfrm>
-          <a:prstGeom prst="rect">
-            <a:avLst/>
-          </a:prstGeom>
-          <a:noFill/>
-        </p:spPr>
-        <p:txBody>
-          <a:bodyPr wrap="square">
-            <a:spAutoFit/>
-          </a:bodyPr>
-          <a:lstStyle/>
-          <a:p>
-            <a:pPr algn="l"/>
-            <a:r>
-              <a:rPr sz="900" b="1" i="0">
-                <a:solidFill>
-                  <a:srgbClr val="002F6C"/>
-                </a:solidFill>
-              </a:rPr>
-              <a:t>Headline:</a:t>
-            </a:r>
-          </a:p>
-        </p:txBody>
-      </p:sp>
-      <p:sp>
-        <p:nvSpPr>
-          <p:cNvPr id="28" name="Rectangle 27"/>
+          <p:cNvPr id="36" name="TextBox 35"/>
+          <p:cNvSpPr txBox="1"/>
+          <p:nvPr/>
+        </p:nvSpPr>
+        <p:spPr>
+          <a:xfrm>
+            <a:off x="10954512" y="1051560"/>
+            <a:ext cx="1188720" cy="384048"/>
+          </a:xfrm>
+          <a:prstGeom prst="rect">
+            <a:avLst/>
+          </a:prstGeom>
+          <a:noFill/>
+        </p:spPr>
+        <p:txBody>
+          <a:bodyPr wrap="square">
+            <a:spAutoFit/>
+          </a:bodyPr>
+          <a:lstStyle/>
+          <a:p>
+            <a:pPr algn="ctr"/>
+            <a:r>
+              <a:rPr sz="1100" b="1" i="0">
+                <a:solidFill>
+                  <a:srgbClr val="FFFFFF"/>
+                </a:solidFill>
+              </a:rPr>
+              <a:t>5 contas</a:t>
+            </a:r>
+          </a:p>
+        </p:txBody>
+      </p:sp>
+      <p:sp>
+        <p:nvSpPr>
+          <p:cNvPr id="37" name="Rectangle 36"/>
           <p:cNvSpPr/>
           <p:nvPr/>
         </p:nvSpPr>
         <p:spPr>
           <a:xfrm>
-            <a:off x="4535424" y="3154680"/>
-            <a:ext cx="3474720" cy="502920"/>
+            <a:off x="8595360" y="1572768"/>
+            <a:ext cx="3474720" cy="45720"/>
           </a:xfrm>
           <a:prstGeom prst="rect">
             <a:avLst/>
@@ -11526,47 +12107,13 @@
       </p:sp>
       <p:sp>
         <p:nvSpPr>
-          <p:cNvPr id="29" name="TextBox 28"/>
-          <p:cNvSpPr txBox="1"/>
-          <p:nvPr/>
-        </p:nvSpPr>
-        <p:spPr>
-          <a:xfrm>
-            <a:off x="4626864" y="3200400"/>
-            <a:ext cx="3291840" cy="411480"/>
-          </a:xfrm>
-          <a:prstGeom prst="rect">
-            <a:avLst/>
-          </a:prstGeom>
-          <a:noFill/>
-        </p:spPr>
-        <p:txBody>
-          <a:bodyPr wrap="square">
-            <a:spAutoFit/>
-          </a:bodyPr>
-          <a:lstStyle/>
-          <a:p>
-            <a:pPr algn="l"/>
-            <a:r>
-              <a:rPr sz="1100" b="1" i="0">
-                <a:solidFill>
-                  <a:srgbClr val="FFFFFF"/>
-                </a:solidFill>
-              </a:rPr>
-              <a:t>"Sua extração via RFC está em risco"</a:t>
-            </a:r>
-          </a:p>
-        </p:txBody>
-      </p:sp>
-      <p:sp>
-        <p:nvSpPr>
-          <p:cNvPr id="30" name="TextBox 29"/>
-          <p:cNvSpPr txBox="1"/>
-          <p:nvPr/>
-        </p:nvSpPr>
-        <p:spPr>
-          <a:xfrm>
-            <a:off x="4535424" y="3749039"/>
+          <p:cNvPr id="38" name="TextBox 37"/>
+          <p:cNvSpPr txBox="1"/>
+          <p:nvPr/>
+        </p:nvSpPr>
+        <p:spPr>
+          <a:xfrm>
+            <a:off x="8595360" y="1664208"/>
             <a:ext cx="3474720" cy="256032"/>
           </a:xfrm>
           <a:prstGeom prst="rect">
@@ -11587,61 +12134,95 @@
                   <a:srgbClr val="002F6C"/>
                 </a:solidFill>
               </a:rPr>
-              <a:t>Empresas:</a:t>
-            </a:r>
-          </a:p>
-        </p:txBody>
-      </p:sp>
-      <p:sp>
-        <p:nvSpPr>
-          <p:cNvPr id="31" name="TextBox 30"/>
-          <p:cNvSpPr txBox="1"/>
-          <p:nvPr/>
-        </p:nvSpPr>
-        <p:spPr>
-          <a:xfrm>
-            <a:off x="4535424" y="4005072"/>
-            <a:ext cx="3474720" cy="1005840"/>
-          </a:xfrm>
-          <a:prstGeom prst="rect">
-            <a:avLst/>
-          </a:prstGeom>
-          <a:noFill/>
-        </p:spPr>
-        <p:txBody>
-          <a:bodyPr wrap="square">
-            <a:spAutoFit/>
-          </a:bodyPr>
-          <a:lstStyle/>
-          <a:p>
-            <a:pPr algn="l"/>
-            <a:r>
-              <a:rPr sz="900" b="0" i="1">
+              <a:t>Intro text LinkedIn:</a:t>
+            </a:r>
+          </a:p>
+        </p:txBody>
+      </p:sp>
+      <p:sp>
+        <p:nvSpPr>
+          <p:cNvPr id="39" name="TextBox 38"/>
+          <p:cNvSpPr txBox="1"/>
+          <p:nvPr/>
+        </p:nvSpPr>
+        <p:spPr>
+          <a:xfrm>
+            <a:off x="8595360" y="1920240"/>
+            <a:ext cx="3474720" cy="914400"/>
+          </a:xfrm>
+          <a:prstGeom prst="rect">
+            <a:avLst/>
+          </a:prstGeom>
+          <a:noFill/>
+        </p:spPr>
+        <p:txBody>
+          <a:bodyPr wrap="square">
+            <a:spAutoFit/>
+          </a:bodyPr>
+          <a:lstStyle/>
+          <a:p>
+            <a:pPr algn="l"/>
+            <a:r>
+              <a:rPr sz="1000" b="0" i="1">
                 <a:solidFill>
                   <a:srgbClr val="444444"/>
                 </a:solidFill>
               </a:rPr>
-              <a:t>Cemig, CPFL, Eletrobras, Samarco, Petrobras, BRK Ambiental, Nexa Resources + 5 outras</a:t>
-            </a:r>
-          </a:p>
-        </p:txBody>
-      </p:sp>
-      <p:sp>
-        <p:nvSpPr>
-          <p:cNvPr id="32" name="Rectangle 31"/>
+              <a:t>"O time de consultoria foi embora depois da implantação. Quem evolui seu ambiente SAC agora?"</a:t>
+            </a:r>
+          </a:p>
+        </p:txBody>
+      </p:sp>
+      <p:sp>
+        <p:nvSpPr>
+          <p:cNvPr id="40" name="TextBox 39"/>
+          <p:cNvSpPr txBox="1"/>
+          <p:nvPr/>
+        </p:nvSpPr>
+        <p:spPr>
+          <a:xfrm>
+            <a:off x="8595360" y="2880360"/>
+            <a:ext cx="3474720" cy="256032"/>
+          </a:xfrm>
+          <a:prstGeom prst="rect">
+            <a:avLst/>
+          </a:prstGeom>
+          <a:noFill/>
+        </p:spPr>
+        <p:txBody>
+          <a:bodyPr wrap="square">
+            <a:spAutoFit/>
+          </a:bodyPr>
+          <a:lstStyle/>
+          <a:p>
+            <a:pPr algn="l"/>
+            <a:r>
+              <a:rPr sz="900" b="1" i="0">
+                <a:solidFill>
+                  <a:srgbClr val="002F6C"/>
+                </a:solidFill>
+              </a:rPr>
+              <a:t>Headline:</a:t>
+            </a:r>
+          </a:p>
+        </p:txBody>
+      </p:sp>
+      <p:sp>
+        <p:nvSpPr>
+          <p:cNvPr id="41" name="Rectangle 40"/>
           <p:cNvSpPr/>
           <p:nvPr/>
         </p:nvSpPr>
         <p:spPr>
           <a:xfrm>
-            <a:off x="8485632" y="960120"/>
-            <a:ext cx="3749039" cy="5074920"/>
+            <a:off x="8595360" y="3154680"/>
+            <a:ext cx="3474720" cy="502920"/>
           </a:xfrm>
           <a:prstGeom prst="rect">
             <a:avLst/>
           </a:prstGeom>
           <a:solidFill>
-            <a:srgbClr val="E8F0FE"/>
+            <a:srgbClr val="002F6C"/>
           </a:solidFill>
           <a:ln>
             <a:noFill/>
@@ -11671,349 +12252,6 @@
       </p:sp>
       <p:sp>
         <p:nvSpPr>
-          <p:cNvPr id="33" name="Rectangle 32"/>
-          <p:cNvSpPr/>
-          <p:nvPr/>
-        </p:nvSpPr>
-        <p:spPr>
-          <a:xfrm>
-            <a:off x="8485632" y="960120"/>
-            <a:ext cx="3749039" cy="73152"/>
-          </a:xfrm>
-          <a:prstGeom prst="rect">
-            <a:avLst/>
-          </a:prstGeom>
-          <a:solidFill>
-            <a:srgbClr val="E67E22"/>
-          </a:solidFill>
-          <a:ln>
-            <a:noFill/>
-          </a:ln>
-        </p:spPr>
-        <p:style>
-          <a:lnRef idx="1">
-            <a:schemeClr val="accent1"/>
-          </a:lnRef>
-          <a:fillRef idx="3">
-            <a:schemeClr val="accent1"/>
-          </a:fillRef>
-          <a:effectRef idx="2">
-            <a:schemeClr val="accent1"/>
-          </a:effectRef>
-          <a:fontRef idx="minor">
-            <a:schemeClr val="lt1"/>
-          </a:fontRef>
-        </p:style>
-        <p:txBody>
-          <a:bodyPr rtlCol="0" anchor="ctr"/>
-          <a:lstStyle/>
-          <a:p>
-            <a:pPr algn="ctr"/>
-          </a:p>
-        </p:txBody>
-      </p:sp>
-      <p:sp>
-        <p:nvSpPr>
-          <p:cNvPr id="34" name="TextBox 33"/>
-          <p:cNvSpPr txBox="1"/>
-          <p:nvPr/>
-        </p:nvSpPr>
-        <p:spPr>
-          <a:xfrm>
-            <a:off x="8595360" y="1051560"/>
-            <a:ext cx="2286000" cy="502920"/>
-          </a:xfrm>
-          <a:prstGeom prst="rect">
-            <a:avLst/>
-          </a:prstGeom>
-          <a:noFill/>
-        </p:spPr>
-        <p:txBody>
-          <a:bodyPr wrap="square">
-            <a:spAutoFit/>
-          </a:bodyPr>
-          <a:lstStyle/>
-          <a:p>
-            <a:pPr algn="l"/>
-            <a:r>
-              <a:rPr sz="1300" b="1" i="0">
-                <a:solidFill>
-                  <a:srgbClr val="002F6C"/>
-                </a:solidFill>
-              </a:rPr>
-              <a:t>Indústria /
-Manufatura</a:t>
-            </a:r>
-          </a:p>
-        </p:txBody>
-      </p:sp>
-      <p:sp>
-        <p:nvSpPr>
-          <p:cNvPr id="35" name="Rectangle 34"/>
-          <p:cNvSpPr/>
-          <p:nvPr/>
-        </p:nvSpPr>
-        <p:spPr>
-          <a:xfrm>
-            <a:off x="10954512" y="1051560"/>
-            <a:ext cx="1188720" cy="384048"/>
-          </a:xfrm>
-          <a:prstGeom prst="rect">
-            <a:avLst/>
-          </a:prstGeom>
-          <a:solidFill>
-            <a:srgbClr val="E67E22"/>
-          </a:solidFill>
-          <a:ln>
-            <a:noFill/>
-          </a:ln>
-        </p:spPr>
-        <p:style>
-          <a:lnRef idx="1">
-            <a:schemeClr val="accent1"/>
-          </a:lnRef>
-          <a:fillRef idx="3">
-            <a:schemeClr val="accent1"/>
-          </a:fillRef>
-          <a:effectRef idx="2">
-            <a:schemeClr val="accent1"/>
-          </a:effectRef>
-          <a:fontRef idx="minor">
-            <a:schemeClr val="lt1"/>
-          </a:fontRef>
-        </p:style>
-        <p:txBody>
-          <a:bodyPr rtlCol="0" anchor="ctr"/>
-          <a:lstStyle/>
-          <a:p>
-            <a:pPr algn="ctr"/>
-          </a:p>
-        </p:txBody>
-      </p:sp>
-      <p:sp>
-        <p:nvSpPr>
-          <p:cNvPr id="36" name="TextBox 35"/>
-          <p:cNvSpPr txBox="1"/>
-          <p:nvPr/>
-        </p:nvSpPr>
-        <p:spPr>
-          <a:xfrm>
-            <a:off x="10954512" y="1051560"/>
-            <a:ext cx="1188720" cy="384048"/>
-          </a:xfrm>
-          <a:prstGeom prst="rect">
-            <a:avLst/>
-          </a:prstGeom>
-          <a:noFill/>
-        </p:spPr>
-        <p:txBody>
-          <a:bodyPr wrap="square">
-            <a:spAutoFit/>
-          </a:bodyPr>
-          <a:lstStyle/>
-          <a:p>
-            <a:pPr algn="ctr"/>
-            <a:r>
-              <a:rPr sz="1100" b="1" i="0">
-                <a:solidFill>
-                  <a:srgbClr val="FFFFFF"/>
-                </a:solidFill>
-              </a:rPr>
-              <a:t>13 contas</a:t>
-            </a:r>
-          </a:p>
-        </p:txBody>
-      </p:sp>
-      <p:sp>
-        <p:nvSpPr>
-          <p:cNvPr id="37" name="Rectangle 36"/>
-          <p:cNvSpPr/>
-          <p:nvPr/>
-        </p:nvSpPr>
-        <p:spPr>
-          <a:xfrm>
-            <a:off x="8595360" y="1572768"/>
-            <a:ext cx="3474720" cy="45720"/>
-          </a:xfrm>
-          <a:prstGeom prst="rect">
-            <a:avLst/>
-          </a:prstGeom>
-          <a:solidFill>
-            <a:srgbClr val="E67E22"/>
-          </a:solidFill>
-          <a:ln>
-            <a:noFill/>
-          </a:ln>
-        </p:spPr>
-        <p:style>
-          <a:lnRef idx="1">
-            <a:schemeClr val="accent1"/>
-          </a:lnRef>
-          <a:fillRef idx="3">
-            <a:schemeClr val="accent1"/>
-          </a:fillRef>
-          <a:effectRef idx="2">
-            <a:schemeClr val="accent1"/>
-          </a:effectRef>
-          <a:fontRef idx="minor">
-            <a:schemeClr val="lt1"/>
-          </a:fontRef>
-        </p:style>
-        <p:txBody>
-          <a:bodyPr rtlCol="0" anchor="ctr"/>
-          <a:lstStyle/>
-          <a:p>
-            <a:pPr algn="ctr"/>
-          </a:p>
-        </p:txBody>
-      </p:sp>
-      <p:sp>
-        <p:nvSpPr>
-          <p:cNvPr id="38" name="TextBox 37"/>
-          <p:cNvSpPr txBox="1"/>
-          <p:nvPr/>
-        </p:nvSpPr>
-        <p:spPr>
-          <a:xfrm>
-            <a:off x="8595360" y="1664208"/>
-            <a:ext cx="3474720" cy="256032"/>
-          </a:xfrm>
-          <a:prstGeom prst="rect">
-            <a:avLst/>
-          </a:prstGeom>
-          <a:noFill/>
-        </p:spPr>
-        <p:txBody>
-          <a:bodyPr wrap="square">
-            <a:spAutoFit/>
-          </a:bodyPr>
-          <a:lstStyle/>
-          <a:p>
-            <a:pPr algn="l"/>
-            <a:r>
-              <a:rPr sz="900" b="1" i="0">
-                <a:solidFill>
-                  <a:srgbClr val="002F6C"/>
-                </a:solidFill>
-              </a:rPr>
-              <a:t>Intro text LinkedIn:</a:t>
-            </a:r>
-          </a:p>
-        </p:txBody>
-      </p:sp>
-      <p:sp>
-        <p:nvSpPr>
-          <p:cNvPr id="39" name="TextBox 38"/>
-          <p:cNvSpPr txBox="1"/>
-          <p:nvPr/>
-        </p:nvSpPr>
-        <p:spPr>
-          <a:xfrm>
-            <a:off x="8595360" y="1920240"/>
-            <a:ext cx="3474720" cy="914400"/>
-          </a:xfrm>
-          <a:prstGeom prst="rect">
-            <a:avLst/>
-          </a:prstGeom>
-          <a:noFill/>
-        </p:spPr>
-        <p:txBody>
-          <a:bodyPr wrap="square">
-            <a:spAutoFit/>
-          </a:bodyPr>
-          <a:lstStyle/>
-          <a:p>
-            <a:pPr algn="l"/>
-            <a:r>
-              <a:rPr sz="1000" b="0" i="1">
-                <a:solidFill>
-                  <a:srgbClr val="444444"/>
-                </a:solidFill>
-              </a:rPr>
-              <a:t>"O time de consultoria foi embora depois da implantação. Quem evolui seu SAC agora?"</a:t>
-            </a:r>
-          </a:p>
-        </p:txBody>
-      </p:sp>
-      <p:sp>
-        <p:nvSpPr>
-          <p:cNvPr id="40" name="TextBox 39"/>
-          <p:cNvSpPr txBox="1"/>
-          <p:nvPr/>
-        </p:nvSpPr>
-        <p:spPr>
-          <a:xfrm>
-            <a:off x="8595360" y="2880360"/>
-            <a:ext cx="3474720" cy="256032"/>
-          </a:xfrm>
-          <a:prstGeom prst="rect">
-            <a:avLst/>
-          </a:prstGeom>
-          <a:noFill/>
-        </p:spPr>
-        <p:txBody>
-          <a:bodyPr wrap="square">
-            <a:spAutoFit/>
-          </a:bodyPr>
-          <a:lstStyle/>
-          <a:p>
-            <a:pPr algn="l"/>
-            <a:r>
-              <a:rPr sz="900" b="1" i="0">
-                <a:solidFill>
-                  <a:srgbClr val="002F6C"/>
-                </a:solidFill>
-              </a:rPr>
-              <a:t>Headline:</a:t>
-            </a:r>
-          </a:p>
-        </p:txBody>
-      </p:sp>
-      <p:sp>
-        <p:nvSpPr>
-          <p:cNvPr id="41" name="Rectangle 40"/>
-          <p:cNvSpPr/>
-          <p:nvPr/>
-        </p:nvSpPr>
-        <p:spPr>
-          <a:xfrm>
-            <a:off x="8595360" y="3154680"/>
-            <a:ext cx="3474720" cy="502920"/>
-          </a:xfrm>
-          <a:prstGeom prst="rect">
-            <a:avLst/>
-          </a:prstGeom>
-          <a:solidFill>
-            <a:srgbClr val="FFF3E0"/>
-          </a:solidFill>
-          <a:ln>
-            <a:noFill/>
-          </a:ln>
-        </p:spPr>
-        <p:style>
-          <a:lnRef idx="1">
-            <a:schemeClr val="accent1"/>
-          </a:lnRef>
-          <a:fillRef idx="3">
-            <a:schemeClr val="accent1"/>
-          </a:fillRef>
-          <a:effectRef idx="2">
-            <a:schemeClr val="accent1"/>
-          </a:effectRef>
-          <a:fontRef idx="minor">
-            <a:schemeClr val="lt1"/>
-          </a:fontRef>
-        </p:style>
-        <p:txBody>
-          <a:bodyPr rtlCol="0" anchor="ctr"/>
-          <a:lstStyle/>
-          <a:p>
-            <a:pPr algn="ctr"/>
-          </a:p>
-        </p:txBody>
-      </p:sp>
-      <p:sp>
-        <p:nvSpPr>
           <p:cNvPr id="42" name="TextBox 41"/>
           <p:cNvSpPr txBox="1"/>
           <p:nvPr/>
@@ -12038,7 +12276,7 @@
             <a:r>
               <a:rPr sz="1100" b="1" i="0">
                 <a:solidFill>
-                  <a:srgbClr val="002F6C"/>
+                  <a:srgbClr val="FFFFFF"/>
                 </a:solidFill>
               </a:rPr>
               <a:t>"Sem parceiro técnico para o SAC?"</a:t>
@@ -12109,7 +12347,9 @@
                   <a:srgbClr val="444444"/>
                 </a:solidFill>
               </a:rPr>
-              <a:t>Gerdau, Braskem, Embraer, Tupy, WEG, Tramontina, Klabin, Arauco, M. Dias Branco + 4 outras</a:t>
+              <a:t>BBM Logística · Rota das Bandeiras
+DELP Engenharia
+Althaia · Laboratório Teuto</a:t>
             </a:r>
           </a:p>
         </p:txBody>

--- a/marketing/campanhas/fabrica-de-analytics-q3-2026/Fabrica_Analytics_ABM_Q3_2026.pptx
+++ b/marketing/campanhas/fabrica-de-analytics-q3-2026/Fabrica_Analytics_ABM_Q3_2026.pptx
@@ -3362,12 +3362,12 @@
           <a:p>
             <a:pPr algn="l"/>
             <a:r>
-              <a:rPr sz="1800" b="1" i="0">
+              <a:rPr sz="1600" b="1" i="0">
                 <a:solidFill>
                   <a:srgbClr val="F5A800"/>
                 </a:solidFill>
               </a:rPr>
-              <a:t>Geração de Demanda + ABM</a:t>
+              <a:t>LinkedIn Ads + Email Marketing — Fase 1</a:t>
             </a:r>
           </a:p>
         </p:txBody>
@@ -3513,7 +3513,7 @@
                   <a:srgbClr val="F5A800"/>
                 </a:solidFill>
               </a:rPr>
-              <a:t>39</a:t>
+              <a:t>31</a:t>
             </a:r>
           </a:p>
         </p:txBody>
@@ -3547,7 +3547,7 @@
                   <a:srgbClr val="FFFFFF"/>
                 </a:solidFill>
               </a:rPr>
-              <a:t>contas-alvo definidas</a:t>
+              <a:t>contas-alvo (Tier 1 + 2)</a:t>
             </a:r>
           </a:p>
         </p:txBody>
@@ -3658,7 +3658,7 @@
                   <a:srgbClr val="FFFFFF"/>
                 </a:solidFill>
               </a:rPr>
-              <a:t>contas Tier 1 (prioritárias)</a:t>
+              <a:t>contas Tier 1 — InMail 1:1</a:t>
             </a:r>
           </a:p>
         </p:txBody>
@@ -3735,7 +3735,7 @@
                   <a:srgbClr val="F5A800"/>
                 </a:solidFill>
               </a:rPr>
-              <a:t>95</a:t>
+              <a:t>23</a:t>
             </a:r>
           </a:p>
         </p:txBody>
@@ -3769,7 +3769,7 @@
                   <a:srgbClr val="FFFFFF"/>
                 </a:solidFill>
               </a:rPr>
-              <a:t>warm leads para reativar</a:t>
+              <a:t>contas Tier 2 — 3 verticais</a:t>
             </a:r>
           </a:p>
         </p:txBody>
@@ -3880,7 +3880,7 @@
                   <a:srgbClr val="FFFFFF"/>
                 </a:solidFill>
               </a:rPr>
-              <a:t>oportunidades esperadas</a:t>
+              <a:t>oportunidades esperadas Q3</a:t>
             </a:r>
           </a:p>
         </p:txBody>
@@ -5470,7 +5470,7 @@
                   <a:srgbClr val="002F6C"/>
                 </a:solidFill>
               </a:rPr>
-              <a:t>Dois Movimentos Simultâneos — Mesma Mensagem</a:t>
+              <a:t>Estrutura da Campanha — Fase 1 Q3 2026</a:t>
             </a:r>
           </a:p>
         </p:txBody>
@@ -5667,7 +5667,7 @@
                   <a:srgbClr val="002F6C"/>
                 </a:solidFill>
               </a:rPr>
-              <a:t>Geração de Demanda</a:t>
+              <a:t>Fase 1 — Q3 2026</a:t>
             </a:r>
           </a:p>
         </p:txBody>
@@ -5701,7 +5701,7 @@
                   <a:srgbClr val="444444"/>
                 </a:solidFill>
               </a:rPr>
-              <a:t>Para quem ainda não nos conhece</a:t>
+              <a:t>LinkedIn Ads + Email Marketing — 31 contas-alvo</a:t>
             </a:r>
           </a:p>
         </p:txBody>
@@ -5778,7 +5778,7 @@
                   <a:srgbClr val="444444"/>
                 </a:solidFill>
               </a:rPr>
-              <a:t>• Email marketing — 95 warm leads (reativação imediata)</a:t>
+              <a:t>• Tier 1: 8 contas — InMail + Sponsored + email 1:1</a:t>
             </a:r>
           </a:p>
         </p:txBody>
@@ -5812,7 +5812,7 @@
                   <a:srgbClr val="444444"/>
                 </a:solidFill>
               </a:rPr>
-              <a:t>• LinkedIn Ads — ICP geral (fora da lista ABM)</a:t>
+              <a:t>• Tier 2: 23 contas — Sponsored por vertical + email</a:t>
             </a:r>
           </a:p>
         </p:txBody>
@@ -5846,7 +5846,7 @@
                   <a:srgbClr val="444444"/>
                 </a:solidFill>
               </a:rPr>
-              <a:t>• Google Ads — keywords RFC + SAC + Datasphere</a:t>
+              <a:t>• 3 verticais: Agro, Energia/Indústria, Logística/Saúde</a:t>
             </a:r>
           </a:p>
         </p:txBody>
@@ -5880,7 +5880,7 @@
                   <a:srgbClr val="444444"/>
                 </a:solidFill>
               </a:rPr>
-              <a:t>• LinkedIn orgânico — 4-5 posts/mês</a:t>
+              <a:t>• SDR outreach coordenado com Tier 1</a:t>
             </a:r>
           </a:p>
         </p:txBody>
@@ -5914,7 +5914,7 @@
                   <a:srgbClr val="444444"/>
                 </a:solidFill>
               </a:rPr>
-              <a:t>• Blog — 2 artigos SEO (RFC + quem sustenta SAC)</a:t>
+              <a:t>• Mensuração por conta — cobertura e pipeline ABM</a:t>
             </a:r>
           </a:p>
         </p:txBody>
@@ -5991,7 +5991,7 @@
                   <a:srgbClr val="F5A800"/>
                 </a:solidFill>
               </a:rPr>
-              <a:t>Meta: 8–12 leads | 2–4 reuniões | R$ 678k–1,3M pipeline</a:t>
+              <a:t>Meta Q3: 2–3 reuniões Tier 1 | 1–2 OPPs | R$ 678k–1,3M pipeline</a:t>
             </a:r>
           </a:p>
         </p:txBody>
@@ -6011,7 +6011,7 @@
             <a:avLst/>
           </a:prstGeom>
           <a:solidFill>
-            <a:srgbClr val="E8F0FE"/>
+            <a:srgbClr val="EEEEEE"/>
           </a:solidFill>
           <a:ln>
             <a:noFill/>
@@ -6054,7 +6054,7 @@
             <a:avLst/>
           </a:prstGeom>
           <a:solidFill>
-            <a:srgbClr val="1A7A4A"/>
+            <a:srgbClr val="444444"/>
           </a:solidFill>
           <a:ln>
             <a:noFill/>
@@ -6108,10 +6108,10 @@
             <a:r>
               <a:rPr sz="1400" b="1" i="0">
                 <a:solidFill>
-                  <a:srgbClr val="002F6C"/>
-                </a:solidFill>
-              </a:rPr>
-              <a:t>Account-Based Marketing</a:t>
+                  <a:srgbClr val="444444"/>
+                </a:solidFill>
+              </a:rPr>
+              <a:t>Fase 2 — Após Q3</a:t>
             </a:r>
           </a:p>
         </p:txBody>
@@ -6145,7 +6145,7 @@
                   <a:srgbClr val="444444"/>
                 </a:solidFill>
               </a:rPr>
-              <a:t>Para quem já foi impactado nos eventos H1 2026</a:t>
+              <a:t>Geração de demanda inbound — ativada com os aprendizados do Q3</a:t>
             </a:r>
           </a:p>
         </p:txBody>
@@ -6165,7 +6165,7 @@
             <a:avLst/>
           </a:prstGeom>
           <a:solidFill>
-            <a:srgbClr val="1A7A4A"/>
+            <a:srgbClr val="444444"/>
           </a:solidFill>
           <a:ln>
             <a:noFill/>
@@ -6222,7 +6222,7 @@
                   <a:srgbClr val="444444"/>
                 </a:solidFill>
               </a:rPr>
-              <a:t>• Tier 1: 7 contas VoC — InMail personalizado + SDR</a:t>
+              <a:t>• Google Ads — RFC + SAC + Datasphere suporte</a:t>
             </a:r>
           </a:p>
         </p:txBody>
@@ -6256,7 +6256,7 @@
                   <a:srgbClr val="444444"/>
                 </a:solidFill>
               </a:rPr>
-              <a:t>• Tier 2: ~50 contas por vertical (Agro, Energia, Indústria)</a:t>
+              <a:t>• LinkedIn orgânico — posts por ângulo de dor</a:t>
             </a:r>
           </a:p>
         </p:txBody>
@@ -6290,7 +6290,7 @@
                   <a:srgbClr val="444444"/>
                 </a:solidFill>
               </a:rPr>
-              <a:t>• Tier 3: ~99 contas — matched audience LinkedIn</a:t>
+              <a:t>• Blog / SEO — 2 artigos (RFC + quem sustenta SAC)</a:t>
             </a:r>
           </a:p>
         </p:txBody>
@@ -6324,7 +6324,7 @@
                   <a:srgbClr val="444444"/>
                 </a:solidFill>
               </a:rPr>
-              <a:t>• Orquestração com vendas — alerta de engajamento</a:t>
+              <a:t>• Landing page inbound</a:t>
             </a:r>
           </a:p>
         </p:txBody>
@@ -6358,7 +6358,7 @@
                   <a:srgbClr val="444444"/>
                 </a:solidFill>
               </a:rPr>
-              <a:t>• Mensuração por conta — cobertura e pipeline ABM</a:t>
+              <a:t>• ICP amplo — além das 31 contas ABM</a:t>
             </a:r>
           </a:p>
         </p:txBody>
@@ -6378,7 +6378,7 @@
             <a:avLst/>
           </a:prstGeom>
           <a:solidFill>
-            <a:srgbClr val="1A7A4A"/>
+            <a:srgbClr val="888888"/>
           </a:solidFill>
           <a:ln>
             <a:noFill/>
@@ -6430,12 +6430,12 @@
           <a:p>
             <a:pPr algn="l"/>
             <a:r>
-              <a:rPr sz="1000" b="1" i="0">
+              <a:rPr sz="1000" b="0" i="1">
                 <a:solidFill>
                   <a:srgbClr val="FFFFFF"/>
                 </a:solidFill>
               </a:rPr>
-              <a:t>Meta: 2–3 reuniões Tier 1 | 1–2 OPPs ABM | R$ 678k–2M pipeline</a:t>
+              <a:t>Escalar o que performou no Q3 para um público mais amplo</a:t>
             </a:r>
           </a:p>
         </p:txBody>
@@ -6573,7 +6573,7 @@
                   <a:srgbClr val="002F6C"/>
                 </a:solidFill>
               </a:rPr>
-              <a:t>Segmentação ABM — 39 Contas em 3 Tiers</a:t>
+              <a:t>Segmentação ABM — 31 Contas em 2 Tiers</a:t>
             </a:r>
           </a:p>
         </p:txBody>
@@ -6985,8 +6985,9 @@
                 </a:solidFill>
               </a:rPr>
               <a:t>InMail personalizado
-+ SDR outreach
-+ Sponsored Content</a:t>
++ Email sequência 1:1
++ Sponsored Content
++ SDR outreach</a:t>
             </a:r>
           </a:p>
         </p:txBody>
@@ -7424,8 +7425,9 @@
                   <a:srgbClr val="444444"/>
                 </a:solidFill>
               </a:rPr>
-              <a:t>Agrupadas por setor
-Mensagem por vertical</a:t>
+              <a:t>3 verticais: Agro, Energia/Ind
+Logística/Saúde
+Mensagem por segmento</a:t>
             </a:r>
           </a:p>
         </p:txBody>
@@ -7494,8 +7496,8 @@
                 </a:solidFill>
               </a:rPr>
               <a:t>Sponsored Content A/B
-por vertical
-+ SDR reforçado</a:t>
++ Email sequência
+por vertical</a:t>
             </a:r>
           </a:p>
         </p:txBody>
@@ -7631,9 +7633,9 @@
                   <a:srgbClr val="444444"/>
                 </a:solidFill>
               </a:rPr>
-              <a:t>Agro · Energia · Indústria
-Logística · Saúde / Farma
-(5 verticais)</a:t>
+              <a:t>Agro/Alimentos (10)
+Energia/Indústria (8)
+Logística/Saúde/Farma (5)</a:t>
             </a:r>
           </a:p>
         </p:txBody>
@@ -7696,7 +7698,7 @@
             <a:avLst/>
           </a:prstGeom>
           <a:solidFill>
-            <a:srgbClr val="002F6C"/>
+            <a:srgbClr val="888888"/>
           </a:solidFill>
           <a:ln>
             <a:noFill/>
@@ -7753,7 +7755,7 @@
                   <a:srgbClr val="FFFFFF"/>
                 </a:solidFill>
               </a:rPr>
-              <a:t>TIER 3</a:t>
+              <a:t>FASE 2</a:t>
             </a:r>
           </a:p>
         </p:txBody>
@@ -7787,7 +7789,7 @@
                   <a:srgbClr val="FFFFFF"/>
                 </a:solidFill>
               </a:rPr>
-              <a:t>1:Many ICP</a:t>
+              <a:t>Geração de Demanda</a:t>
             </a:r>
           </a:p>
         </p:txBody>
@@ -7818,10 +7820,10 @@
             <a:r>
               <a:rPr sz="2000" b="1" i="0">
                 <a:solidFill>
-                  <a:srgbClr val="002F6C"/>
-                </a:solidFill>
-              </a:rPr>
-              <a:t>8 contas</a:t>
+                  <a:srgbClr val="888888"/>
+                </a:solidFill>
+              </a:rPr>
+              <a:t>ICP amplo</a:t>
             </a:r>
           </a:p>
         </p:txBody>
@@ -7841,7 +7843,7 @@
             <a:avLst/>
           </a:prstGeom>
           <a:solidFill>
-            <a:srgbClr val="002F6C"/>
+            <a:srgbClr val="888888"/>
           </a:solidFill>
           <a:ln>
             <a:noFill/>
@@ -7932,8 +7934,8 @@
                   <a:srgbClr val="444444"/>
                 </a:solidFill>
               </a:rPr>
-              <a:t>Perfil SAP identificado
-Mensagem guarda-chuva</a:t>
+              <a:t>Após Q3 — escalar
+o que performou</a:t>
             </a:r>
           </a:p>
         </p:txBody>
@@ -8001,8 +8003,9 @@
                   <a:srgbClr val="444444"/>
                 </a:solidFill>
               </a:rPr>
-              <a:t>Matched Audience LinkedIn
-Mensagem ICP geral</a:t>
+              <a:t>Google Ads · Blog / SEO
+LinkedIn orgânico
+Landing page inbound</a:t>
             </a:r>
           </a:p>
         </p:txBody>
@@ -8067,10 +8070,10 @@
             <a:r>
               <a:rPr sz="1100" b="1" i="0">
                 <a:solidFill>
-                  <a:srgbClr val="002F6C"/>
-                </a:solidFill>
-              </a:rPr>
-              <a:t>R$ 12/conta/mês</a:t>
+                  <a:srgbClr val="888888"/>
+                </a:solidFill>
+              </a:rPr>
+              <a:t>Budget Q4</a:t>
             </a:r>
           </a:p>
         </p:txBody>
@@ -8138,9 +8141,9 @@
                   <a:srgbClr val="444444"/>
                 </a:solidFill>
               </a:rPr>
-              <a:t>OCP Brasil · Grupo DMA
-Cadastra · Grupo Positivo
-Ferroeste · e outras</a:t>
+              <a:t>RFC + SAC + Datasphere
+Keywords de busca ativa
+Conteúdo orgânico</a:t>
             </a:r>
           </a:p>
         </p:txBody>
@@ -10835,7 +10838,7 @@
                   <a:srgbClr val="002F6C"/>
                 </a:solidFill>
               </a:rPr>
-              <a:t>Tier 2 — Mensagens por Vertical (23 Contas)</a:t>
+              <a:t>Tier 2 — Mensagens por Vertical (23 Contas) + Email por Segmento</a:t>
             </a:r>
           </a:p>
         </p:txBody>
@@ -11187,7 +11190,7 @@
                   <a:srgbClr val="444444"/>
                 </a:solidFill>
               </a:rPr>
-              <a:t>"Na safra, seu S4 não pode travar. Cada relatório no transacional custa performance e aparece na fatura."</a:t>
+              <a:t>"Na safra, seu S4 não pode travar com relatórios. Cada query no transacional custa performance e aparece na fatura."</a:t>
             </a:r>
           </a:p>
         </p:txBody>
@@ -11366,9 +11369,10 @@
                   <a:srgbClr val="444444"/>
                 </a:solidFill>
               </a:rPr>
-              <a:t>Cocatrel · Usina São Manoel · VB Alimentos
-TMG · BrasilAgro · Cotrijal
-Sementes Jotabasso · Verde Campo
+              <a:t>Cocatrel · Usina São Manoel
+VB Alimentos · TMG
+BrasilAgro · Cotrijal
+Jotabasso · Verde Campo
 Alvoar · Cornélio Brennand</a:t>
             </a:r>
           </a:p>
@@ -11678,7 +11682,7 @@
                   <a:srgbClr val="444444"/>
                 </a:solidFill>
               </a:rPr>
-              <a:t>"A SAP vai bloquear suas extrações via RFC. Empresas com arquiteturas legadas estão em risco operacional."</a:t>
+              <a:t>"A SAP vai bloquear suas extrações via RFC. Empresas com arquiteturas legadas estão em risco operacional real."</a:t>
             </a:r>
           </a:p>
         </p:txBody>
@@ -11857,8 +11861,9 @@
                   <a:srgbClr val="444444"/>
                 </a:solidFill>
               </a:rPr>
-              <a:t>Aliança Geração de Energia · Petronas · Argo Energia
-Farmax · Brametal · Morlan
+              <a:t>Aliança Energia · Petronas
+Argo Energia · Farmax
+Brametal · Morlan
 Cimentos Liz · FCC Química</a:t>
             </a:r>
           </a:p>
@@ -12168,7 +12173,7 @@
                   <a:srgbClr val="444444"/>
                 </a:solidFill>
               </a:rPr>
-              <a:t>"O time de consultoria foi embora depois da implantação. Quem evolui seu ambiente SAC agora?"</a:t>
+              <a:t>"O time de consultoria foi embora depois da implantação. Quem cuida do seu ambiente SAC agora?"</a:t>
             </a:r>
           </a:p>
         </p:txBody>
@@ -12347,7 +12352,7 @@
                   <a:srgbClr val="444444"/>
                 </a:solidFill>
               </a:rPr>
-              <a:t>BBM Logística · Rota das Bandeiras
+              <a:t>BBM Logística · Ferroeste
 DELP Engenharia
 Althaia · Laboratório Teuto</a:t>
             </a:r>
@@ -15925,7 +15930,7 @@
                   <a:srgbClr val="002F6C"/>
                 </a:solidFill>
               </a:rPr>
-              <a:t>Budget Integrado — Q3 2026</a:t>
+              <a:t>Budget — Q3 2026 (Fase 1: Ads + Email)</a:t>
             </a:r>
           </a:p>
         </p:txBody>
@@ -16088,7 +16093,7 @@
                   <a:srgbClr val="444444"/>
                 </a:solidFill>
               </a:rPr>
-              <a:t>LinkedIn Ads — ABM Tier 1 (7 × R$250 × 3 meses)</a:t>
+              <a:t>LinkedIn Ads — Tier 1 (8 × R$250 × 3 meses)</a:t>
             </a:r>
           </a:p>
         </p:txBody>
@@ -16122,7 +16127,7 @@
                   <a:srgbClr val="002F6C"/>
                 </a:solidFill>
               </a:rPr>
-              <a:t>R$ 5.250</a:t>
+              <a:t>R$ 6.000</a:t>
             </a:r>
           </a:p>
         </p:txBody>
@@ -16242,7 +16247,7 @@
                   <a:srgbClr val="444444"/>
                 </a:solidFill>
               </a:rPr>
-              <a:t>LinkedIn Ads — ABM Tier 2 (50 × R$60 × 3 meses)</a:t>
+              <a:t>LinkedIn Ads — Tier 2 (23 × R$60 × 3 meses)</a:t>
             </a:r>
           </a:p>
         </p:txBody>
@@ -16276,7 +16281,7 @@
                   <a:srgbClr val="002F6C"/>
                 </a:solidFill>
               </a:rPr>
-              <a:t>R$ 9.000</a:t>
+              <a:t>R$ 4.140</a:t>
             </a:r>
           </a:p>
         </p:txBody>
@@ -16339,7 +16344,7 @@
             <a:avLst/>
           </a:prstGeom>
           <a:solidFill>
-            <a:srgbClr val="002F6C"/>
+            <a:srgbClr val="888888"/>
           </a:solidFill>
           <a:ln>
             <a:noFill/>
@@ -16396,7 +16401,7 @@
                   <a:srgbClr val="444444"/>
                 </a:solidFill>
               </a:rPr>
-              <a:t>LinkedIn Ads — ABM Tier 3 (99 × R$12 × 3 meses)</a:t>
+              <a:t>Produção de peças (banners, InMails, emails)</a:t>
             </a:r>
           </a:p>
         </p:txBody>
@@ -16430,7 +16435,7 @@
                   <a:srgbClr val="002F6C"/>
                 </a:solidFill>
               </a:rPr>
-              <a:t>R$ 3.564</a:t>
+              <a:t>R$ 1.500–2.000</a:t>
             </a:r>
           </a:p>
         </p:txBody>
@@ -16444,50 +16449,7 @@
         <p:spPr>
           <a:xfrm>
             <a:off x="457200" y="2487168"/>
-            <a:ext cx="11247120" cy="457200"/>
-          </a:xfrm>
-          <a:prstGeom prst="rect">
-            <a:avLst/>
-          </a:prstGeom>
-          <a:solidFill>
-            <a:srgbClr val="FFFFFF"/>
-          </a:solidFill>
-          <a:ln>
-            <a:noFill/>
-          </a:ln>
-        </p:spPr>
-        <p:style>
-          <a:lnRef idx="1">
-            <a:schemeClr val="accent1"/>
-          </a:lnRef>
-          <a:fillRef idx="3">
-            <a:schemeClr val="accent1"/>
-          </a:fillRef>
-          <a:effectRef idx="2">
-            <a:schemeClr val="accent1"/>
-          </a:effectRef>
-          <a:fontRef idx="minor">
-            <a:schemeClr val="lt1"/>
-          </a:fontRef>
-        </p:style>
-        <p:txBody>
-          <a:bodyPr rtlCol="0" anchor="ctr"/>
-          <a:lstStyle/>
-          <a:p>
-            <a:pPr algn="ctr"/>
-          </a:p>
-        </p:txBody>
-      </p:sp>
-      <p:sp>
-        <p:nvSpPr>
-          <p:cNvPr id="19" name="Rectangle 18"/>
-          <p:cNvSpPr/>
-          <p:nvPr/>
-        </p:nvSpPr>
-        <p:spPr>
-          <a:xfrm>
-            <a:off x="457200" y="2487168"/>
-            <a:ext cx="54864" cy="457200"/>
+            <a:ext cx="11247120" cy="530352"/>
           </a:xfrm>
           <a:prstGeom prst="rect">
             <a:avLst/>
@@ -16523,7 +16485,7 @@
       </p:sp>
       <p:sp>
         <p:nvSpPr>
-          <p:cNvPr id="20" name="TextBox 19"/>
+          <p:cNvPr id="19" name="TextBox 18"/>
           <p:cNvSpPr txBox="1"/>
           <p:nvPr/>
         </p:nvSpPr>
@@ -16545,19 +16507,19 @@
           <a:p>
             <a:pPr algn="l"/>
             <a:r>
-              <a:rPr sz="1100" b="0" i="0">
-                <a:solidFill>
-                  <a:srgbClr val="444444"/>
-                </a:solidFill>
-              </a:rPr>
-              <a:t>LinkedIn Ads — Demand gen (fora da lista ABM)</a:t>
-            </a:r>
-          </a:p>
-        </p:txBody>
-      </p:sp>
-      <p:sp>
-        <p:nvSpPr>
-          <p:cNvPr id="21" name="TextBox 20"/>
+              <a:rPr sz="1300" b="1" i="0">
+                <a:solidFill>
+                  <a:srgbClr val="FFFFFF"/>
+                </a:solidFill>
+              </a:rPr>
+              <a:t>TOTAL Q3 — FASE 1</a:t>
+            </a:r>
+          </a:p>
+        </p:txBody>
+      </p:sp>
+      <p:sp>
+        <p:nvSpPr>
+          <p:cNvPr id="20" name="TextBox 19"/>
           <p:cNvSpPr txBox="1"/>
           <p:nvPr/>
         </p:nvSpPr>
@@ -16579,25 +16541,25 @@
           <a:p>
             <a:pPr algn="r"/>
             <a:r>
-              <a:rPr sz="1100" b="1" i="0">
-                <a:solidFill>
-                  <a:srgbClr val="002F6C"/>
-                </a:solidFill>
-              </a:rPr>
-              <a:t>R$ 3.000–5.000</a:t>
-            </a:r>
-          </a:p>
-        </p:txBody>
-      </p:sp>
-      <p:sp>
-        <p:nvSpPr>
-          <p:cNvPr id="22" name="Rectangle 21"/>
+              <a:rPr sz="1300" b="1" i="0">
+                <a:solidFill>
+                  <a:srgbClr val="F5A800"/>
+                </a:solidFill>
+              </a:rPr>
+              <a:t>R$ 11.640–12.140</a:t>
+            </a:r>
+          </a:p>
+        </p:txBody>
+      </p:sp>
+      <p:sp>
+        <p:nvSpPr>
+          <p:cNvPr id="21" name="Rectangle 20"/>
           <p:cNvSpPr/>
           <p:nvPr/>
         </p:nvSpPr>
         <p:spPr>
           <a:xfrm>
-            <a:off x="457200" y="2980944"/>
+            <a:off x="457200" y="3054096"/>
             <a:ext cx="11247120" cy="457200"/>
           </a:xfrm>
           <a:prstGeom prst="rect">
@@ -16634,167 +16596,13 @@
       </p:sp>
       <p:sp>
         <p:nvSpPr>
-          <p:cNvPr id="23" name="Rectangle 22"/>
+          <p:cNvPr id="22" name="Rectangle 21"/>
           <p:cNvSpPr/>
           <p:nvPr/>
         </p:nvSpPr>
         <p:spPr>
           <a:xfrm>
-            <a:off x="457200" y="2980944"/>
-            <a:ext cx="54864" cy="457200"/>
-          </a:xfrm>
-          <a:prstGeom prst="rect">
-            <a:avLst/>
-          </a:prstGeom>
-          <a:solidFill>
-            <a:srgbClr val="1A7A4A"/>
-          </a:solidFill>
-          <a:ln>
-            <a:noFill/>
-          </a:ln>
-        </p:spPr>
-        <p:style>
-          <a:lnRef idx="1">
-            <a:schemeClr val="accent1"/>
-          </a:lnRef>
-          <a:fillRef idx="3">
-            <a:schemeClr val="accent1"/>
-          </a:fillRef>
-          <a:effectRef idx="2">
-            <a:schemeClr val="accent1"/>
-          </a:effectRef>
-          <a:fontRef idx="minor">
-            <a:schemeClr val="lt1"/>
-          </a:fontRef>
-        </p:style>
-        <p:txBody>
-          <a:bodyPr rtlCol="0" anchor="ctr"/>
-          <a:lstStyle/>
-          <a:p>
-            <a:pPr algn="ctr"/>
-          </a:p>
-        </p:txBody>
-      </p:sp>
-      <p:sp>
-        <p:nvSpPr>
-          <p:cNvPr id="24" name="TextBox 23"/>
-          <p:cNvSpPr txBox="1"/>
-          <p:nvPr/>
-        </p:nvSpPr>
-        <p:spPr>
-          <a:xfrm>
-            <a:off x="594360" y="3081528"/>
-            <a:ext cx="8229600" cy="320040"/>
-          </a:xfrm>
-          <a:prstGeom prst="rect">
-            <a:avLst/>
-          </a:prstGeom>
-          <a:noFill/>
-        </p:spPr>
-        <p:txBody>
-          <a:bodyPr wrap="square">
-            <a:spAutoFit/>
-          </a:bodyPr>
-          <a:lstStyle/>
-          <a:p>
-            <a:pPr algn="l"/>
-            <a:r>
-              <a:rPr sz="1100" b="0" i="0">
-                <a:solidFill>
-                  <a:srgbClr val="444444"/>
-                </a:solidFill>
-              </a:rPr>
-              <a:t>Google Ads — RFC + SAC + Datasphere suporte</a:t>
-            </a:r>
-          </a:p>
-        </p:txBody>
-      </p:sp>
-      <p:sp>
-        <p:nvSpPr>
-          <p:cNvPr id="25" name="TextBox 24"/>
-          <p:cNvSpPr txBox="1"/>
-          <p:nvPr/>
-        </p:nvSpPr>
-        <p:spPr>
-          <a:xfrm>
-            <a:off x="8869680" y="3081528"/>
-            <a:ext cx="2743200" cy="320040"/>
-          </a:xfrm>
-          <a:prstGeom prst="rect">
-            <a:avLst/>
-          </a:prstGeom>
-          <a:noFill/>
-        </p:spPr>
-        <p:txBody>
-          <a:bodyPr wrap="square">
-            <a:spAutoFit/>
-          </a:bodyPr>
-          <a:lstStyle/>
-          <a:p>
-            <a:pPr algn="r"/>
-            <a:r>
-              <a:rPr sz="1100" b="1" i="0">
-                <a:solidFill>
-                  <a:srgbClr val="002F6C"/>
-                </a:solidFill>
-              </a:rPr>
-              <a:t>R$ 4.500–9.000</a:t>
-            </a:r>
-          </a:p>
-        </p:txBody>
-      </p:sp>
-      <p:sp>
-        <p:nvSpPr>
-          <p:cNvPr id="26" name="Rectangle 25"/>
-          <p:cNvSpPr/>
-          <p:nvPr/>
-        </p:nvSpPr>
-        <p:spPr>
-          <a:xfrm>
-            <a:off x="457200" y="3474720"/>
-            <a:ext cx="11247120" cy="457200"/>
-          </a:xfrm>
-          <a:prstGeom prst="rect">
-            <a:avLst/>
-          </a:prstGeom>
-          <a:solidFill>
-            <a:srgbClr val="FFFFFF"/>
-          </a:solidFill>
-          <a:ln>
-            <a:noFill/>
-          </a:ln>
-        </p:spPr>
-        <p:style>
-          <a:lnRef idx="1">
-            <a:schemeClr val="accent1"/>
-          </a:lnRef>
-          <a:fillRef idx="3">
-            <a:schemeClr val="accent1"/>
-          </a:fillRef>
-          <a:effectRef idx="2">
-            <a:schemeClr val="accent1"/>
-          </a:effectRef>
-          <a:fontRef idx="minor">
-            <a:schemeClr val="lt1"/>
-          </a:fontRef>
-        </p:style>
-        <p:txBody>
-          <a:bodyPr rtlCol="0" anchor="ctr"/>
-          <a:lstStyle/>
-          <a:p>
-            <a:pPr algn="ctr"/>
-          </a:p>
-        </p:txBody>
-      </p:sp>
-      <p:sp>
-        <p:nvSpPr>
-          <p:cNvPr id="27" name="Rectangle 26"/>
-          <p:cNvSpPr/>
-          <p:nvPr/>
-        </p:nvSpPr>
-        <p:spPr>
-          <a:xfrm>
-            <a:off x="457200" y="3474720"/>
+            <a:off x="457200" y="3054096"/>
             <a:ext cx="54864" cy="457200"/>
           </a:xfrm>
           <a:prstGeom prst="rect">
@@ -16831,13 +16639,13 @@
       </p:sp>
       <p:sp>
         <p:nvSpPr>
-          <p:cNvPr id="28" name="TextBox 27"/>
-          <p:cNvSpPr txBox="1"/>
-          <p:nvPr/>
-        </p:nvSpPr>
-        <p:spPr>
-          <a:xfrm>
-            <a:off x="594360" y="3575304"/>
+          <p:cNvPr id="23" name="TextBox 22"/>
+          <p:cNvSpPr txBox="1"/>
+          <p:nvPr/>
+        </p:nvSpPr>
+        <p:spPr>
+          <a:xfrm>
+            <a:off x="594360" y="3154680"/>
             <a:ext cx="8229600" cy="320040"/>
           </a:xfrm>
           <a:prstGeom prst="rect">
@@ -16858,20 +16666,20 @@
                   <a:srgbClr val="444444"/>
                 </a:solidFill>
               </a:rPr>
-              <a:t>Produção de peças (banners, LP, emails, InMails)</a:t>
-            </a:r>
-          </a:p>
-        </p:txBody>
-      </p:sp>
-      <p:sp>
-        <p:nvSpPr>
-          <p:cNvPr id="29" name="TextBox 28"/>
-          <p:cNvSpPr txBox="1"/>
-          <p:nvPr/>
-        </p:nvSpPr>
-        <p:spPr>
-          <a:xfrm>
-            <a:off x="8869680" y="3575304"/>
+              <a:t>Fase 2 — Google Ads + Blog + Orgânico (Q4)</a:t>
+            </a:r>
+          </a:p>
+        </p:txBody>
+      </p:sp>
+      <p:sp>
+        <p:nvSpPr>
+          <p:cNvPr id="24" name="TextBox 23"/>
+          <p:cNvSpPr txBox="1"/>
+          <p:nvPr/>
+        </p:nvSpPr>
+        <p:spPr>
+          <a:xfrm>
+            <a:off x="8869680" y="3154680"/>
             <a:ext cx="2743200" cy="320040"/>
           </a:xfrm>
           <a:prstGeom prst="rect">
@@ -16892,131 +16700,20 @@
                   <a:srgbClr val="002F6C"/>
                 </a:solidFill>
               </a:rPr>
-              <a:t>R$ 1.500–2.500</a:t>
-            </a:r>
-          </a:p>
-        </p:txBody>
-      </p:sp>
-      <p:sp>
-        <p:nvSpPr>
-          <p:cNvPr id="30" name="Rectangle 29"/>
+              <a:t>A definir após Q3</a:t>
+            </a:r>
+          </a:p>
+        </p:txBody>
+      </p:sp>
+      <p:sp>
+        <p:nvSpPr>
+          <p:cNvPr id="25" name="Rectangle 24"/>
           <p:cNvSpPr/>
           <p:nvPr/>
         </p:nvSpPr>
         <p:spPr>
           <a:xfrm>
-            <a:off x="457200" y="3968496"/>
-            <a:ext cx="11247120" cy="530352"/>
-          </a:xfrm>
-          <a:prstGeom prst="rect">
-            <a:avLst/>
-          </a:prstGeom>
-          <a:solidFill>
-            <a:srgbClr val="002F6C"/>
-          </a:solidFill>
-          <a:ln>
-            <a:noFill/>
-          </a:ln>
-        </p:spPr>
-        <p:style>
-          <a:lnRef idx="1">
-            <a:schemeClr val="accent1"/>
-          </a:lnRef>
-          <a:fillRef idx="3">
-            <a:schemeClr val="accent1"/>
-          </a:fillRef>
-          <a:effectRef idx="2">
-            <a:schemeClr val="accent1"/>
-          </a:effectRef>
-          <a:fontRef idx="minor">
-            <a:schemeClr val="lt1"/>
-          </a:fontRef>
-        </p:style>
-        <p:txBody>
-          <a:bodyPr rtlCol="0" anchor="ctr"/>
-          <a:lstStyle/>
-          <a:p>
-            <a:pPr algn="ctr"/>
-          </a:p>
-        </p:txBody>
-      </p:sp>
-      <p:sp>
-        <p:nvSpPr>
-          <p:cNvPr id="31" name="TextBox 30"/>
-          <p:cNvSpPr txBox="1"/>
-          <p:nvPr/>
-        </p:nvSpPr>
-        <p:spPr>
-          <a:xfrm>
-            <a:off x="594360" y="4069080"/>
-            <a:ext cx="8229600" cy="320040"/>
-          </a:xfrm>
-          <a:prstGeom prst="rect">
-            <a:avLst/>
-          </a:prstGeom>
-          <a:noFill/>
-        </p:spPr>
-        <p:txBody>
-          <a:bodyPr wrap="square">
-            <a:spAutoFit/>
-          </a:bodyPr>
-          <a:lstStyle/>
-          <a:p>
-            <a:pPr algn="l"/>
-            <a:r>
-              <a:rPr sz="1300" b="1" i="0">
-                <a:solidFill>
-                  <a:srgbClr val="FFFFFF"/>
-                </a:solidFill>
-              </a:rPr>
-              <a:t>TOTAL Q3 ESTIMADO</a:t>
-            </a:r>
-          </a:p>
-        </p:txBody>
-      </p:sp>
-      <p:sp>
-        <p:nvSpPr>
-          <p:cNvPr id="32" name="TextBox 31"/>
-          <p:cNvSpPr txBox="1"/>
-          <p:nvPr/>
-        </p:nvSpPr>
-        <p:spPr>
-          <a:xfrm>
-            <a:off x="8869680" y="4069080"/>
-            <a:ext cx="2743200" cy="320040"/>
-          </a:xfrm>
-          <a:prstGeom prst="rect">
-            <a:avLst/>
-          </a:prstGeom>
-          <a:noFill/>
-        </p:spPr>
-        <p:txBody>
-          <a:bodyPr wrap="square">
-            <a:spAutoFit/>
-          </a:bodyPr>
-          <a:lstStyle/>
-          <a:p>
-            <a:pPr algn="r"/>
-            <a:r>
-              <a:rPr sz="1300" b="1" i="0">
-                <a:solidFill>
-                  <a:srgbClr val="F5A800"/>
-                </a:solidFill>
-              </a:rPr>
-              <a:t>R$ 26.800–34.300</a:t>
-            </a:r>
-          </a:p>
-        </p:txBody>
-      </p:sp>
-      <p:sp>
-        <p:nvSpPr>
-          <p:cNvPr id="33" name="Rectangle 32"/>
-          <p:cNvSpPr/>
-          <p:nvPr/>
-        </p:nvSpPr>
-        <p:spPr>
-          <a:xfrm>
-            <a:off x="457200" y="4626864"/>
+            <a:off x="457200" y="3639312"/>
             <a:ext cx="11247120" cy="685800"/>
           </a:xfrm>
           <a:prstGeom prst="rect">
@@ -17053,13 +16750,13 @@
       </p:sp>
       <p:sp>
         <p:nvSpPr>
-          <p:cNvPr id="34" name="TextBox 33"/>
-          <p:cNvSpPr txBox="1"/>
-          <p:nvPr/>
-        </p:nvSpPr>
-        <p:spPr>
-          <a:xfrm>
-            <a:off x="594360" y="4672584"/>
+          <p:cNvPr id="26" name="TextBox 25"/>
+          <p:cNvSpPr txBox="1"/>
+          <p:nvPr/>
+        </p:nvSpPr>
+        <p:spPr>
+          <a:xfrm>
+            <a:off x="594360" y="3685032"/>
             <a:ext cx="10972800" cy="274320"/>
           </a:xfrm>
           <a:prstGeom prst="rect">
@@ -17087,13 +16784,13 @@
       </p:sp>
       <p:sp>
         <p:nvSpPr>
-          <p:cNvPr id="35" name="TextBox 34"/>
-          <p:cNvSpPr txBox="1"/>
-          <p:nvPr/>
-        </p:nvSpPr>
-        <p:spPr>
-          <a:xfrm>
-            <a:off x="594360" y="4946904"/>
+          <p:cNvPr id="27" name="TextBox 26"/>
+          <p:cNvSpPr txBox="1"/>
+          <p:nvPr/>
+        </p:nvSpPr>
+        <p:spPr>
+          <a:xfrm>
+            <a:off x="594360" y="3959352"/>
             <a:ext cx="10972800" cy="274320"/>
           </a:xfrm>
           <a:prstGeom prst="rect">

--- a/marketing/campanhas/fabrica-de-analytics-q3-2026/Fabrica_Analytics_ABM_Q3_2026.pptx
+++ b/marketing/campanhas/fabrica-de-analytics-q3-2026/Fabrica_Analytics_ABM_Q3_2026.pptx
@@ -3513,7 +3513,7 @@
                   <a:srgbClr val="F5A800"/>
                 </a:solidFill>
               </a:rPr>
-              <a:t>31</a:t>
+              <a:t>8</a:t>
             </a:r>
           </a:p>
         </p:txBody>
@@ -3547,7 +3547,7 @@
                   <a:srgbClr val="FFFFFF"/>
                 </a:solidFill>
               </a:rPr>
-              <a:t>contas-alvo (Tier 1 + 2)</a:t>
+              <a:t>contas — mensagem 1:1</a:t>
             </a:r>
           </a:p>
         </p:txBody>
@@ -3624,7 +3624,7 @@
                   <a:srgbClr val="F5A800"/>
                 </a:solidFill>
               </a:rPr>
-              <a:t>8</a:t>
+              <a:t>3</a:t>
             </a:r>
           </a:p>
         </p:txBody>
@@ -3658,7 +3658,7 @@
                   <a:srgbClr val="FFFFFF"/>
                 </a:solidFill>
               </a:rPr>
-              <a:t>contas Tier 1 — InMail 1:1</a:t>
+              <a:t>canais por conta</a:t>
             </a:r>
           </a:p>
         </p:txBody>
@@ -3735,7 +3735,7 @@
                   <a:srgbClr val="F5A800"/>
                 </a:solidFill>
               </a:rPr>
-              <a:t>23</a:t>
+              <a:t>24</a:t>
             </a:r>
           </a:p>
         </p:txBody>
@@ -3769,7 +3769,7 @@
                   <a:srgbClr val="FFFFFF"/>
                 </a:solidFill>
               </a:rPr>
-              <a:t>contas Tier 2 — 3 verticais</a:t>
+              <a:t>emails personalizados</a:t>
             </a:r>
           </a:p>
         </p:txBody>
@@ -5778,7 +5778,7 @@
                   <a:srgbClr val="444444"/>
                 </a:solidFill>
               </a:rPr>
-              <a:t>• Tier 1: 8 contas — InMail + Sponsored + email 1:1</a:t>
+              <a:t>• 8 contas — mensagem 1:1 por empresa</a:t>
             </a:r>
           </a:p>
         </p:txBody>
@@ -5812,7 +5812,7 @@
                   <a:srgbClr val="444444"/>
                 </a:solidFill>
               </a:rPr>
-              <a:t>• Tier 2: 23 contas — Sponsored por vertical + email</a:t>
+              <a:t>• LinkedIn Ads: Sponsored Content + InMail por conta</a:t>
             </a:r>
           </a:p>
         </p:txBody>
@@ -5846,7 +5846,7 @@
                   <a:srgbClr val="444444"/>
                 </a:solidFill>
               </a:rPr>
-              <a:t>• 3 verticais: Agro, Energia/Indústria, Logística/Saúde</a:t>
+              <a:t>• Email: sequência 3 emails personalizada por empresa</a:t>
             </a:r>
           </a:p>
         </p:txBody>
@@ -5880,7 +5880,7 @@
                   <a:srgbClr val="444444"/>
                 </a:solidFill>
               </a:rPr>
-              <a:t>• SDR outreach coordenado com Tier 1</a:t>
+              <a:t>• SDR outreach coordenado — dia 3-5 após ativação</a:t>
             </a:r>
           </a:p>
         </p:txBody>
@@ -5914,7 +5914,7 @@
                   <a:srgbClr val="444444"/>
                 </a:solidFill>
               </a:rPr>
-              <a:t>• Mensuração por conta — cobertura e pipeline ABM</a:t>
+              <a:t>• Mensuração por conta — cobertura e engajamento</a:t>
             </a:r>
           </a:p>
         </p:txBody>
@@ -5991,7 +5991,7 @@
                   <a:srgbClr val="F5A800"/>
                 </a:solidFill>
               </a:rPr>
-              <a:t>Meta Q3: 2–3 reuniões Tier 1 | 1–2 OPPs | R$ 678k–1,3M pipeline</a:t>
+              <a:t>Meta Q3: 2–3 reuniões | 1–2 OPPs | R$ 678k–1,3M pipeline | Budget: R$ 7.500–8.000</a:t>
             </a:r>
           </a:p>
         </p:txBody>
@@ -6573,7 +6573,7 @@
                   <a:srgbClr val="002F6C"/>
                 </a:solidFill>
               </a:rPr>
-              <a:t>Segmentação ABM — 31 Contas em 2 Tiers</a:t>
+              <a:t>8 Contas — ABM 1:1 — Q3 2026</a:t>
             </a:r>
           </a:p>
         </p:txBody>
@@ -6679,7 +6679,7 @@
             <a:avLst/>
           </a:prstGeom>
           <a:solidFill>
-            <a:srgbClr val="C0392B"/>
+            <a:srgbClr val="002F6C"/>
           </a:solidFill>
           <a:ln>
             <a:noFill/>
@@ -6736,7 +6736,8 @@
                   <a:srgbClr val="FFFFFF"/>
                 </a:solidFill>
               </a:rPr>
-              <a:t>TIER 1</a:t>
+              <a:t>FASE 1
+Q3 2026</a:t>
             </a:r>
           </a:p>
         </p:txBody>
@@ -6770,7 +6771,7 @@
                   <a:srgbClr val="FFFFFF"/>
                 </a:solidFill>
               </a:rPr>
-              <a:t>1:1 Personalizado</a:t>
+              <a:t>ABM 1:1</a:t>
             </a:r>
           </a:p>
         </p:txBody>
@@ -6801,7 +6802,7 @@
             <a:r>
               <a:rPr sz="2000" b="1" i="0">
                 <a:solidFill>
-                  <a:srgbClr val="C0392B"/>
+                  <a:srgbClr val="002F6C"/>
                 </a:solidFill>
               </a:rPr>
               <a:t>8 contas</a:t>
@@ -6824,7 +6825,7 @@
             <a:avLst/>
           </a:prstGeom>
           <a:solidFill>
-            <a:srgbClr val="C0392B"/>
+            <a:srgbClr val="002F6C"/>
           </a:solidFill>
           <a:ln>
             <a:noFill/>
@@ -6915,8 +6916,9 @@
                   <a:srgbClr val="444444"/>
                 </a:solidFill>
               </a:rPr>
-              <a:t>Maior porte e potencial
-Mensagem por empresa</a:t>
+              <a:t>Mensagem personalizada
+por empresa
+Dor específica por conta</a:t>
             </a:r>
           </a:p>
         </p:txBody>
@@ -6984,9 +6986,9 @@
                   <a:srgbClr val="444444"/>
                 </a:solidFill>
               </a:rPr>
-              <a:t>InMail personalizado
-+ Email sequência 1:1
-+ Sponsored Content
+              <a:t>LinkedIn Sponsored Content
++ LinkedIn InMail
++ Email (3 por empresa)
 + SDR outreach</a:t>
             </a:r>
           </a:p>
@@ -7052,10 +7054,10 @@
             <a:r>
               <a:rPr sz="1100" b="1" i="0">
                 <a:solidFill>
-                  <a:srgbClr val="C0392B"/>
-                </a:solidFill>
-              </a:rPr>
-              <a:t>R$ 250/conta/mês</a:t>
+                  <a:srgbClr val="002F6C"/>
+                </a:solidFill>
+              </a:rPr>
+              <a:t>R$ 7.500–8.000 / Q3</a:t>
             </a:r>
           </a:p>
         </p:txBody>
@@ -7189,7 +7191,7 @@
             <a:avLst/>
           </a:prstGeom>
           <a:solidFill>
-            <a:srgbClr val="F5A800"/>
+            <a:srgbClr val="888888"/>
           </a:solidFill>
           <a:ln>
             <a:noFill/>
@@ -7243,10 +7245,11 @@
             <a:r>
               <a:rPr sz="1400" b="1" i="0">
                 <a:solidFill>
-                  <a:srgbClr val="002F6C"/>
-                </a:solidFill>
-              </a:rPr>
-              <a:t>TIER 2</a:t>
+                  <a:srgbClr val="FFFFFF"/>
+                </a:solidFill>
+              </a:rPr>
+              <a:t>FASE 2
+Q4 2026</a:t>
             </a:r>
           </a:p>
         </p:txBody>
@@ -7277,10 +7280,10 @@
             <a:r>
               <a:rPr sz="1000" b="0" i="0">
                 <a:solidFill>
-                  <a:srgbClr val="002F6C"/>
-                </a:solidFill>
-              </a:rPr>
-              <a:t>1:Few por Vertical</a:t>
+                  <a:srgbClr val="FFFFFF"/>
+                </a:solidFill>
+              </a:rPr>
+              <a:t>Geração de Demanda</a:t>
             </a:r>
           </a:p>
         </p:txBody>
@@ -7311,10 +7314,10 @@
             <a:r>
               <a:rPr sz="2000" b="1" i="0">
                 <a:solidFill>
-                  <a:srgbClr val="002F6C"/>
-                </a:solidFill>
-              </a:rPr>
-              <a:t>23 contas</a:t>
+                  <a:srgbClr val="888888"/>
+                </a:solidFill>
+              </a:rPr>
+              <a:t>ICP amplo</a:t>
             </a:r>
           </a:p>
         </p:txBody>
@@ -7334,7 +7337,7 @@
             <a:avLst/>
           </a:prstGeom>
           <a:solidFill>
-            <a:srgbClr val="F5A800"/>
+            <a:srgbClr val="888888"/>
           </a:solidFill>
           <a:ln>
             <a:noFill/>
@@ -7425,9 +7428,9 @@
                   <a:srgbClr val="444444"/>
                 </a:solidFill>
               </a:rPr>
-              <a:t>3 verticais: Agro, Energia/Ind
-Logística/Saúde
-Mensagem por segmento</a:t>
+              <a:t>Escalar o que performou
+no Q3 para um público
+mais amplo</a:t>
             </a:r>
           </a:p>
         </p:txBody>
@@ -7495,9 +7498,10 @@
                   <a:srgbClr val="444444"/>
                 </a:solidFill>
               </a:rPr>
-              <a:t>Sponsored Content A/B
-+ Email sequência
-por vertical</a:t>
+              <a:t>Google Ads
+Blog / SEO
+LinkedIn orgânico
+Landing page inbound</a:t>
             </a:r>
           </a:p>
         </p:txBody>
@@ -7562,10 +7566,10 @@
             <a:r>
               <a:rPr sz="1100" b="1" i="0">
                 <a:solidFill>
-                  <a:srgbClr val="002F6C"/>
-                </a:solidFill>
-              </a:rPr>
-              <a:t>R$ 60/conta/mês</a:t>
+                  <a:srgbClr val="888888"/>
+                </a:solidFill>
+              </a:rPr>
+              <a:t>Budget Q4 (a definir)</a:t>
             </a:r>
           </a:p>
         </p:txBody>
@@ -7633,9 +7637,9 @@
                   <a:srgbClr val="444444"/>
                 </a:solidFill>
               </a:rPr>
-              <a:t>Agro/Alimentos (10)
-Energia/Indústria (8)
-Logística/Saúde/Farma (5)</a:t>
+              <a:t>RFC + SAC + Datasphere
+Keywords de busca ativa
+Conteúdo orgânico</a:t>
             </a:r>
           </a:p>
         </p:txBody>
@@ -7698,7 +7702,7 @@
             <a:avLst/>
           </a:prstGeom>
           <a:solidFill>
-            <a:srgbClr val="888888"/>
+            <a:srgbClr val="1A7A4A"/>
           </a:solidFill>
           <a:ln>
             <a:noFill/>
@@ -7755,7 +7759,8 @@
                   <a:srgbClr val="FFFFFF"/>
                 </a:solidFill>
               </a:rPr>
-              <a:t>FASE 2</a:t>
+              <a:t>RESULTADO
+Esperado</a:t>
             </a:r>
           </a:p>
         </p:txBody>
@@ -7789,7 +7794,7 @@
                   <a:srgbClr val="FFFFFF"/>
                 </a:solidFill>
               </a:rPr>
-              <a:t>Geração de Demanda</a:t>
+              <a:t>Por conta</a:t>
             </a:r>
           </a:p>
         </p:txBody>
@@ -7820,10 +7825,10 @@
             <a:r>
               <a:rPr sz="2000" b="1" i="0">
                 <a:solidFill>
-                  <a:srgbClr val="888888"/>
-                </a:solidFill>
-              </a:rPr>
-              <a:t>ICP amplo</a:t>
+                  <a:srgbClr val="1A7A4A"/>
+                </a:solidFill>
+              </a:rPr>
+              <a:t>Metas Q3</a:t>
             </a:r>
           </a:p>
         </p:txBody>
@@ -7843,7 +7848,7 @@
             <a:avLst/>
           </a:prstGeom>
           <a:solidFill>
-            <a:srgbClr val="888888"/>
+            <a:srgbClr val="1A7A4A"/>
           </a:solidFill>
           <a:ln>
             <a:noFill/>
@@ -7934,8 +7939,9 @@
                   <a:srgbClr val="444444"/>
                 </a:solidFill>
               </a:rPr>
-              <a:t>Após Q3 — escalar
-o que performou</a:t>
+              <a:t>Pressão coordenada
+sobre cada conta
+até a reunião</a:t>
             </a:r>
           </a:p>
         </p:txBody>
@@ -8003,9 +8009,9 @@
                   <a:srgbClr val="444444"/>
                 </a:solidFill>
               </a:rPr>
-              <a:t>Google Ads · Blog / SEO
-LinkedIn orgânico
-Landing page inbound</a:t>
+              <a:t>2–3 reuniões agendadas
+1–2 oportunidades
+R$ 678k–1,3M pipeline</a:t>
             </a:r>
           </a:p>
         </p:txBody>
@@ -8070,10 +8076,10 @@
             <a:r>
               <a:rPr sz="1100" b="1" i="0">
                 <a:solidFill>
-                  <a:srgbClr val="888888"/>
-                </a:solidFill>
-              </a:rPr>
-              <a:t>Budget Q4</a:t>
+                  <a:srgbClr val="1A7A4A"/>
+                </a:solidFill>
+              </a:rPr>
+              <a:t>1 deal paga tudo</a:t>
             </a:r>
           </a:p>
         </p:txBody>
@@ -8141,9 +8147,9 @@
                   <a:srgbClr val="444444"/>
                 </a:solidFill>
               </a:rPr>
-              <a:t>RFC + SAC + Datasphere
-Keywords de busca ativa
-Conteúdo orgânico</a:t>
+              <a:t>Ticket médio: R$ 678.406
+Budget Q3: R$ 7.500–8.000
+ROI: 1 deal = 85x o investimento</a:t>
             </a:r>
           </a:p>
         </p:txBody>
@@ -10838,7 +10844,7 @@
                   <a:srgbClr val="002F6C"/>
                 </a:solidFill>
               </a:rPr>
-              <a:t>Tier 2 — Mensagens por Vertical (23 Contas) + Email por Segmento</a:t>
+              <a:t>Mensagens por Empresa — InMail + Email Personalizado</a:t>
             </a:r>
           </a:p>
         </p:txBody>
@@ -10944,7 +10950,7 @@
             <a:avLst/>
           </a:prstGeom>
           <a:solidFill>
-            <a:srgbClr val="1A7A4A"/>
+            <a:srgbClr val="002F6C"/>
           </a:solidFill>
           <a:ln>
             <a:noFill/>
@@ -11001,8 +11007,7 @@
                   <a:srgbClr val="002F6C"/>
                 </a:solidFill>
               </a:rPr>
-              <a:t>Agro /
-Alimentos</a:t>
+              <a:t>Saúde</a:t>
             </a:r>
           </a:p>
         </p:txBody>
@@ -11017,6 +11022,910 @@
           <a:xfrm>
             <a:off x="2834640" y="1051560"/>
             <a:ext cx="1188720" cy="384048"/>
+          </a:xfrm>
+          <a:prstGeom prst="rect">
+            <a:avLst/>
+          </a:prstGeom>
+          <a:solidFill>
+            <a:srgbClr val="002F6C"/>
+          </a:solidFill>
+          <a:ln>
+            <a:noFill/>
+          </a:ln>
+        </p:spPr>
+        <p:style>
+          <a:lnRef idx="1">
+            <a:schemeClr val="accent1"/>
+          </a:lnRef>
+          <a:fillRef idx="3">
+            <a:schemeClr val="accent1"/>
+          </a:fillRef>
+          <a:effectRef idx="2">
+            <a:schemeClr val="accent1"/>
+          </a:effectRef>
+          <a:fontRef idx="minor">
+            <a:schemeClr val="lt1"/>
+          </a:fontRef>
+        </p:style>
+        <p:txBody>
+          <a:bodyPr rtlCol="0" anchor="ctr"/>
+          <a:lstStyle/>
+          <a:p>
+            <a:pPr algn="ctr"/>
+          </a:p>
+        </p:txBody>
+      </p:sp>
+      <p:sp>
+        <p:nvSpPr>
+          <p:cNvPr id="10" name="TextBox 9"/>
+          <p:cNvSpPr txBox="1"/>
+          <p:nvPr/>
+        </p:nvSpPr>
+        <p:spPr>
+          <a:xfrm>
+            <a:off x="2834640" y="1051560"/>
+            <a:ext cx="1188720" cy="384048"/>
+          </a:xfrm>
+          <a:prstGeom prst="rect">
+            <a:avLst/>
+          </a:prstGeom>
+          <a:noFill/>
+        </p:spPr>
+        <p:txBody>
+          <a:bodyPr wrap="square">
+            <a:spAutoFit/>
+          </a:bodyPr>
+          <a:lstStyle/>
+          <a:p>
+            <a:pPr algn="ctr"/>
+            <a:r>
+              <a:rPr sz="1100" b="1" i="0">
+                <a:solidFill>
+                  <a:srgbClr val="FFFFFF"/>
+                </a:solidFill>
+              </a:rPr>
+              <a:t>Sírio-Libanês
+Rede D'Or</a:t>
+            </a:r>
+          </a:p>
+        </p:txBody>
+      </p:sp>
+      <p:sp>
+        <p:nvSpPr>
+          <p:cNvPr id="11" name="Rectangle 10"/>
+          <p:cNvSpPr/>
+          <p:nvPr/>
+        </p:nvSpPr>
+        <p:spPr>
+          <a:xfrm>
+            <a:off x="475488" y="1572768"/>
+            <a:ext cx="3474720" cy="45720"/>
+          </a:xfrm>
+          <a:prstGeom prst="rect">
+            <a:avLst/>
+          </a:prstGeom>
+          <a:solidFill>
+            <a:srgbClr val="002F6C"/>
+          </a:solidFill>
+          <a:ln>
+            <a:noFill/>
+          </a:ln>
+        </p:spPr>
+        <p:style>
+          <a:lnRef idx="1">
+            <a:schemeClr val="accent1"/>
+          </a:lnRef>
+          <a:fillRef idx="3">
+            <a:schemeClr val="accent1"/>
+          </a:fillRef>
+          <a:effectRef idx="2">
+            <a:schemeClr val="accent1"/>
+          </a:effectRef>
+          <a:fontRef idx="minor">
+            <a:schemeClr val="lt1"/>
+          </a:fontRef>
+        </p:style>
+        <p:txBody>
+          <a:bodyPr rtlCol="0" anchor="ctr"/>
+          <a:lstStyle/>
+          <a:p>
+            <a:pPr algn="ctr"/>
+          </a:p>
+        </p:txBody>
+      </p:sp>
+      <p:sp>
+        <p:nvSpPr>
+          <p:cNvPr id="12" name="TextBox 11"/>
+          <p:cNvSpPr txBox="1"/>
+          <p:nvPr/>
+        </p:nvSpPr>
+        <p:spPr>
+          <a:xfrm>
+            <a:off x="475488" y="1664208"/>
+            <a:ext cx="3474720" cy="256032"/>
+          </a:xfrm>
+          <a:prstGeom prst="rect">
+            <a:avLst/>
+          </a:prstGeom>
+          <a:noFill/>
+        </p:spPr>
+        <p:txBody>
+          <a:bodyPr wrap="square">
+            <a:spAutoFit/>
+          </a:bodyPr>
+          <a:lstStyle/>
+          <a:p>
+            <a:pPr algn="l"/>
+            <a:r>
+              <a:rPr sz="900" b="1" i="0">
+                <a:solidFill>
+                  <a:srgbClr val="002F6C"/>
+                </a:solidFill>
+              </a:rPr>
+              <a:t>Intro text LinkedIn:</a:t>
+            </a:r>
+          </a:p>
+        </p:txBody>
+      </p:sp>
+      <p:sp>
+        <p:nvSpPr>
+          <p:cNvPr id="13" name="TextBox 12"/>
+          <p:cNvSpPr txBox="1"/>
+          <p:nvPr/>
+        </p:nvSpPr>
+        <p:spPr>
+          <a:xfrm>
+            <a:off x="475488" y="1920240"/>
+            <a:ext cx="3474720" cy="914400"/>
+          </a:xfrm>
+          <a:prstGeom prst="rect">
+            <a:avLst/>
+          </a:prstGeom>
+          <a:noFill/>
+        </p:spPr>
+        <p:txBody>
+          <a:bodyPr wrap="square">
+            <a:spAutoFit/>
+          </a:bodyPr>
+          <a:lstStyle/>
+          <a:p>
+            <a:pPr algn="l"/>
+            <a:r>
+              <a:rPr sz="1000" b="0" i="1">
+                <a:solidFill>
+                  <a:srgbClr val="444444"/>
+                </a:solidFill>
+              </a:rPr>
+              <a:t>"Hospitais de referência têm demandas analíticas que vão além de dashboards. O SAC tem tudo isso — falta suporte técnico para ativar e evoluir."</a:t>
+            </a:r>
+          </a:p>
+        </p:txBody>
+      </p:sp>
+      <p:sp>
+        <p:nvSpPr>
+          <p:cNvPr id="14" name="TextBox 13"/>
+          <p:cNvSpPr txBox="1"/>
+          <p:nvPr/>
+        </p:nvSpPr>
+        <p:spPr>
+          <a:xfrm>
+            <a:off x="475488" y="2880360"/>
+            <a:ext cx="3474720" cy="256032"/>
+          </a:xfrm>
+          <a:prstGeom prst="rect">
+            <a:avLst/>
+          </a:prstGeom>
+          <a:noFill/>
+        </p:spPr>
+        <p:txBody>
+          <a:bodyPr wrap="square">
+            <a:spAutoFit/>
+          </a:bodyPr>
+          <a:lstStyle/>
+          <a:p>
+            <a:pPr algn="l"/>
+            <a:r>
+              <a:rPr sz="900" b="1" i="0">
+                <a:solidFill>
+                  <a:srgbClr val="002F6C"/>
+                </a:solidFill>
+              </a:rPr>
+              <a:t>Headline:</a:t>
+            </a:r>
+          </a:p>
+        </p:txBody>
+      </p:sp>
+      <p:sp>
+        <p:nvSpPr>
+          <p:cNvPr id="15" name="Rectangle 14"/>
+          <p:cNvSpPr/>
+          <p:nvPr/>
+        </p:nvSpPr>
+        <p:spPr>
+          <a:xfrm>
+            <a:off x="475488" y="3154680"/>
+            <a:ext cx="3474720" cy="502920"/>
+          </a:xfrm>
+          <a:prstGeom prst="rect">
+            <a:avLst/>
+          </a:prstGeom>
+          <a:solidFill>
+            <a:srgbClr val="002F6C"/>
+          </a:solidFill>
+          <a:ln>
+            <a:noFill/>
+          </a:ln>
+        </p:spPr>
+        <p:style>
+          <a:lnRef idx="1">
+            <a:schemeClr val="accent1"/>
+          </a:lnRef>
+          <a:fillRef idx="3">
+            <a:schemeClr val="accent1"/>
+          </a:fillRef>
+          <a:effectRef idx="2">
+            <a:schemeClr val="accent1"/>
+          </a:effectRef>
+          <a:fontRef idx="minor">
+            <a:schemeClr val="lt1"/>
+          </a:fontRef>
+        </p:style>
+        <p:txBody>
+          <a:bodyPr rtlCol="0" anchor="ctr"/>
+          <a:lstStyle/>
+          <a:p>
+            <a:pPr algn="ctr"/>
+          </a:p>
+        </p:txBody>
+      </p:sp>
+      <p:sp>
+        <p:nvSpPr>
+          <p:cNvPr id="16" name="TextBox 15"/>
+          <p:cNvSpPr txBox="1"/>
+          <p:nvPr/>
+        </p:nvSpPr>
+        <p:spPr>
+          <a:xfrm>
+            <a:off x="566928" y="3200400"/>
+            <a:ext cx="3291840" cy="411480"/>
+          </a:xfrm>
+          <a:prstGeom prst="rect">
+            <a:avLst/>
+          </a:prstGeom>
+          <a:noFill/>
+        </p:spPr>
+        <p:txBody>
+          <a:bodyPr wrap="square">
+            <a:spAutoFit/>
+          </a:bodyPr>
+          <a:lstStyle/>
+          <a:p>
+            <a:pPr algn="l"/>
+            <a:r>
+              <a:rPr sz="1100" b="1" i="0">
+                <a:solidFill>
+                  <a:srgbClr val="FFFFFF"/>
+                </a:solidFill>
+              </a:rPr>
+              <a:t>"Quem cuida do SAC depois da implantação?"</a:t>
+            </a:r>
+          </a:p>
+        </p:txBody>
+      </p:sp>
+      <p:sp>
+        <p:nvSpPr>
+          <p:cNvPr id="17" name="TextBox 16"/>
+          <p:cNvSpPr txBox="1"/>
+          <p:nvPr/>
+        </p:nvSpPr>
+        <p:spPr>
+          <a:xfrm>
+            <a:off x="475488" y="3749039"/>
+            <a:ext cx="3474720" cy="256032"/>
+          </a:xfrm>
+          <a:prstGeom prst="rect">
+            <a:avLst/>
+          </a:prstGeom>
+          <a:noFill/>
+        </p:spPr>
+        <p:txBody>
+          <a:bodyPr wrap="square">
+            <a:spAutoFit/>
+          </a:bodyPr>
+          <a:lstStyle/>
+          <a:p>
+            <a:pPr algn="l"/>
+            <a:r>
+              <a:rPr sz="900" b="1" i="0">
+                <a:solidFill>
+                  <a:srgbClr val="002F6C"/>
+                </a:solidFill>
+              </a:rPr>
+              <a:t>Empresas:</a:t>
+            </a:r>
+          </a:p>
+        </p:txBody>
+      </p:sp>
+      <p:sp>
+        <p:nvSpPr>
+          <p:cNvPr id="18" name="TextBox 17"/>
+          <p:cNvSpPr txBox="1"/>
+          <p:nvPr/>
+        </p:nvSpPr>
+        <p:spPr>
+          <a:xfrm>
+            <a:off x="475488" y="4005072"/>
+            <a:ext cx="3474720" cy="1005840"/>
+          </a:xfrm>
+          <a:prstGeom prst="rect">
+            <a:avLst/>
+          </a:prstGeom>
+          <a:noFill/>
+        </p:spPr>
+        <p:txBody>
+          <a:bodyPr wrap="square">
+            <a:spAutoFit/>
+          </a:bodyPr>
+          <a:lstStyle/>
+          <a:p>
+            <a:pPr algn="l"/>
+            <a:r>
+              <a:rPr sz="900" b="0" i="1">
+                <a:solidFill>
+                  <a:srgbClr val="444444"/>
+                </a:solidFill>
+              </a:rPr>
+              <a:t>Orçamento por CC · Indicadores assistenciais
+Planejamento de escalas · Análise regulatória</a:t>
+            </a:r>
+          </a:p>
+        </p:txBody>
+      </p:sp>
+      <p:sp>
+        <p:nvSpPr>
+          <p:cNvPr id="19" name="Rectangle 18"/>
+          <p:cNvSpPr/>
+          <p:nvPr/>
+        </p:nvSpPr>
+        <p:spPr>
+          <a:xfrm>
+            <a:off x="4425696" y="960120"/>
+            <a:ext cx="3749039" cy="5074920"/>
+          </a:xfrm>
+          <a:prstGeom prst="rect">
+            <a:avLst/>
+          </a:prstGeom>
+          <a:solidFill>
+            <a:srgbClr val="E8F0FE"/>
+          </a:solidFill>
+          <a:ln>
+            <a:noFill/>
+          </a:ln>
+        </p:spPr>
+        <p:style>
+          <a:lnRef idx="1">
+            <a:schemeClr val="accent1"/>
+          </a:lnRef>
+          <a:fillRef idx="3">
+            <a:schemeClr val="accent1"/>
+          </a:fillRef>
+          <a:effectRef idx="2">
+            <a:schemeClr val="accent1"/>
+          </a:effectRef>
+          <a:fontRef idx="minor">
+            <a:schemeClr val="lt1"/>
+          </a:fontRef>
+        </p:style>
+        <p:txBody>
+          <a:bodyPr rtlCol="0" anchor="ctr"/>
+          <a:lstStyle/>
+          <a:p>
+            <a:pPr algn="ctr"/>
+          </a:p>
+        </p:txBody>
+      </p:sp>
+      <p:sp>
+        <p:nvSpPr>
+          <p:cNvPr id="20" name="Rectangle 19"/>
+          <p:cNvSpPr/>
+          <p:nvPr/>
+        </p:nvSpPr>
+        <p:spPr>
+          <a:xfrm>
+            <a:off x="4425696" y="960120"/>
+            <a:ext cx="3749039" cy="73152"/>
+          </a:xfrm>
+          <a:prstGeom prst="rect">
+            <a:avLst/>
+          </a:prstGeom>
+          <a:solidFill>
+            <a:srgbClr val="E67E22"/>
+          </a:solidFill>
+          <a:ln>
+            <a:noFill/>
+          </a:ln>
+        </p:spPr>
+        <p:style>
+          <a:lnRef idx="1">
+            <a:schemeClr val="accent1"/>
+          </a:lnRef>
+          <a:fillRef idx="3">
+            <a:schemeClr val="accent1"/>
+          </a:fillRef>
+          <a:effectRef idx="2">
+            <a:schemeClr val="accent1"/>
+          </a:effectRef>
+          <a:fontRef idx="minor">
+            <a:schemeClr val="lt1"/>
+          </a:fontRef>
+        </p:style>
+        <p:txBody>
+          <a:bodyPr rtlCol="0" anchor="ctr"/>
+          <a:lstStyle/>
+          <a:p>
+            <a:pPr algn="ctr"/>
+          </a:p>
+        </p:txBody>
+      </p:sp>
+      <p:sp>
+        <p:nvSpPr>
+          <p:cNvPr id="21" name="TextBox 20"/>
+          <p:cNvSpPr txBox="1"/>
+          <p:nvPr/>
+        </p:nvSpPr>
+        <p:spPr>
+          <a:xfrm>
+            <a:off x="4535424" y="1051560"/>
+            <a:ext cx="2286000" cy="502920"/>
+          </a:xfrm>
+          <a:prstGeom prst="rect">
+            <a:avLst/>
+          </a:prstGeom>
+          <a:noFill/>
+        </p:spPr>
+        <p:txBody>
+          <a:bodyPr wrap="square">
+            <a:spAutoFit/>
+          </a:bodyPr>
+          <a:lstStyle/>
+          <a:p>
+            <a:pPr algn="l"/>
+            <a:r>
+              <a:rPr sz="1300" b="1" i="0">
+                <a:solidFill>
+                  <a:srgbClr val="002F6C"/>
+                </a:solidFill>
+              </a:rPr>
+              <a:t>Indústria
+Energia
+Logística</a:t>
+            </a:r>
+          </a:p>
+        </p:txBody>
+      </p:sp>
+      <p:sp>
+        <p:nvSpPr>
+          <p:cNvPr id="22" name="Rectangle 21"/>
+          <p:cNvSpPr/>
+          <p:nvPr/>
+        </p:nvSpPr>
+        <p:spPr>
+          <a:xfrm>
+            <a:off x="6894576" y="1051560"/>
+            <a:ext cx="1188720" cy="384048"/>
+          </a:xfrm>
+          <a:prstGeom prst="rect">
+            <a:avLst/>
+          </a:prstGeom>
+          <a:solidFill>
+            <a:srgbClr val="E67E22"/>
+          </a:solidFill>
+          <a:ln>
+            <a:noFill/>
+          </a:ln>
+        </p:spPr>
+        <p:style>
+          <a:lnRef idx="1">
+            <a:schemeClr val="accent1"/>
+          </a:lnRef>
+          <a:fillRef idx="3">
+            <a:schemeClr val="accent1"/>
+          </a:fillRef>
+          <a:effectRef idx="2">
+            <a:schemeClr val="accent1"/>
+          </a:effectRef>
+          <a:fontRef idx="minor">
+            <a:schemeClr val="lt1"/>
+          </a:fontRef>
+        </p:style>
+        <p:txBody>
+          <a:bodyPr rtlCol="0" anchor="ctr"/>
+          <a:lstStyle/>
+          <a:p>
+            <a:pPr algn="ctr"/>
+          </a:p>
+        </p:txBody>
+      </p:sp>
+      <p:sp>
+        <p:nvSpPr>
+          <p:cNvPr id="23" name="TextBox 22"/>
+          <p:cNvSpPr txBox="1"/>
+          <p:nvPr/>
+        </p:nvSpPr>
+        <p:spPr>
+          <a:xfrm>
+            <a:off x="6894576" y="1051560"/>
+            <a:ext cx="1188720" cy="384048"/>
+          </a:xfrm>
+          <a:prstGeom prst="rect">
+            <a:avLst/>
+          </a:prstGeom>
+          <a:noFill/>
+        </p:spPr>
+        <p:txBody>
+          <a:bodyPr wrap="square">
+            <a:spAutoFit/>
+          </a:bodyPr>
+          <a:lstStyle/>
+          <a:p>
+            <a:pPr algn="ctr"/>
+            <a:r>
+              <a:rPr sz="1100" b="1" i="0">
+                <a:solidFill>
+                  <a:srgbClr val="FFFFFF"/>
+                </a:solidFill>
+              </a:rPr>
+              <a:t>Randon · Norte Energia
+VLI · Arteris</a:t>
+            </a:r>
+          </a:p>
+        </p:txBody>
+      </p:sp>
+      <p:sp>
+        <p:nvSpPr>
+          <p:cNvPr id="24" name="Rectangle 23"/>
+          <p:cNvSpPr/>
+          <p:nvPr/>
+        </p:nvSpPr>
+        <p:spPr>
+          <a:xfrm>
+            <a:off x="4535424" y="1572768"/>
+            <a:ext cx="3474720" cy="45720"/>
+          </a:xfrm>
+          <a:prstGeom prst="rect">
+            <a:avLst/>
+          </a:prstGeom>
+          <a:solidFill>
+            <a:srgbClr val="E67E22"/>
+          </a:solidFill>
+          <a:ln>
+            <a:noFill/>
+          </a:ln>
+        </p:spPr>
+        <p:style>
+          <a:lnRef idx="1">
+            <a:schemeClr val="accent1"/>
+          </a:lnRef>
+          <a:fillRef idx="3">
+            <a:schemeClr val="accent1"/>
+          </a:fillRef>
+          <a:effectRef idx="2">
+            <a:schemeClr val="accent1"/>
+          </a:effectRef>
+          <a:fontRef idx="minor">
+            <a:schemeClr val="lt1"/>
+          </a:fontRef>
+        </p:style>
+        <p:txBody>
+          <a:bodyPr rtlCol="0" anchor="ctr"/>
+          <a:lstStyle/>
+          <a:p>
+            <a:pPr algn="ctr"/>
+          </a:p>
+        </p:txBody>
+      </p:sp>
+      <p:sp>
+        <p:nvSpPr>
+          <p:cNvPr id="25" name="TextBox 24"/>
+          <p:cNvSpPr txBox="1"/>
+          <p:nvPr/>
+        </p:nvSpPr>
+        <p:spPr>
+          <a:xfrm>
+            <a:off x="4535424" y="1664208"/>
+            <a:ext cx="3474720" cy="256032"/>
+          </a:xfrm>
+          <a:prstGeom prst="rect">
+            <a:avLst/>
+          </a:prstGeom>
+          <a:noFill/>
+        </p:spPr>
+        <p:txBody>
+          <a:bodyPr wrap="square">
+            <a:spAutoFit/>
+          </a:bodyPr>
+          <a:lstStyle/>
+          <a:p>
+            <a:pPr algn="l"/>
+            <a:r>
+              <a:rPr sz="900" b="1" i="0">
+                <a:solidFill>
+                  <a:srgbClr val="002F6C"/>
+                </a:solidFill>
+              </a:rPr>
+              <a:t>Intro text LinkedIn:</a:t>
+            </a:r>
+          </a:p>
+        </p:txBody>
+      </p:sp>
+      <p:sp>
+        <p:nvSpPr>
+          <p:cNvPr id="26" name="TextBox 25"/>
+          <p:cNvSpPr txBox="1"/>
+          <p:nvPr/>
+        </p:nvSpPr>
+        <p:spPr>
+          <a:xfrm>
+            <a:off x="4535424" y="1920240"/>
+            <a:ext cx="3474720" cy="914400"/>
+          </a:xfrm>
+          <a:prstGeom prst="rect">
+            <a:avLst/>
+          </a:prstGeom>
+          <a:noFill/>
+        </p:spPr>
+        <p:txBody>
+          <a:bodyPr wrap="square">
+            <a:spAutoFit/>
+          </a:bodyPr>
+          <a:lstStyle/>
+          <a:p>
+            <a:pPr algn="l"/>
+            <a:r>
+              <a:rPr sz="1000" b="0" i="1">
+                <a:solidFill>
+                  <a:srgbClr val="444444"/>
+                </a:solidFill>
+              </a:rPr>
+              <a:t>"RFC em risco de bloqueio SAP / S4 sobrecarregado com relatórios / SAC contratado sem planning — cada conta tem sua dor, cada InMail tem sua mensagem."</a:t>
+            </a:r>
+          </a:p>
+        </p:txBody>
+      </p:sp>
+      <p:sp>
+        <p:nvSpPr>
+          <p:cNvPr id="27" name="TextBox 26"/>
+          <p:cNvSpPr txBox="1"/>
+          <p:nvPr/>
+        </p:nvSpPr>
+        <p:spPr>
+          <a:xfrm>
+            <a:off x="4535424" y="2880360"/>
+            <a:ext cx="3474720" cy="256032"/>
+          </a:xfrm>
+          <a:prstGeom prst="rect">
+            <a:avLst/>
+          </a:prstGeom>
+          <a:noFill/>
+        </p:spPr>
+        <p:txBody>
+          <a:bodyPr wrap="square">
+            <a:spAutoFit/>
+          </a:bodyPr>
+          <a:lstStyle/>
+          <a:p>
+            <a:pPr algn="l"/>
+            <a:r>
+              <a:rPr sz="900" b="1" i="0">
+                <a:solidFill>
+                  <a:srgbClr val="002F6C"/>
+                </a:solidFill>
+              </a:rPr>
+              <a:t>Headline:</a:t>
+            </a:r>
+          </a:p>
+        </p:txBody>
+      </p:sp>
+      <p:sp>
+        <p:nvSpPr>
+          <p:cNvPr id="28" name="Rectangle 27"/>
+          <p:cNvSpPr/>
+          <p:nvPr/>
+        </p:nvSpPr>
+        <p:spPr>
+          <a:xfrm>
+            <a:off x="4535424" y="3154680"/>
+            <a:ext cx="3474720" cy="502920"/>
+          </a:xfrm>
+          <a:prstGeom prst="rect">
+            <a:avLst/>
+          </a:prstGeom>
+          <a:solidFill>
+            <a:srgbClr val="FFF3E0"/>
+          </a:solidFill>
+          <a:ln>
+            <a:noFill/>
+          </a:ln>
+        </p:spPr>
+        <p:style>
+          <a:lnRef idx="1">
+            <a:schemeClr val="accent1"/>
+          </a:lnRef>
+          <a:fillRef idx="3">
+            <a:schemeClr val="accent1"/>
+          </a:fillRef>
+          <a:effectRef idx="2">
+            <a:schemeClr val="accent1"/>
+          </a:effectRef>
+          <a:fontRef idx="minor">
+            <a:schemeClr val="lt1"/>
+          </a:fontRef>
+        </p:style>
+        <p:txBody>
+          <a:bodyPr rtlCol="0" anchor="ctr"/>
+          <a:lstStyle/>
+          <a:p>
+            <a:pPr algn="ctr"/>
+          </a:p>
+        </p:txBody>
+      </p:sp>
+      <p:sp>
+        <p:nvSpPr>
+          <p:cNvPr id="29" name="TextBox 28"/>
+          <p:cNvSpPr txBox="1"/>
+          <p:nvPr/>
+        </p:nvSpPr>
+        <p:spPr>
+          <a:xfrm>
+            <a:off x="4626864" y="3200400"/>
+            <a:ext cx="3291840" cy="411480"/>
+          </a:xfrm>
+          <a:prstGeom prst="rect">
+            <a:avLst/>
+          </a:prstGeom>
+          <a:noFill/>
+        </p:spPr>
+        <p:txBody>
+          <a:bodyPr wrap="square">
+            <a:spAutoFit/>
+          </a:bodyPr>
+          <a:lstStyle/>
+          <a:p>
+            <a:pPr algn="l"/>
+            <a:r>
+              <a:rPr sz="1100" b="1" i="0">
+                <a:solidFill>
+                  <a:srgbClr val="002F6C"/>
+                </a:solidFill>
+              </a:rPr>
+              <a:t>"S4 pesado · RFC urgente · SAC sem planning"</a:t>
+            </a:r>
+          </a:p>
+        </p:txBody>
+      </p:sp>
+      <p:sp>
+        <p:nvSpPr>
+          <p:cNvPr id="30" name="TextBox 29"/>
+          <p:cNvSpPr txBox="1"/>
+          <p:nvPr/>
+        </p:nvSpPr>
+        <p:spPr>
+          <a:xfrm>
+            <a:off x="4535424" y="3749039"/>
+            <a:ext cx="3474720" cy="256032"/>
+          </a:xfrm>
+          <a:prstGeom prst="rect">
+            <a:avLst/>
+          </a:prstGeom>
+          <a:noFill/>
+        </p:spPr>
+        <p:txBody>
+          <a:bodyPr wrap="square">
+            <a:spAutoFit/>
+          </a:bodyPr>
+          <a:lstStyle/>
+          <a:p>
+            <a:pPr algn="l"/>
+            <a:r>
+              <a:rPr sz="900" b="1" i="0">
+                <a:solidFill>
+                  <a:srgbClr val="002F6C"/>
+                </a:solidFill>
+              </a:rPr>
+              <a:t>Empresas:</a:t>
+            </a:r>
+          </a:p>
+        </p:txBody>
+      </p:sp>
+      <p:sp>
+        <p:nvSpPr>
+          <p:cNvPr id="31" name="TextBox 30"/>
+          <p:cNvSpPr txBox="1"/>
+          <p:nvPr/>
+        </p:nvSpPr>
+        <p:spPr>
+          <a:xfrm>
+            <a:off x="4535424" y="4005072"/>
+            <a:ext cx="3474720" cy="1005840"/>
+          </a:xfrm>
+          <a:prstGeom prst="rect">
+            <a:avLst/>
+          </a:prstGeom>
+          <a:noFill/>
+        </p:spPr>
+        <p:txBody>
+          <a:bodyPr wrap="square">
+            <a:spAutoFit/>
+          </a:bodyPr>
+          <a:lstStyle/>
+          <a:p>
+            <a:pPr algn="l"/>
+            <a:r>
+              <a:rPr sz="900" b="0" i="1">
+                <a:solidFill>
+                  <a:srgbClr val="444444"/>
+                </a:solidFill>
+              </a:rPr>
+              <a:t>1 InMail por empresa
+1 sequência de 3 emails por empresa
+Angulo específico por dor identificada</a:t>
+            </a:r>
+          </a:p>
+        </p:txBody>
+      </p:sp>
+      <p:sp>
+        <p:nvSpPr>
+          <p:cNvPr id="32" name="Rectangle 31"/>
+          <p:cNvSpPr/>
+          <p:nvPr/>
+        </p:nvSpPr>
+        <p:spPr>
+          <a:xfrm>
+            <a:off x="8485632" y="960120"/>
+            <a:ext cx="3749039" cy="5074920"/>
+          </a:xfrm>
+          <a:prstGeom prst="rect">
+            <a:avLst/>
+          </a:prstGeom>
+          <a:solidFill>
+            <a:srgbClr val="E8F0FE"/>
+          </a:solidFill>
+          <a:ln>
+            <a:noFill/>
+          </a:ln>
+        </p:spPr>
+        <p:style>
+          <a:lnRef idx="1">
+            <a:schemeClr val="accent1"/>
+          </a:lnRef>
+          <a:fillRef idx="3">
+            <a:schemeClr val="accent1"/>
+          </a:fillRef>
+          <a:effectRef idx="2">
+            <a:schemeClr val="accent1"/>
+          </a:effectRef>
+          <a:fontRef idx="minor">
+            <a:schemeClr val="lt1"/>
+          </a:fontRef>
+        </p:style>
+        <p:txBody>
+          <a:bodyPr rtlCol="0" anchor="ctr"/>
+          <a:lstStyle/>
+          <a:p>
+            <a:pPr algn="ctr"/>
+          </a:p>
+        </p:txBody>
+      </p:sp>
+      <p:sp>
+        <p:nvSpPr>
+          <p:cNvPr id="33" name="Rectangle 32"/>
+          <p:cNvSpPr/>
+          <p:nvPr/>
+        </p:nvSpPr>
+        <p:spPr>
+          <a:xfrm>
+            <a:off x="8485632" y="960120"/>
+            <a:ext cx="3749039" cy="73152"/>
           </a:xfrm>
           <a:prstGeom prst="rect">
             <a:avLst/>
@@ -11052,48 +11961,49 @@
       </p:sp>
       <p:sp>
         <p:nvSpPr>
-          <p:cNvPr id="10" name="TextBox 9"/>
-          <p:cNvSpPr txBox="1"/>
-          <p:nvPr/>
-        </p:nvSpPr>
-        <p:spPr>
-          <a:xfrm>
-            <a:off x="2834640" y="1051560"/>
+          <p:cNvPr id="34" name="TextBox 33"/>
+          <p:cNvSpPr txBox="1"/>
+          <p:nvPr/>
+        </p:nvSpPr>
+        <p:spPr>
+          <a:xfrm>
+            <a:off x="8595360" y="1051560"/>
+            <a:ext cx="2286000" cy="502920"/>
+          </a:xfrm>
+          <a:prstGeom prst="rect">
+            <a:avLst/>
+          </a:prstGeom>
+          <a:noFill/>
+        </p:spPr>
+        <p:txBody>
+          <a:bodyPr wrap="square">
+            <a:spAutoFit/>
+          </a:bodyPr>
+          <a:lstStyle/>
+          <a:p>
+            <a:pPr algn="l"/>
+            <a:r>
+              <a:rPr sz="1300" b="1" i="0">
+                <a:solidFill>
+                  <a:srgbClr val="002F6C"/>
+                </a:solidFill>
+              </a:rPr>
+              <a:t>Farma
+Agro</a:t>
+            </a:r>
+          </a:p>
+        </p:txBody>
+      </p:sp>
+      <p:sp>
+        <p:nvSpPr>
+          <p:cNvPr id="35" name="Rectangle 34"/>
+          <p:cNvSpPr/>
+          <p:nvPr/>
+        </p:nvSpPr>
+        <p:spPr>
+          <a:xfrm>
+            <a:off x="10954512" y="1051560"/>
             <a:ext cx="1188720" cy="384048"/>
-          </a:xfrm>
-          <a:prstGeom prst="rect">
-            <a:avLst/>
-          </a:prstGeom>
-          <a:noFill/>
-        </p:spPr>
-        <p:txBody>
-          <a:bodyPr wrap="square">
-            <a:spAutoFit/>
-          </a:bodyPr>
-          <a:lstStyle/>
-          <a:p>
-            <a:pPr algn="ctr"/>
-            <a:r>
-              <a:rPr sz="1100" b="1" i="0">
-                <a:solidFill>
-                  <a:srgbClr val="FFFFFF"/>
-                </a:solidFill>
-              </a:rPr>
-              <a:t>10 contas</a:t>
-            </a:r>
-          </a:p>
-        </p:txBody>
-      </p:sp>
-      <p:sp>
-        <p:nvSpPr>
-          <p:cNvPr id="11" name="Rectangle 10"/>
-          <p:cNvSpPr/>
-          <p:nvPr/>
-        </p:nvSpPr>
-        <p:spPr>
-          <a:xfrm>
-            <a:off x="475488" y="1572768"/>
-            <a:ext cx="3474720" cy="45720"/>
           </a:xfrm>
           <a:prstGeom prst="rect">
             <a:avLst/>
@@ -11129,116 +12039,49 @@
       </p:sp>
       <p:sp>
         <p:nvSpPr>
-          <p:cNvPr id="12" name="TextBox 11"/>
-          <p:cNvSpPr txBox="1"/>
-          <p:nvPr/>
-        </p:nvSpPr>
-        <p:spPr>
-          <a:xfrm>
-            <a:off x="475488" y="1664208"/>
-            <a:ext cx="3474720" cy="256032"/>
-          </a:xfrm>
-          <a:prstGeom prst="rect">
-            <a:avLst/>
-          </a:prstGeom>
-          <a:noFill/>
-        </p:spPr>
-        <p:txBody>
-          <a:bodyPr wrap="square">
-            <a:spAutoFit/>
-          </a:bodyPr>
-          <a:lstStyle/>
-          <a:p>
-            <a:pPr algn="l"/>
-            <a:r>
-              <a:rPr sz="900" b="1" i="0">
-                <a:solidFill>
-                  <a:srgbClr val="002F6C"/>
-                </a:solidFill>
-              </a:rPr>
-              <a:t>Intro text LinkedIn:</a:t>
-            </a:r>
-          </a:p>
-        </p:txBody>
-      </p:sp>
-      <p:sp>
-        <p:nvSpPr>
-          <p:cNvPr id="13" name="TextBox 12"/>
-          <p:cNvSpPr txBox="1"/>
-          <p:nvPr/>
-        </p:nvSpPr>
-        <p:spPr>
-          <a:xfrm>
-            <a:off x="475488" y="1920240"/>
-            <a:ext cx="3474720" cy="914400"/>
-          </a:xfrm>
-          <a:prstGeom prst="rect">
-            <a:avLst/>
-          </a:prstGeom>
-          <a:noFill/>
-        </p:spPr>
-        <p:txBody>
-          <a:bodyPr wrap="square">
-            <a:spAutoFit/>
-          </a:bodyPr>
-          <a:lstStyle/>
-          <a:p>
-            <a:pPr algn="l"/>
-            <a:r>
-              <a:rPr sz="1000" b="0" i="1">
-                <a:solidFill>
-                  <a:srgbClr val="444444"/>
-                </a:solidFill>
-              </a:rPr>
-              <a:t>"Na safra, seu S4 não pode travar com relatórios. Cada query no transacional custa performance e aparece na fatura."</a:t>
-            </a:r>
-          </a:p>
-        </p:txBody>
-      </p:sp>
-      <p:sp>
-        <p:nvSpPr>
-          <p:cNvPr id="14" name="TextBox 13"/>
-          <p:cNvSpPr txBox="1"/>
-          <p:nvPr/>
-        </p:nvSpPr>
-        <p:spPr>
-          <a:xfrm>
-            <a:off x="475488" y="2880360"/>
-            <a:ext cx="3474720" cy="256032"/>
-          </a:xfrm>
-          <a:prstGeom prst="rect">
-            <a:avLst/>
-          </a:prstGeom>
-          <a:noFill/>
-        </p:spPr>
-        <p:txBody>
-          <a:bodyPr wrap="square">
-            <a:spAutoFit/>
-          </a:bodyPr>
-          <a:lstStyle/>
-          <a:p>
-            <a:pPr algn="l"/>
-            <a:r>
-              <a:rPr sz="900" b="1" i="0">
-                <a:solidFill>
-                  <a:srgbClr val="002F6C"/>
-                </a:solidFill>
-              </a:rPr>
-              <a:t>Headline:</a:t>
-            </a:r>
-          </a:p>
-        </p:txBody>
-      </p:sp>
-      <p:sp>
-        <p:nvSpPr>
-          <p:cNvPr id="15" name="Rectangle 14"/>
+          <p:cNvPr id="36" name="TextBox 35"/>
+          <p:cNvSpPr txBox="1"/>
+          <p:nvPr/>
+        </p:nvSpPr>
+        <p:spPr>
+          <a:xfrm>
+            <a:off x="10954512" y="1051560"/>
+            <a:ext cx="1188720" cy="384048"/>
+          </a:xfrm>
+          <a:prstGeom prst="rect">
+            <a:avLst/>
+          </a:prstGeom>
+          <a:noFill/>
+        </p:spPr>
+        <p:txBody>
+          <a:bodyPr wrap="square">
+            <a:spAutoFit/>
+          </a:bodyPr>
+          <a:lstStyle/>
+          <a:p>
+            <a:pPr algn="ctr"/>
+            <a:r>
+              <a:rPr sz="1100" b="1" i="0">
+                <a:solidFill>
+                  <a:srgbClr val="FFFFFF"/>
+                </a:solidFill>
+              </a:rPr>
+              <a:t>Grupo Cimed
+Grupo Jacto</a:t>
+            </a:r>
+          </a:p>
+        </p:txBody>
+      </p:sp>
+      <p:sp>
+        <p:nvSpPr>
+          <p:cNvPr id="37" name="Rectangle 36"/>
           <p:cNvSpPr/>
           <p:nvPr/>
         </p:nvSpPr>
         <p:spPr>
           <a:xfrm>
-            <a:off x="475488" y="3154680"/>
-            <a:ext cx="3474720" cy="502920"/>
+            <a:off x="8595360" y="1572768"/>
+            <a:ext cx="3474720" cy="45720"/>
           </a:xfrm>
           <a:prstGeom prst="rect">
             <a:avLst/>
@@ -11274,47 +12117,81 @@
       </p:sp>
       <p:sp>
         <p:nvSpPr>
-          <p:cNvPr id="16" name="TextBox 15"/>
-          <p:cNvSpPr txBox="1"/>
-          <p:nvPr/>
-        </p:nvSpPr>
-        <p:spPr>
-          <a:xfrm>
-            <a:off x="566928" y="3200400"/>
-            <a:ext cx="3291840" cy="411480"/>
-          </a:xfrm>
-          <a:prstGeom prst="rect">
-            <a:avLst/>
-          </a:prstGeom>
-          <a:noFill/>
-        </p:spPr>
-        <p:txBody>
-          <a:bodyPr wrap="square">
-            <a:spAutoFit/>
-          </a:bodyPr>
-          <a:lstStyle/>
-          <a:p>
-            <a:pPr algn="l"/>
-            <a:r>
-              <a:rPr sz="1100" b="1" i="0">
+          <p:cNvPr id="38" name="TextBox 37"/>
+          <p:cNvSpPr txBox="1"/>
+          <p:nvPr/>
+        </p:nvSpPr>
+        <p:spPr>
+          <a:xfrm>
+            <a:off x="8595360" y="1664208"/>
+            <a:ext cx="3474720" cy="256032"/>
+          </a:xfrm>
+          <a:prstGeom prst="rect">
+            <a:avLst/>
+          </a:prstGeom>
+          <a:noFill/>
+        </p:spPr>
+        <p:txBody>
+          <a:bodyPr wrap="square">
+            <a:spAutoFit/>
+          </a:bodyPr>
+          <a:lstStyle/>
+          <a:p>
+            <a:pPr algn="l"/>
+            <a:r>
+              <a:rPr sz="900" b="1" i="0">
                 <a:solidFill>
                   <a:srgbClr val="002F6C"/>
                 </a:solidFill>
               </a:rPr>
-              <a:t>"Desafogue seu S4 antes da safra"</a:t>
-            </a:r>
-          </a:p>
-        </p:txBody>
-      </p:sp>
-      <p:sp>
-        <p:nvSpPr>
-          <p:cNvPr id="17" name="TextBox 16"/>
-          <p:cNvSpPr txBox="1"/>
-          <p:nvPr/>
-        </p:nvSpPr>
-        <p:spPr>
-          <a:xfrm>
-            <a:off x="475488" y="3749039"/>
+              <a:t>Intro text LinkedIn:</a:t>
+            </a:r>
+          </a:p>
+        </p:txBody>
+      </p:sp>
+      <p:sp>
+        <p:nvSpPr>
+          <p:cNvPr id="39" name="TextBox 38"/>
+          <p:cNvSpPr txBox="1"/>
+          <p:nvPr/>
+        </p:nvSpPr>
+        <p:spPr>
+          <a:xfrm>
+            <a:off x="8595360" y="1920240"/>
+            <a:ext cx="3474720" cy="914400"/>
+          </a:xfrm>
+          <a:prstGeom prst="rect">
+            <a:avLst/>
+          </a:prstGeom>
+          <a:noFill/>
+        </p:spPr>
+        <p:txBody>
+          <a:bodyPr wrap="square">
+            <a:spAutoFit/>
+          </a:bodyPr>
+          <a:lstStyle/>
+          <a:p>
+            <a:pPr algn="l"/>
+            <a:r>
+              <a:rPr sz="1000" b="0" i="1">
+                <a:solidFill>
+                  <a:srgbClr val="444444"/>
+                </a:solidFill>
+              </a:rPr>
+              <a:t>"Farma: SAC parado, licença paga sem uso. Agro: S4 sobrecarregado + SAC sem planning ativo. Dois contextos, duas mensagens diferentes."</a:t>
+            </a:r>
+          </a:p>
+        </p:txBody>
+      </p:sp>
+      <p:sp>
+        <p:nvSpPr>
+          <p:cNvPr id="40" name="TextBox 39"/>
+          <p:cNvSpPr txBox="1"/>
+          <p:nvPr/>
+        </p:nvSpPr>
+        <p:spPr>
+          <a:xfrm>
+            <a:off x="8595360" y="2880360"/>
             <a:ext cx="3474720" cy="256032"/>
           </a:xfrm>
           <a:prstGeom prst="rect">
@@ -11335,65 +12212,27 @@
                   <a:srgbClr val="002F6C"/>
                 </a:solidFill>
               </a:rPr>
-              <a:t>Empresas:</a:t>
-            </a:r>
-          </a:p>
-        </p:txBody>
-      </p:sp>
-      <p:sp>
-        <p:nvSpPr>
-          <p:cNvPr id="18" name="TextBox 17"/>
-          <p:cNvSpPr txBox="1"/>
-          <p:nvPr/>
-        </p:nvSpPr>
-        <p:spPr>
-          <a:xfrm>
-            <a:off x="475488" y="4005072"/>
-            <a:ext cx="3474720" cy="1005840"/>
-          </a:xfrm>
-          <a:prstGeom prst="rect">
-            <a:avLst/>
-          </a:prstGeom>
-          <a:noFill/>
-        </p:spPr>
-        <p:txBody>
-          <a:bodyPr wrap="square">
-            <a:spAutoFit/>
-          </a:bodyPr>
-          <a:lstStyle/>
-          <a:p>
-            <a:pPr algn="l"/>
-            <a:r>
-              <a:rPr sz="900" b="0" i="1">
-                <a:solidFill>
-                  <a:srgbClr val="444444"/>
-                </a:solidFill>
-              </a:rPr>
-              <a:t>Cocatrel · Usina São Manoel
-VB Alimentos · TMG
-BrasilAgro · Cotrijal
-Jotabasso · Verde Campo
-Alvoar · Cornélio Brennand</a:t>
-            </a:r>
-          </a:p>
-        </p:txBody>
-      </p:sp>
-      <p:sp>
-        <p:nvSpPr>
-          <p:cNvPr id="19" name="Rectangle 18"/>
+              <a:t>Headline:</a:t>
+            </a:r>
+          </a:p>
+        </p:txBody>
+      </p:sp>
+      <p:sp>
+        <p:nvSpPr>
+          <p:cNvPr id="41" name="Rectangle 40"/>
           <p:cNvSpPr/>
           <p:nvPr/>
         </p:nvSpPr>
         <p:spPr>
           <a:xfrm>
-            <a:off x="4425696" y="960120"/>
-            <a:ext cx="3749039" cy="5074920"/>
+            <a:off x="8595360" y="3154680"/>
+            <a:ext cx="3474720" cy="502920"/>
           </a:xfrm>
           <a:prstGeom prst="rect">
             <a:avLst/>
           </a:prstGeom>
           <a:solidFill>
-            <a:srgbClr val="E8F0FE"/>
+            <a:srgbClr val="1A7A4A"/>
           </a:solidFill>
           <a:ln>
             <a:noFill/>
@@ -11423,840 +12262,6 @@
       </p:sp>
       <p:sp>
         <p:nvSpPr>
-          <p:cNvPr id="20" name="Rectangle 19"/>
-          <p:cNvSpPr/>
-          <p:nvPr/>
-        </p:nvSpPr>
-        <p:spPr>
-          <a:xfrm>
-            <a:off x="4425696" y="960120"/>
-            <a:ext cx="3749039" cy="73152"/>
-          </a:xfrm>
-          <a:prstGeom prst="rect">
-            <a:avLst/>
-          </a:prstGeom>
-          <a:solidFill>
-            <a:srgbClr val="C0392B"/>
-          </a:solidFill>
-          <a:ln>
-            <a:noFill/>
-          </a:ln>
-        </p:spPr>
-        <p:style>
-          <a:lnRef idx="1">
-            <a:schemeClr val="accent1"/>
-          </a:lnRef>
-          <a:fillRef idx="3">
-            <a:schemeClr val="accent1"/>
-          </a:fillRef>
-          <a:effectRef idx="2">
-            <a:schemeClr val="accent1"/>
-          </a:effectRef>
-          <a:fontRef idx="minor">
-            <a:schemeClr val="lt1"/>
-          </a:fontRef>
-        </p:style>
-        <p:txBody>
-          <a:bodyPr rtlCol="0" anchor="ctr"/>
-          <a:lstStyle/>
-          <a:p>
-            <a:pPr algn="ctr"/>
-          </a:p>
-        </p:txBody>
-      </p:sp>
-      <p:sp>
-        <p:nvSpPr>
-          <p:cNvPr id="21" name="TextBox 20"/>
-          <p:cNvSpPr txBox="1"/>
-          <p:nvPr/>
-        </p:nvSpPr>
-        <p:spPr>
-          <a:xfrm>
-            <a:off x="4535424" y="1051560"/>
-            <a:ext cx="2286000" cy="502920"/>
-          </a:xfrm>
-          <a:prstGeom prst="rect">
-            <a:avLst/>
-          </a:prstGeom>
-          <a:noFill/>
-        </p:spPr>
-        <p:txBody>
-          <a:bodyPr wrap="square">
-            <a:spAutoFit/>
-          </a:bodyPr>
-          <a:lstStyle/>
-          <a:p>
-            <a:pPr algn="l"/>
-            <a:r>
-              <a:rPr sz="1300" b="1" i="0">
-                <a:solidFill>
-                  <a:srgbClr val="002F6C"/>
-                </a:solidFill>
-              </a:rPr>
-              <a:t>Energia /
-Indústria</a:t>
-            </a:r>
-          </a:p>
-        </p:txBody>
-      </p:sp>
-      <p:sp>
-        <p:nvSpPr>
-          <p:cNvPr id="22" name="Rectangle 21"/>
-          <p:cNvSpPr/>
-          <p:nvPr/>
-        </p:nvSpPr>
-        <p:spPr>
-          <a:xfrm>
-            <a:off x="6894576" y="1051560"/>
-            <a:ext cx="1188720" cy="384048"/>
-          </a:xfrm>
-          <a:prstGeom prst="rect">
-            <a:avLst/>
-          </a:prstGeom>
-          <a:solidFill>
-            <a:srgbClr val="C0392B"/>
-          </a:solidFill>
-          <a:ln>
-            <a:noFill/>
-          </a:ln>
-        </p:spPr>
-        <p:style>
-          <a:lnRef idx="1">
-            <a:schemeClr val="accent1"/>
-          </a:lnRef>
-          <a:fillRef idx="3">
-            <a:schemeClr val="accent1"/>
-          </a:fillRef>
-          <a:effectRef idx="2">
-            <a:schemeClr val="accent1"/>
-          </a:effectRef>
-          <a:fontRef idx="minor">
-            <a:schemeClr val="lt1"/>
-          </a:fontRef>
-        </p:style>
-        <p:txBody>
-          <a:bodyPr rtlCol="0" anchor="ctr"/>
-          <a:lstStyle/>
-          <a:p>
-            <a:pPr algn="ctr"/>
-          </a:p>
-        </p:txBody>
-      </p:sp>
-      <p:sp>
-        <p:nvSpPr>
-          <p:cNvPr id="23" name="TextBox 22"/>
-          <p:cNvSpPr txBox="1"/>
-          <p:nvPr/>
-        </p:nvSpPr>
-        <p:spPr>
-          <a:xfrm>
-            <a:off x="6894576" y="1051560"/>
-            <a:ext cx="1188720" cy="384048"/>
-          </a:xfrm>
-          <a:prstGeom prst="rect">
-            <a:avLst/>
-          </a:prstGeom>
-          <a:noFill/>
-        </p:spPr>
-        <p:txBody>
-          <a:bodyPr wrap="square">
-            <a:spAutoFit/>
-          </a:bodyPr>
-          <a:lstStyle/>
-          <a:p>
-            <a:pPr algn="ctr"/>
-            <a:r>
-              <a:rPr sz="1100" b="1" i="0">
-                <a:solidFill>
-                  <a:srgbClr val="FFFFFF"/>
-                </a:solidFill>
-              </a:rPr>
-              <a:t>8 contas</a:t>
-            </a:r>
-          </a:p>
-        </p:txBody>
-      </p:sp>
-      <p:sp>
-        <p:nvSpPr>
-          <p:cNvPr id="24" name="Rectangle 23"/>
-          <p:cNvSpPr/>
-          <p:nvPr/>
-        </p:nvSpPr>
-        <p:spPr>
-          <a:xfrm>
-            <a:off x="4535424" y="1572768"/>
-            <a:ext cx="3474720" cy="45720"/>
-          </a:xfrm>
-          <a:prstGeom prst="rect">
-            <a:avLst/>
-          </a:prstGeom>
-          <a:solidFill>
-            <a:srgbClr val="C0392B"/>
-          </a:solidFill>
-          <a:ln>
-            <a:noFill/>
-          </a:ln>
-        </p:spPr>
-        <p:style>
-          <a:lnRef idx="1">
-            <a:schemeClr val="accent1"/>
-          </a:lnRef>
-          <a:fillRef idx="3">
-            <a:schemeClr val="accent1"/>
-          </a:fillRef>
-          <a:effectRef idx="2">
-            <a:schemeClr val="accent1"/>
-          </a:effectRef>
-          <a:fontRef idx="minor">
-            <a:schemeClr val="lt1"/>
-          </a:fontRef>
-        </p:style>
-        <p:txBody>
-          <a:bodyPr rtlCol="0" anchor="ctr"/>
-          <a:lstStyle/>
-          <a:p>
-            <a:pPr algn="ctr"/>
-          </a:p>
-        </p:txBody>
-      </p:sp>
-      <p:sp>
-        <p:nvSpPr>
-          <p:cNvPr id="25" name="TextBox 24"/>
-          <p:cNvSpPr txBox="1"/>
-          <p:nvPr/>
-        </p:nvSpPr>
-        <p:spPr>
-          <a:xfrm>
-            <a:off x="4535424" y="1664208"/>
-            <a:ext cx="3474720" cy="256032"/>
-          </a:xfrm>
-          <a:prstGeom prst="rect">
-            <a:avLst/>
-          </a:prstGeom>
-          <a:noFill/>
-        </p:spPr>
-        <p:txBody>
-          <a:bodyPr wrap="square">
-            <a:spAutoFit/>
-          </a:bodyPr>
-          <a:lstStyle/>
-          <a:p>
-            <a:pPr algn="l"/>
-            <a:r>
-              <a:rPr sz="900" b="1" i="0">
-                <a:solidFill>
-                  <a:srgbClr val="002F6C"/>
-                </a:solidFill>
-              </a:rPr>
-              <a:t>Intro text LinkedIn:</a:t>
-            </a:r>
-          </a:p>
-        </p:txBody>
-      </p:sp>
-      <p:sp>
-        <p:nvSpPr>
-          <p:cNvPr id="26" name="TextBox 25"/>
-          <p:cNvSpPr txBox="1"/>
-          <p:nvPr/>
-        </p:nvSpPr>
-        <p:spPr>
-          <a:xfrm>
-            <a:off x="4535424" y="1920240"/>
-            <a:ext cx="3474720" cy="914400"/>
-          </a:xfrm>
-          <a:prstGeom prst="rect">
-            <a:avLst/>
-          </a:prstGeom>
-          <a:noFill/>
-        </p:spPr>
-        <p:txBody>
-          <a:bodyPr wrap="square">
-            <a:spAutoFit/>
-          </a:bodyPr>
-          <a:lstStyle/>
-          <a:p>
-            <a:pPr algn="l"/>
-            <a:r>
-              <a:rPr sz="1000" b="0" i="1">
-                <a:solidFill>
-                  <a:srgbClr val="444444"/>
-                </a:solidFill>
-              </a:rPr>
-              <a:t>"A SAP vai bloquear suas extrações via RFC. Empresas com arquiteturas legadas estão em risco operacional real."</a:t>
-            </a:r>
-          </a:p>
-        </p:txBody>
-      </p:sp>
-      <p:sp>
-        <p:nvSpPr>
-          <p:cNvPr id="27" name="TextBox 26"/>
-          <p:cNvSpPr txBox="1"/>
-          <p:nvPr/>
-        </p:nvSpPr>
-        <p:spPr>
-          <a:xfrm>
-            <a:off x="4535424" y="2880360"/>
-            <a:ext cx="3474720" cy="256032"/>
-          </a:xfrm>
-          <a:prstGeom prst="rect">
-            <a:avLst/>
-          </a:prstGeom>
-          <a:noFill/>
-        </p:spPr>
-        <p:txBody>
-          <a:bodyPr wrap="square">
-            <a:spAutoFit/>
-          </a:bodyPr>
-          <a:lstStyle/>
-          <a:p>
-            <a:pPr algn="l"/>
-            <a:r>
-              <a:rPr sz="900" b="1" i="0">
-                <a:solidFill>
-                  <a:srgbClr val="002F6C"/>
-                </a:solidFill>
-              </a:rPr>
-              <a:t>Headline:</a:t>
-            </a:r>
-          </a:p>
-        </p:txBody>
-      </p:sp>
-      <p:sp>
-        <p:nvSpPr>
-          <p:cNvPr id="28" name="Rectangle 27"/>
-          <p:cNvSpPr/>
-          <p:nvPr/>
-        </p:nvSpPr>
-        <p:spPr>
-          <a:xfrm>
-            <a:off x="4535424" y="3154680"/>
-            <a:ext cx="3474720" cy="502920"/>
-          </a:xfrm>
-          <a:prstGeom prst="rect">
-            <a:avLst/>
-          </a:prstGeom>
-          <a:solidFill>
-            <a:srgbClr val="C0392B"/>
-          </a:solidFill>
-          <a:ln>
-            <a:noFill/>
-          </a:ln>
-        </p:spPr>
-        <p:style>
-          <a:lnRef idx="1">
-            <a:schemeClr val="accent1"/>
-          </a:lnRef>
-          <a:fillRef idx="3">
-            <a:schemeClr val="accent1"/>
-          </a:fillRef>
-          <a:effectRef idx="2">
-            <a:schemeClr val="accent1"/>
-          </a:effectRef>
-          <a:fontRef idx="minor">
-            <a:schemeClr val="lt1"/>
-          </a:fontRef>
-        </p:style>
-        <p:txBody>
-          <a:bodyPr rtlCol="0" anchor="ctr"/>
-          <a:lstStyle/>
-          <a:p>
-            <a:pPr algn="ctr"/>
-          </a:p>
-        </p:txBody>
-      </p:sp>
-      <p:sp>
-        <p:nvSpPr>
-          <p:cNvPr id="29" name="TextBox 28"/>
-          <p:cNvSpPr txBox="1"/>
-          <p:nvPr/>
-        </p:nvSpPr>
-        <p:spPr>
-          <a:xfrm>
-            <a:off x="4626864" y="3200400"/>
-            <a:ext cx="3291840" cy="411480"/>
-          </a:xfrm>
-          <a:prstGeom prst="rect">
-            <a:avLst/>
-          </a:prstGeom>
-          <a:noFill/>
-        </p:spPr>
-        <p:txBody>
-          <a:bodyPr wrap="square">
-            <a:spAutoFit/>
-          </a:bodyPr>
-          <a:lstStyle/>
-          <a:p>
-            <a:pPr algn="l"/>
-            <a:r>
-              <a:rPr sz="1100" b="1" i="0">
-                <a:solidFill>
-                  <a:srgbClr val="FFFFFF"/>
-                </a:solidFill>
-              </a:rPr>
-              <a:t>"Sua extração via RFC está em risco"</a:t>
-            </a:r>
-          </a:p>
-        </p:txBody>
-      </p:sp>
-      <p:sp>
-        <p:nvSpPr>
-          <p:cNvPr id="30" name="TextBox 29"/>
-          <p:cNvSpPr txBox="1"/>
-          <p:nvPr/>
-        </p:nvSpPr>
-        <p:spPr>
-          <a:xfrm>
-            <a:off x="4535424" y="3749039"/>
-            <a:ext cx="3474720" cy="256032"/>
-          </a:xfrm>
-          <a:prstGeom prst="rect">
-            <a:avLst/>
-          </a:prstGeom>
-          <a:noFill/>
-        </p:spPr>
-        <p:txBody>
-          <a:bodyPr wrap="square">
-            <a:spAutoFit/>
-          </a:bodyPr>
-          <a:lstStyle/>
-          <a:p>
-            <a:pPr algn="l"/>
-            <a:r>
-              <a:rPr sz="900" b="1" i="0">
-                <a:solidFill>
-                  <a:srgbClr val="002F6C"/>
-                </a:solidFill>
-              </a:rPr>
-              <a:t>Empresas:</a:t>
-            </a:r>
-          </a:p>
-        </p:txBody>
-      </p:sp>
-      <p:sp>
-        <p:nvSpPr>
-          <p:cNvPr id="31" name="TextBox 30"/>
-          <p:cNvSpPr txBox="1"/>
-          <p:nvPr/>
-        </p:nvSpPr>
-        <p:spPr>
-          <a:xfrm>
-            <a:off x="4535424" y="4005072"/>
-            <a:ext cx="3474720" cy="1005840"/>
-          </a:xfrm>
-          <a:prstGeom prst="rect">
-            <a:avLst/>
-          </a:prstGeom>
-          <a:noFill/>
-        </p:spPr>
-        <p:txBody>
-          <a:bodyPr wrap="square">
-            <a:spAutoFit/>
-          </a:bodyPr>
-          <a:lstStyle/>
-          <a:p>
-            <a:pPr algn="l"/>
-            <a:r>
-              <a:rPr sz="900" b="0" i="1">
-                <a:solidFill>
-                  <a:srgbClr val="444444"/>
-                </a:solidFill>
-              </a:rPr>
-              <a:t>Aliança Energia · Petronas
-Argo Energia · Farmax
-Brametal · Morlan
-Cimentos Liz · FCC Química</a:t>
-            </a:r>
-          </a:p>
-        </p:txBody>
-      </p:sp>
-      <p:sp>
-        <p:nvSpPr>
-          <p:cNvPr id="32" name="Rectangle 31"/>
-          <p:cNvSpPr/>
-          <p:nvPr/>
-        </p:nvSpPr>
-        <p:spPr>
-          <a:xfrm>
-            <a:off x="8485632" y="960120"/>
-            <a:ext cx="3749039" cy="5074920"/>
-          </a:xfrm>
-          <a:prstGeom prst="rect">
-            <a:avLst/>
-          </a:prstGeom>
-          <a:solidFill>
-            <a:srgbClr val="E8F0FE"/>
-          </a:solidFill>
-          <a:ln>
-            <a:noFill/>
-          </a:ln>
-        </p:spPr>
-        <p:style>
-          <a:lnRef idx="1">
-            <a:schemeClr val="accent1"/>
-          </a:lnRef>
-          <a:fillRef idx="3">
-            <a:schemeClr val="accent1"/>
-          </a:fillRef>
-          <a:effectRef idx="2">
-            <a:schemeClr val="accent1"/>
-          </a:effectRef>
-          <a:fontRef idx="minor">
-            <a:schemeClr val="lt1"/>
-          </a:fontRef>
-        </p:style>
-        <p:txBody>
-          <a:bodyPr rtlCol="0" anchor="ctr"/>
-          <a:lstStyle/>
-          <a:p>
-            <a:pPr algn="ctr"/>
-          </a:p>
-        </p:txBody>
-      </p:sp>
-      <p:sp>
-        <p:nvSpPr>
-          <p:cNvPr id="33" name="Rectangle 32"/>
-          <p:cNvSpPr/>
-          <p:nvPr/>
-        </p:nvSpPr>
-        <p:spPr>
-          <a:xfrm>
-            <a:off x="8485632" y="960120"/>
-            <a:ext cx="3749039" cy="73152"/>
-          </a:xfrm>
-          <a:prstGeom prst="rect">
-            <a:avLst/>
-          </a:prstGeom>
-          <a:solidFill>
-            <a:srgbClr val="002F6C"/>
-          </a:solidFill>
-          <a:ln>
-            <a:noFill/>
-          </a:ln>
-        </p:spPr>
-        <p:style>
-          <a:lnRef idx="1">
-            <a:schemeClr val="accent1"/>
-          </a:lnRef>
-          <a:fillRef idx="3">
-            <a:schemeClr val="accent1"/>
-          </a:fillRef>
-          <a:effectRef idx="2">
-            <a:schemeClr val="accent1"/>
-          </a:effectRef>
-          <a:fontRef idx="minor">
-            <a:schemeClr val="lt1"/>
-          </a:fontRef>
-        </p:style>
-        <p:txBody>
-          <a:bodyPr rtlCol="0" anchor="ctr"/>
-          <a:lstStyle/>
-          <a:p>
-            <a:pPr algn="ctr"/>
-          </a:p>
-        </p:txBody>
-      </p:sp>
-      <p:sp>
-        <p:nvSpPr>
-          <p:cNvPr id="34" name="TextBox 33"/>
-          <p:cNvSpPr txBox="1"/>
-          <p:nvPr/>
-        </p:nvSpPr>
-        <p:spPr>
-          <a:xfrm>
-            <a:off x="8595360" y="1051560"/>
-            <a:ext cx="2286000" cy="502920"/>
-          </a:xfrm>
-          <a:prstGeom prst="rect">
-            <a:avLst/>
-          </a:prstGeom>
-          <a:noFill/>
-        </p:spPr>
-        <p:txBody>
-          <a:bodyPr wrap="square">
-            <a:spAutoFit/>
-          </a:bodyPr>
-          <a:lstStyle/>
-          <a:p>
-            <a:pPr algn="l"/>
-            <a:r>
-              <a:rPr sz="1300" b="1" i="0">
-                <a:solidFill>
-                  <a:srgbClr val="002F6C"/>
-                </a:solidFill>
-              </a:rPr>
-              <a:t>Logística /
-Saúde / Farma</a:t>
-            </a:r>
-          </a:p>
-        </p:txBody>
-      </p:sp>
-      <p:sp>
-        <p:nvSpPr>
-          <p:cNvPr id="35" name="Rectangle 34"/>
-          <p:cNvSpPr/>
-          <p:nvPr/>
-        </p:nvSpPr>
-        <p:spPr>
-          <a:xfrm>
-            <a:off x="10954512" y="1051560"/>
-            <a:ext cx="1188720" cy="384048"/>
-          </a:xfrm>
-          <a:prstGeom prst="rect">
-            <a:avLst/>
-          </a:prstGeom>
-          <a:solidFill>
-            <a:srgbClr val="002F6C"/>
-          </a:solidFill>
-          <a:ln>
-            <a:noFill/>
-          </a:ln>
-        </p:spPr>
-        <p:style>
-          <a:lnRef idx="1">
-            <a:schemeClr val="accent1"/>
-          </a:lnRef>
-          <a:fillRef idx="3">
-            <a:schemeClr val="accent1"/>
-          </a:fillRef>
-          <a:effectRef idx="2">
-            <a:schemeClr val="accent1"/>
-          </a:effectRef>
-          <a:fontRef idx="minor">
-            <a:schemeClr val="lt1"/>
-          </a:fontRef>
-        </p:style>
-        <p:txBody>
-          <a:bodyPr rtlCol="0" anchor="ctr"/>
-          <a:lstStyle/>
-          <a:p>
-            <a:pPr algn="ctr"/>
-          </a:p>
-        </p:txBody>
-      </p:sp>
-      <p:sp>
-        <p:nvSpPr>
-          <p:cNvPr id="36" name="TextBox 35"/>
-          <p:cNvSpPr txBox="1"/>
-          <p:nvPr/>
-        </p:nvSpPr>
-        <p:spPr>
-          <a:xfrm>
-            <a:off x="10954512" y="1051560"/>
-            <a:ext cx="1188720" cy="384048"/>
-          </a:xfrm>
-          <a:prstGeom prst="rect">
-            <a:avLst/>
-          </a:prstGeom>
-          <a:noFill/>
-        </p:spPr>
-        <p:txBody>
-          <a:bodyPr wrap="square">
-            <a:spAutoFit/>
-          </a:bodyPr>
-          <a:lstStyle/>
-          <a:p>
-            <a:pPr algn="ctr"/>
-            <a:r>
-              <a:rPr sz="1100" b="1" i="0">
-                <a:solidFill>
-                  <a:srgbClr val="FFFFFF"/>
-                </a:solidFill>
-              </a:rPr>
-              <a:t>5 contas</a:t>
-            </a:r>
-          </a:p>
-        </p:txBody>
-      </p:sp>
-      <p:sp>
-        <p:nvSpPr>
-          <p:cNvPr id="37" name="Rectangle 36"/>
-          <p:cNvSpPr/>
-          <p:nvPr/>
-        </p:nvSpPr>
-        <p:spPr>
-          <a:xfrm>
-            <a:off x="8595360" y="1572768"/>
-            <a:ext cx="3474720" cy="45720"/>
-          </a:xfrm>
-          <a:prstGeom prst="rect">
-            <a:avLst/>
-          </a:prstGeom>
-          <a:solidFill>
-            <a:srgbClr val="002F6C"/>
-          </a:solidFill>
-          <a:ln>
-            <a:noFill/>
-          </a:ln>
-        </p:spPr>
-        <p:style>
-          <a:lnRef idx="1">
-            <a:schemeClr val="accent1"/>
-          </a:lnRef>
-          <a:fillRef idx="3">
-            <a:schemeClr val="accent1"/>
-          </a:fillRef>
-          <a:effectRef idx="2">
-            <a:schemeClr val="accent1"/>
-          </a:effectRef>
-          <a:fontRef idx="minor">
-            <a:schemeClr val="lt1"/>
-          </a:fontRef>
-        </p:style>
-        <p:txBody>
-          <a:bodyPr rtlCol="0" anchor="ctr"/>
-          <a:lstStyle/>
-          <a:p>
-            <a:pPr algn="ctr"/>
-          </a:p>
-        </p:txBody>
-      </p:sp>
-      <p:sp>
-        <p:nvSpPr>
-          <p:cNvPr id="38" name="TextBox 37"/>
-          <p:cNvSpPr txBox="1"/>
-          <p:nvPr/>
-        </p:nvSpPr>
-        <p:spPr>
-          <a:xfrm>
-            <a:off x="8595360" y="1664208"/>
-            <a:ext cx="3474720" cy="256032"/>
-          </a:xfrm>
-          <a:prstGeom prst="rect">
-            <a:avLst/>
-          </a:prstGeom>
-          <a:noFill/>
-        </p:spPr>
-        <p:txBody>
-          <a:bodyPr wrap="square">
-            <a:spAutoFit/>
-          </a:bodyPr>
-          <a:lstStyle/>
-          <a:p>
-            <a:pPr algn="l"/>
-            <a:r>
-              <a:rPr sz="900" b="1" i="0">
-                <a:solidFill>
-                  <a:srgbClr val="002F6C"/>
-                </a:solidFill>
-              </a:rPr>
-              <a:t>Intro text LinkedIn:</a:t>
-            </a:r>
-          </a:p>
-        </p:txBody>
-      </p:sp>
-      <p:sp>
-        <p:nvSpPr>
-          <p:cNvPr id="39" name="TextBox 38"/>
-          <p:cNvSpPr txBox="1"/>
-          <p:nvPr/>
-        </p:nvSpPr>
-        <p:spPr>
-          <a:xfrm>
-            <a:off x="8595360" y="1920240"/>
-            <a:ext cx="3474720" cy="914400"/>
-          </a:xfrm>
-          <a:prstGeom prst="rect">
-            <a:avLst/>
-          </a:prstGeom>
-          <a:noFill/>
-        </p:spPr>
-        <p:txBody>
-          <a:bodyPr wrap="square">
-            <a:spAutoFit/>
-          </a:bodyPr>
-          <a:lstStyle/>
-          <a:p>
-            <a:pPr algn="l"/>
-            <a:r>
-              <a:rPr sz="1000" b="0" i="1">
-                <a:solidFill>
-                  <a:srgbClr val="444444"/>
-                </a:solidFill>
-              </a:rPr>
-              <a:t>"O time de consultoria foi embora depois da implantação. Quem cuida do seu ambiente SAC agora?"</a:t>
-            </a:r>
-          </a:p>
-        </p:txBody>
-      </p:sp>
-      <p:sp>
-        <p:nvSpPr>
-          <p:cNvPr id="40" name="TextBox 39"/>
-          <p:cNvSpPr txBox="1"/>
-          <p:nvPr/>
-        </p:nvSpPr>
-        <p:spPr>
-          <a:xfrm>
-            <a:off x="8595360" y="2880360"/>
-            <a:ext cx="3474720" cy="256032"/>
-          </a:xfrm>
-          <a:prstGeom prst="rect">
-            <a:avLst/>
-          </a:prstGeom>
-          <a:noFill/>
-        </p:spPr>
-        <p:txBody>
-          <a:bodyPr wrap="square">
-            <a:spAutoFit/>
-          </a:bodyPr>
-          <a:lstStyle/>
-          <a:p>
-            <a:pPr algn="l"/>
-            <a:r>
-              <a:rPr sz="900" b="1" i="0">
-                <a:solidFill>
-                  <a:srgbClr val="002F6C"/>
-                </a:solidFill>
-              </a:rPr>
-              <a:t>Headline:</a:t>
-            </a:r>
-          </a:p>
-        </p:txBody>
-      </p:sp>
-      <p:sp>
-        <p:nvSpPr>
-          <p:cNvPr id="41" name="Rectangle 40"/>
-          <p:cNvSpPr/>
-          <p:nvPr/>
-        </p:nvSpPr>
-        <p:spPr>
-          <a:xfrm>
-            <a:off x="8595360" y="3154680"/>
-            <a:ext cx="3474720" cy="502920"/>
-          </a:xfrm>
-          <a:prstGeom prst="rect">
-            <a:avLst/>
-          </a:prstGeom>
-          <a:solidFill>
-            <a:srgbClr val="002F6C"/>
-          </a:solidFill>
-          <a:ln>
-            <a:noFill/>
-          </a:ln>
-        </p:spPr>
-        <p:style>
-          <a:lnRef idx="1">
-            <a:schemeClr val="accent1"/>
-          </a:lnRef>
-          <a:fillRef idx="3">
-            <a:schemeClr val="accent1"/>
-          </a:fillRef>
-          <a:effectRef idx="2">
-            <a:schemeClr val="accent1"/>
-          </a:effectRef>
-          <a:fontRef idx="minor">
-            <a:schemeClr val="lt1"/>
-          </a:fontRef>
-        </p:style>
-        <p:txBody>
-          <a:bodyPr rtlCol="0" anchor="ctr"/>
-          <a:lstStyle/>
-          <a:p>
-            <a:pPr algn="ctr"/>
-          </a:p>
-        </p:txBody>
-      </p:sp>
-      <p:sp>
-        <p:nvSpPr>
           <p:cNvPr id="42" name="TextBox 41"/>
           <p:cNvSpPr txBox="1"/>
           <p:nvPr/>
@@ -12281,10 +12286,10 @@
             <a:r>
               <a:rPr sz="1100" b="1" i="0">
                 <a:solidFill>
-                  <a:srgbClr val="FFFFFF"/>
-                </a:solidFill>
-              </a:rPr>
-              <a:t>"Sem parceiro técnico para o SAC?"</a:t>
+                  <a:srgbClr val="002F6C"/>
+                </a:solidFill>
+              </a:rPr>
+              <a:t>"Sua licença SAC está sendo aproveitada?"</a:t>
             </a:r>
           </a:p>
         </p:txBody>
@@ -12352,9 +12357,8 @@
                   <a:srgbClr val="444444"/>
                 </a:solidFill>
               </a:rPr>
-              <a:t>BBM Logística · Ferroeste
-DELP Engenharia
-Althaia · Laboratório Teuto</a:t>
+              <a:t>Cimed: planning de produção e forecast
+Jacto: desafogar S4 + ativar planning SAC</a:t>
             </a:r>
           </a:p>
         </p:txBody>
@@ -16093,7 +16097,7 @@
                   <a:srgbClr val="444444"/>
                 </a:solidFill>
               </a:rPr>
-              <a:t>LinkedIn Ads — Tier 1 (8 × R$250 × 3 meses)</a:t>
+              <a:t>LinkedIn Ads — InMail (8 contas × R$100 × 3 meses)</a:t>
             </a:r>
           </a:p>
         </p:txBody>
@@ -16127,7 +16131,7 @@
                   <a:srgbClr val="002F6C"/>
                 </a:solidFill>
               </a:rPr>
-              <a:t>R$ 6.000</a:t>
+              <a:t>R$ 2.400</a:t>
             </a:r>
           </a:p>
         </p:txBody>
@@ -16247,7 +16251,7 @@
                   <a:srgbClr val="444444"/>
                 </a:solidFill>
               </a:rPr>
-              <a:t>LinkedIn Ads — Tier 2 (23 × R$60 × 3 meses)</a:t>
+              <a:t>LinkedIn Ads — Sponsored Content (8 × R$150 × 3 meses)</a:t>
             </a:r>
           </a:p>
         </p:txBody>
@@ -16281,7 +16285,7 @@
                   <a:srgbClr val="002F6C"/>
                 </a:solidFill>
               </a:rPr>
-              <a:t>R$ 4.140</a:t>
+              <a:t>R$ 3.600</a:t>
             </a:r>
           </a:p>
         </p:txBody>
@@ -16401,7 +16405,7 @@
                   <a:srgbClr val="444444"/>
                 </a:solidFill>
               </a:rPr>
-              <a:t>Produção de peças (banners, InMails, emails)</a:t>
+              <a:t>Produção de peças (8 banners + 8 InMails + 24 emails)</a:t>
             </a:r>
           </a:p>
         </p:txBody>
@@ -16546,7 +16550,7 @@
                   <a:srgbClr val="F5A800"/>
                 </a:solidFill>
               </a:rPr>
-              <a:t>R$ 11.640–12.140</a:t>
+              <a:t>R$ 7.500–8.000</a:t>
             </a:r>
           </a:p>
         </p:txBody>

--- a/marketing/campanhas/fabrica-de-analytics-q3-2026/Fabrica_Analytics_ABM_Q3_2026.pptx
+++ b/marketing/campanhas/fabrica-de-analytics-q3-2026/Fabrica_Analytics_ABM_Q3_2026.pptx
@@ -3513,7 +3513,7 @@
                   <a:srgbClr val="F5A800"/>
                 </a:solidFill>
               </a:rPr>
-              <a:t>8</a:t>
+              <a:t>31</a:t>
             </a:r>
           </a:p>
         </p:txBody>
@@ -3624,7 +3624,7 @@
                   <a:srgbClr val="F5A800"/>
                 </a:solidFill>
               </a:rPr>
-              <a:t>3</a:t>
+              <a:t>5</a:t>
             </a:r>
           </a:p>
         </p:txBody>
@@ -3658,7 +3658,7 @@
                   <a:srgbClr val="FFFFFF"/>
                 </a:solidFill>
               </a:rPr>
-              <a:t>canais por conta</a:t>
+              <a:t>verticais / grupos</a:t>
             </a:r>
           </a:p>
         </p:txBody>
@@ -3735,7 +3735,7 @@
                   <a:srgbClr val="F5A800"/>
                 </a:solidFill>
               </a:rPr>
-              <a:t>24</a:t>
+              <a:t>3</a:t>
             </a:r>
           </a:p>
         </p:txBody>
@@ -3769,7 +3769,7 @@
                   <a:srgbClr val="FFFFFF"/>
                 </a:solidFill>
               </a:rPr>
-              <a:t>emails personalizados</a:t>
+              <a:t>canais por conta</a:t>
             </a:r>
           </a:p>
         </p:txBody>
@@ -5778,7 +5778,7 @@
                   <a:srgbClr val="444444"/>
                 </a:solidFill>
               </a:rPr>
-              <a:t>• 8 contas — mensagem 1:1 por empresa</a:t>
+              <a:t>• 31 contas — mensagem 1:1 por grupo/empresa</a:t>
             </a:r>
           </a:p>
         </p:txBody>
@@ -5812,7 +5812,7 @@
                   <a:srgbClr val="444444"/>
                 </a:solidFill>
               </a:rPr>
-              <a:t>• LinkedIn Ads: Sponsored Content + InMail por conta</a:t>
+              <a:t>• LinkedIn Ads: Sponsored Content + InMail por grupo</a:t>
             </a:r>
           </a:p>
         </p:txBody>
@@ -5846,7 +5846,7 @@
                   <a:srgbClr val="444444"/>
                 </a:solidFill>
               </a:rPr>
-              <a:t>• Email: sequência 3 emails personalizada por empresa</a:t>
+              <a:t>• Email: sequência 3 emails por grupo (5 versões)</a:t>
             </a:r>
           </a:p>
         </p:txBody>
@@ -5991,7 +5991,7 @@
                   <a:srgbClr val="F5A800"/>
                 </a:solidFill>
               </a:rPr>
-              <a:t>Meta Q3: 2–3 reuniões | 1–2 OPPs | R$ 678k–1,3M pipeline | Budget: R$ 7.500–8.000</a:t>
+              <a:t>Meta Q3: 3–5 reuniões | 1–3 OPPs | R$ 678k–2M pipeline | Budget: R$ 18.740–19.240</a:t>
             </a:r>
           </a:p>
         </p:txBody>
@@ -6573,7 +6573,7 @@
                   <a:srgbClr val="002F6C"/>
                 </a:solidFill>
               </a:rPr>
-              <a:t>8 Contas — ABM 1:1 — Q3 2026</a:t>
+              <a:t>31 Contas — ABM 1:1 — Q3 2026</a:t>
             </a:r>
           </a:p>
         </p:txBody>
@@ -6805,7 +6805,7 @@
                   <a:srgbClr val="002F6C"/>
                 </a:solidFill>
               </a:rPr>
-              <a:t>8 contas</a:t>
+              <a:t>31 contas</a:t>
             </a:r>
           </a:p>
         </p:txBody>
@@ -6916,9 +6916,9 @@
                   <a:srgbClr val="444444"/>
                 </a:solidFill>
               </a:rPr>
-              <a:t>Mensagem personalizada
-por empresa
-Dor específica por conta</a:t>
+              <a:t>Mensagem por grupo/empresa
+5 verticais
+Dor específica por segmento</a:t>
             </a:r>
           </a:p>
         </p:txBody>
@@ -6988,7 +6988,7 @@
               </a:rPr>
               <a:t>LinkedIn Sponsored Content
 + LinkedIn InMail
-+ Email (3 por empresa)
++ Email (3 por grupo)
 + SDR outreach</a:t>
             </a:r>
           </a:p>
@@ -7057,7 +7057,7 @@
                   <a:srgbClr val="002F6C"/>
                 </a:solidFill>
               </a:rPr>
-              <a:t>R$ 7.500–8.000 / Q3</a:t>
+              <a:t>R$ 18.740–19.240 / Q3</a:t>
             </a:r>
           </a:p>
         </p:txBody>
@@ -7125,10 +7125,9 @@
                   <a:srgbClr val="444444"/>
                 </a:solidFill>
               </a:rPr>
-              <a:t>Sírio-Libanês · Rede D'Or
-Randon · Norte Energia
-VLI · Arteris
-Grupo Cimed · Grupo Jacto</a:t>
+              <a:t>Saúde · Indústria · Energia
+Agro / Alimentos
+Logística / Infra</a:t>
             </a:r>
           </a:p>
         </p:txBody>
@@ -8009,9 +8008,9 @@
                   <a:srgbClr val="444444"/>
                 </a:solidFill>
               </a:rPr>
-              <a:t>2–3 reuniões agendadas
-1–2 oportunidades
-R$ 678k–1,3M pipeline</a:t>
+              <a:t>3–5 reuniões agendadas
+1–3 oportunidades
+R$ 678k–2M pipeline</a:t>
             </a:r>
           </a:p>
         </p:txBody>
@@ -8148,8 +8147,8 @@
                 </a:solidFill>
               </a:rPr>
               <a:t>Ticket médio: R$ 678.406
-Budget Q3: R$ 7.500–8.000
-ROI: 1 deal = 85x o investimento</a:t>
+Budget Q3: R$ 18.740
+ROI: 1 deal = 36x o investimento</a:t>
             </a:r>
           </a:p>
         </p:txBody>
@@ -8287,7 +8286,7 @@
                   <a:srgbClr val="002F6C"/>
                 </a:solidFill>
               </a:rPr>
-              <a:t>Tier 1 — 8 Contas Estratégicas — Mensagem Personalizada por Empresa</a:t>
+              <a:t>31 Contas — Mensagem Personalizada por Grupo / Empresa</a:t>
             </a:r>
           </a:p>
         </p:txBody>
@@ -9102,7 +9101,7 @@
             <a:avLst/>
           </a:prstGeom>
           <a:solidFill>
-            <a:srgbClr val="E67E22"/>
+            <a:srgbClr val="002F6C"/>
           </a:solidFill>
           <a:ln>
             <a:noFill/>
@@ -9159,7 +9158,7 @@
                   <a:srgbClr val="002F6C"/>
                 </a:solidFill>
               </a:rPr>
-              <a:t>Empresas Randon</a:t>
+              <a:t>Althaia</a:t>
             </a:r>
           </a:p>
         </p:txBody>
@@ -9193,7 +9192,7 @@
                   <a:srgbClr val="444444"/>
                 </a:solidFill>
               </a:rPr>
-              <a:t>Indústria</a:t>
+              <a:t>Farma</a:t>
             </a:r>
           </a:p>
         </p:txBody>
@@ -9227,7 +9226,7 @@
                   <a:srgbClr val="444444"/>
                 </a:solidFill>
               </a:rPr>
-              <a:t>S4 pesado — cada query aparece na fatura</a:t>
+              <a:t>SAC parado — licença paga, nada em uso</a:t>
             </a:r>
           </a:p>
         </p:txBody>
@@ -9242,6 +9241,391 @@
           <a:xfrm>
             <a:off x="10149840" y="2633472"/>
             <a:ext cx="1645920" cy="347472"/>
+          </a:xfrm>
+          <a:prstGeom prst="rect">
+            <a:avLst/>
+          </a:prstGeom>
+          <a:solidFill>
+            <a:srgbClr val="002F6C"/>
+          </a:solidFill>
+          <a:ln>
+            <a:noFill/>
+          </a:ln>
+        </p:spPr>
+        <p:style>
+          <a:lnRef idx="1">
+            <a:schemeClr val="accent1"/>
+          </a:lnRef>
+          <a:fillRef idx="3">
+            <a:schemeClr val="accent1"/>
+          </a:fillRef>
+          <a:effectRef idx="2">
+            <a:schemeClr val="accent1"/>
+          </a:effectRef>
+          <a:fontRef idx="minor">
+            <a:schemeClr val="lt1"/>
+          </a:fontRef>
+        </p:style>
+        <p:txBody>
+          <a:bodyPr rtlCol="0" anchor="ctr"/>
+          <a:lstStyle/>
+          <a:p>
+            <a:pPr algn="ctr"/>
+          </a:p>
+        </p:txBody>
+      </p:sp>
+      <p:sp>
+        <p:nvSpPr>
+          <p:cNvPr id="31" name="TextBox 30"/>
+          <p:cNvSpPr txBox="1"/>
+          <p:nvPr/>
+        </p:nvSpPr>
+        <p:spPr>
+          <a:xfrm>
+            <a:off x="10149840" y="2633472"/>
+            <a:ext cx="1645920" cy="347472"/>
+          </a:xfrm>
+          <a:prstGeom prst="rect">
+            <a:avLst/>
+          </a:prstGeom>
+          <a:noFill/>
+        </p:spPr>
+        <p:txBody>
+          <a:bodyPr wrap="square">
+            <a:spAutoFit/>
+          </a:bodyPr>
+          <a:lstStyle/>
+          <a:p>
+            <a:pPr algn="ctr"/>
+            <a:r>
+              <a:rPr sz="900" b="1" i="0">
+                <a:solidFill>
+                  <a:srgbClr val="FFFFFF"/>
+                </a:solidFill>
+              </a:rPr>
+              <a:t>Suporte</a:t>
+            </a:r>
+          </a:p>
+        </p:txBody>
+      </p:sp>
+      <p:sp>
+        <p:nvSpPr>
+          <p:cNvPr id="32" name="Rectangle 31"/>
+          <p:cNvSpPr/>
+          <p:nvPr/>
+        </p:nvSpPr>
+        <p:spPr>
+          <a:xfrm>
+            <a:off x="365760" y="3118103"/>
+            <a:ext cx="11430000" cy="548640"/>
+          </a:xfrm>
+          <a:prstGeom prst="rect">
+            <a:avLst/>
+          </a:prstGeom>
+          <a:solidFill>
+            <a:srgbClr val="FFFFFF"/>
+          </a:solidFill>
+          <a:ln>
+            <a:noFill/>
+          </a:ln>
+        </p:spPr>
+        <p:style>
+          <a:lnRef idx="1">
+            <a:schemeClr val="accent1"/>
+          </a:lnRef>
+          <a:fillRef idx="3">
+            <a:schemeClr val="accent1"/>
+          </a:fillRef>
+          <a:effectRef idx="2">
+            <a:schemeClr val="accent1"/>
+          </a:effectRef>
+          <a:fontRef idx="minor">
+            <a:schemeClr val="lt1"/>
+          </a:fontRef>
+        </p:style>
+        <p:txBody>
+          <a:bodyPr rtlCol="0" anchor="ctr"/>
+          <a:lstStyle/>
+          <a:p>
+            <a:pPr algn="ctr"/>
+          </a:p>
+        </p:txBody>
+      </p:sp>
+      <p:sp>
+        <p:nvSpPr>
+          <p:cNvPr id="33" name="Rectangle 32"/>
+          <p:cNvSpPr/>
+          <p:nvPr/>
+        </p:nvSpPr>
+        <p:spPr>
+          <a:xfrm>
+            <a:off x="365760" y="3118103"/>
+            <a:ext cx="54864" cy="548640"/>
+          </a:xfrm>
+          <a:prstGeom prst="rect">
+            <a:avLst/>
+          </a:prstGeom>
+          <a:solidFill>
+            <a:srgbClr val="002F6C"/>
+          </a:solidFill>
+          <a:ln>
+            <a:noFill/>
+          </a:ln>
+        </p:spPr>
+        <p:style>
+          <a:lnRef idx="1">
+            <a:schemeClr val="accent1"/>
+          </a:lnRef>
+          <a:fillRef idx="3">
+            <a:schemeClr val="accent1"/>
+          </a:fillRef>
+          <a:effectRef idx="2">
+            <a:schemeClr val="accent1"/>
+          </a:effectRef>
+          <a:fontRef idx="minor">
+            <a:schemeClr val="lt1"/>
+          </a:fontRef>
+        </p:style>
+        <p:txBody>
+          <a:bodyPr rtlCol="0" anchor="ctr"/>
+          <a:lstStyle/>
+          <a:p>
+            <a:pPr algn="ctr"/>
+          </a:p>
+        </p:txBody>
+      </p:sp>
+      <p:sp>
+        <p:nvSpPr>
+          <p:cNvPr id="34" name="TextBox 33"/>
+          <p:cNvSpPr txBox="1"/>
+          <p:nvPr/>
+        </p:nvSpPr>
+        <p:spPr>
+          <a:xfrm>
+            <a:off x="475488" y="3227832"/>
+            <a:ext cx="2286000" cy="329184"/>
+          </a:xfrm>
+          <a:prstGeom prst="rect">
+            <a:avLst/>
+          </a:prstGeom>
+          <a:noFill/>
+        </p:spPr>
+        <p:txBody>
+          <a:bodyPr wrap="square">
+            <a:spAutoFit/>
+          </a:bodyPr>
+          <a:lstStyle/>
+          <a:p>
+            <a:pPr algn="l"/>
+            <a:r>
+              <a:rPr sz="1100" b="1" i="0">
+                <a:solidFill>
+                  <a:srgbClr val="002F6C"/>
+                </a:solidFill>
+              </a:rPr>
+              <a:t>Laboratório Teuto</a:t>
+            </a:r>
+          </a:p>
+        </p:txBody>
+      </p:sp>
+      <p:sp>
+        <p:nvSpPr>
+          <p:cNvPr id="35" name="TextBox 34"/>
+          <p:cNvSpPr txBox="1"/>
+          <p:nvPr/>
+        </p:nvSpPr>
+        <p:spPr>
+          <a:xfrm>
+            <a:off x="2834640" y="3227832"/>
+            <a:ext cx="2560320" cy="329184"/>
+          </a:xfrm>
+          <a:prstGeom prst="rect">
+            <a:avLst/>
+          </a:prstGeom>
+          <a:noFill/>
+        </p:spPr>
+        <p:txBody>
+          <a:bodyPr wrap="square">
+            <a:spAutoFit/>
+          </a:bodyPr>
+          <a:lstStyle/>
+          <a:p>
+            <a:pPr algn="l"/>
+            <a:r>
+              <a:rPr sz="1000" b="0" i="0">
+                <a:solidFill>
+                  <a:srgbClr val="444444"/>
+                </a:solidFill>
+              </a:rPr>
+              <a:t>Farma</a:t>
+            </a:r>
+          </a:p>
+        </p:txBody>
+      </p:sp>
+      <p:sp>
+        <p:nvSpPr>
+          <p:cNvPr id="36" name="TextBox 35"/>
+          <p:cNvSpPr txBox="1"/>
+          <p:nvPr/>
+        </p:nvSpPr>
+        <p:spPr>
+          <a:xfrm>
+            <a:off x="5577840" y="3227832"/>
+            <a:ext cx="4389120" cy="329184"/>
+          </a:xfrm>
+          <a:prstGeom prst="rect">
+            <a:avLst/>
+          </a:prstGeom>
+          <a:noFill/>
+        </p:spPr>
+        <p:txBody>
+          <a:bodyPr wrap="square">
+            <a:spAutoFit/>
+          </a:bodyPr>
+          <a:lstStyle/>
+          <a:p>
+            <a:pPr algn="l"/>
+            <a:r>
+              <a:rPr sz="1000" b="0" i="1">
+                <a:solidFill>
+                  <a:srgbClr val="444444"/>
+                </a:solidFill>
+              </a:rPr>
+              <a:t>SAC parado — dados regulatórios esperando</a:t>
+            </a:r>
+          </a:p>
+        </p:txBody>
+      </p:sp>
+      <p:sp>
+        <p:nvSpPr>
+          <p:cNvPr id="37" name="Rectangle 36"/>
+          <p:cNvSpPr/>
+          <p:nvPr/>
+        </p:nvSpPr>
+        <p:spPr>
+          <a:xfrm>
+            <a:off x="10149840" y="3209544"/>
+            <a:ext cx="1645920" cy="347472"/>
+          </a:xfrm>
+          <a:prstGeom prst="rect">
+            <a:avLst/>
+          </a:prstGeom>
+          <a:solidFill>
+            <a:srgbClr val="002F6C"/>
+          </a:solidFill>
+          <a:ln>
+            <a:noFill/>
+          </a:ln>
+        </p:spPr>
+        <p:style>
+          <a:lnRef idx="1">
+            <a:schemeClr val="accent1"/>
+          </a:lnRef>
+          <a:fillRef idx="3">
+            <a:schemeClr val="accent1"/>
+          </a:fillRef>
+          <a:effectRef idx="2">
+            <a:schemeClr val="accent1"/>
+          </a:effectRef>
+          <a:fontRef idx="minor">
+            <a:schemeClr val="lt1"/>
+          </a:fontRef>
+        </p:style>
+        <p:txBody>
+          <a:bodyPr rtlCol="0" anchor="ctr"/>
+          <a:lstStyle/>
+          <a:p>
+            <a:pPr algn="ctr"/>
+          </a:p>
+        </p:txBody>
+      </p:sp>
+      <p:sp>
+        <p:nvSpPr>
+          <p:cNvPr id="38" name="TextBox 37"/>
+          <p:cNvSpPr txBox="1"/>
+          <p:nvPr/>
+        </p:nvSpPr>
+        <p:spPr>
+          <a:xfrm>
+            <a:off x="10149840" y="3209544"/>
+            <a:ext cx="1645920" cy="347472"/>
+          </a:xfrm>
+          <a:prstGeom prst="rect">
+            <a:avLst/>
+          </a:prstGeom>
+          <a:noFill/>
+        </p:spPr>
+        <p:txBody>
+          <a:bodyPr wrap="square">
+            <a:spAutoFit/>
+          </a:bodyPr>
+          <a:lstStyle/>
+          <a:p>
+            <a:pPr algn="ctr"/>
+            <a:r>
+              <a:rPr sz="900" b="1" i="0">
+                <a:solidFill>
+                  <a:srgbClr val="FFFFFF"/>
+                </a:solidFill>
+              </a:rPr>
+              <a:t>Suporte</a:t>
+            </a:r>
+          </a:p>
+        </p:txBody>
+      </p:sp>
+      <p:sp>
+        <p:nvSpPr>
+          <p:cNvPr id="39" name="Rectangle 38"/>
+          <p:cNvSpPr/>
+          <p:nvPr/>
+        </p:nvSpPr>
+        <p:spPr>
+          <a:xfrm>
+            <a:off x="365760" y="3694176"/>
+            <a:ext cx="11430000" cy="548640"/>
+          </a:xfrm>
+          <a:prstGeom prst="rect">
+            <a:avLst/>
+          </a:prstGeom>
+          <a:solidFill>
+            <a:srgbClr val="E8F0FE"/>
+          </a:solidFill>
+          <a:ln>
+            <a:noFill/>
+          </a:ln>
+        </p:spPr>
+        <p:style>
+          <a:lnRef idx="1">
+            <a:schemeClr val="accent1"/>
+          </a:lnRef>
+          <a:fillRef idx="3">
+            <a:schemeClr val="accent1"/>
+          </a:fillRef>
+          <a:effectRef idx="2">
+            <a:schemeClr val="accent1"/>
+          </a:effectRef>
+          <a:fontRef idx="minor">
+            <a:schemeClr val="lt1"/>
+          </a:fontRef>
+        </p:style>
+        <p:txBody>
+          <a:bodyPr rtlCol="0" anchor="ctr"/>
+          <a:lstStyle/>
+          <a:p>
+            <a:pPr algn="ctr"/>
+          </a:p>
+        </p:txBody>
+      </p:sp>
+      <p:sp>
+        <p:nvSpPr>
+          <p:cNvPr id="40" name="Rectangle 39"/>
+          <p:cNvSpPr/>
+          <p:nvPr/>
+        </p:nvSpPr>
+        <p:spPr>
+          <a:xfrm>
+            <a:off x="365760" y="3694176"/>
+            <a:ext cx="54864" cy="548640"/>
           </a:xfrm>
           <a:prstGeom prst="rect">
             <a:avLst/>
@@ -9277,18 +9661,163 @@
       </p:sp>
       <p:sp>
         <p:nvSpPr>
-          <p:cNvPr id="31" name="TextBox 30"/>
-          <p:cNvSpPr txBox="1"/>
-          <p:nvPr/>
-        </p:nvSpPr>
-        <p:spPr>
-          <a:xfrm>
-            <a:off x="10149840" y="2633472"/>
+          <p:cNvPr id="41" name="TextBox 40"/>
+          <p:cNvSpPr txBox="1"/>
+          <p:nvPr/>
+        </p:nvSpPr>
+        <p:spPr>
+          <a:xfrm>
+            <a:off x="475488" y="3803904"/>
+            <a:ext cx="2286000" cy="329184"/>
+          </a:xfrm>
+          <a:prstGeom prst="rect">
+            <a:avLst/>
+          </a:prstGeom>
+          <a:noFill/>
+        </p:spPr>
+        <p:txBody>
+          <a:bodyPr wrap="square">
+            <a:spAutoFit/>
+          </a:bodyPr>
+          <a:lstStyle/>
+          <a:p>
+            <a:pPr algn="l"/>
+            <a:r>
+              <a:rPr sz="1100" b="1" i="0">
+                <a:solidFill>
+                  <a:srgbClr val="002F6C"/>
+                </a:solidFill>
+              </a:rPr>
+              <a:t>Empresas Randon</a:t>
+            </a:r>
+          </a:p>
+        </p:txBody>
+      </p:sp>
+      <p:sp>
+        <p:nvSpPr>
+          <p:cNvPr id="42" name="TextBox 41"/>
+          <p:cNvSpPr txBox="1"/>
+          <p:nvPr/>
+        </p:nvSpPr>
+        <p:spPr>
+          <a:xfrm>
+            <a:off x="2834640" y="3803904"/>
+            <a:ext cx="2560320" cy="329184"/>
+          </a:xfrm>
+          <a:prstGeom prst="rect">
+            <a:avLst/>
+          </a:prstGeom>
+          <a:noFill/>
+        </p:spPr>
+        <p:txBody>
+          <a:bodyPr wrap="square">
+            <a:spAutoFit/>
+          </a:bodyPr>
+          <a:lstStyle/>
+          <a:p>
+            <a:pPr algn="l"/>
+            <a:r>
+              <a:rPr sz="1000" b="0" i="0">
+                <a:solidFill>
+                  <a:srgbClr val="444444"/>
+                </a:solidFill>
+              </a:rPr>
+              <a:t>Indústria</a:t>
+            </a:r>
+          </a:p>
+        </p:txBody>
+      </p:sp>
+      <p:sp>
+        <p:nvSpPr>
+          <p:cNvPr id="43" name="TextBox 42"/>
+          <p:cNvSpPr txBox="1"/>
+          <p:nvPr/>
+        </p:nvSpPr>
+        <p:spPr>
+          <a:xfrm>
+            <a:off x="5577840" y="3803904"/>
+            <a:ext cx="4389120" cy="329184"/>
+          </a:xfrm>
+          <a:prstGeom prst="rect">
+            <a:avLst/>
+          </a:prstGeom>
+          <a:noFill/>
+        </p:spPr>
+        <p:txBody>
+          <a:bodyPr wrap="square">
+            <a:spAutoFit/>
+          </a:bodyPr>
+          <a:lstStyle/>
+          <a:p>
+            <a:pPr algn="l"/>
+            <a:r>
+              <a:rPr sz="1000" b="0" i="1">
+                <a:solidFill>
+                  <a:srgbClr val="444444"/>
+                </a:solidFill>
+              </a:rPr>
+              <a:t>S4 pesado — cada query aparece na fatura</a:t>
+            </a:r>
+          </a:p>
+        </p:txBody>
+      </p:sp>
+      <p:sp>
+        <p:nvSpPr>
+          <p:cNvPr id="44" name="Rectangle 43"/>
+          <p:cNvSpPr/>
+          <p:nvPr/>
+        </p:nvSpPr>
+        <p:spPr>
+          <a:xfrm>
+            <a:off x="10149840" y="3785615"/>
             <a:ext cx="1645920" cy="347472"/>
           </a:xfrm>
           <a:prstGeom prst="rect">
             <a:avLst/>
           </a:prstGeom>
+          <a:solidFill>
+            <a:srgbClr val="E67E22"/>
+          </a:solidFill>
+          <a:ln>
+            <a:noFill/>
+          </a:ln>
+        </p:spPr>
+        <p:style>
+          <a:lnRef idx="1">
+            <a:schemeClr val="accent1"/>
+          </a:lnRef>
+          <a:fillRef idx="3">
+            <a:schemeClr val="accent1"/>
+          </a:fillRef>
+          <a:effectRef idx="2">
+            <a:schemeClr val="accent1"/>
+          </a:effectRef>
+          <a:fontRef idx="minor">
+            <a:schemeClr val="lt1"/>
+          </a:fontRef>
+        </p:style>
+        <p:txBody>
+          <a:bodyPr rtlCol="0" anchor="ctr"/>
+          <a:lstStyle/>
+          <a:p>
+            <a:pPr algn="ctr"/>
+          </a:p>
+        </p:txBody>
+      </p:sp>
+      <p:sp>
+        <p:nvSpPr>
+          <p:cNvPr id="45" name="TextBox 44"/>
+          <p:cNvSpPr txBox="1"/>
+          <p:nvPr/>
+        </p:nvSpPr>
+        <p:spPr>
+          <a:xfrm>
+            <a:off x="10149840" y="3785615"/>
+            <a:ext cx="1645920" cy="347472"/>
+          </a:xfrm>
+          <a:prstGeom prst="rect">
+            <a:avLst/>
+          </a:prstGeom>
           <a:noFill/>
         </p:spPr>
         <p:txBody>
@@ -9311,13 +9840,13 @@
       </p:sp>
       <p:sp>
         <p:nvSpPr>
-          <p:cNvPr id="32" name="Rectangle 31"/>
+          <p:cNvPr id="46" name="Rectangle 45"/>
           <p:cNvSpPr/>
           <p:nvPr/>
         </p:nvSpPr>
         <p:spPr>
           <a:xfrm>
-            <a:off x="365760" y="3118103"/>
+            <a:off x="365760" y="4270248"/>
             <a:ext cx="11430000" cy="548640"/>
           </a:xfrm>
           <a:prstGeom prst="rect">
@@ -9354,13 +9883,278 @@
       </p:sp>
       <p:sp>
         <p:nvSpPr>
-          <p:cNvPr id="33" name="Rectangle 32"/>
+          <p:cNvPr id="47" name="Rectangle 46"/>
           <p:cNvSpPr/>
           <p:nvPr/>
         </p:nvSpPr>
         <p:spPr>
           <a:xfrm>
-            <a:off x="365760" y="3118103"/>
+            <a:off x="365760" y="4270248"/>
+            <a:ext cx="54864" cy="548640"/>
+          </a:xfrm>
+          <a:prstGeom prst="rect">
+            <a:avLst/>
+          </a:prstGeom>
+          <a:solidFill>
+            <a:srgbClr val="E67E22"/>
+          </a:solidFill>
+          <a:ln>
+            <a:noFill/>
+          </a:ln>
+        </p:spPr>
+        <p:style>
+          <a:lnRef idx="1">
+            <a:schemeClr val="accent1"/>
+          </a:lnRef>
+          <a:fillRef idx="3">
+            <a:schemeClr val="accent1"/>
+          </a:fillRef>
+          <a:effectRef idx="2">
+            <a:schemeClr val="accent1"/>
+          </a:effectRef>
+          <a:fontRef idx="minor">
+            <a:schemeClr val="lt1"/>
+          </a:fontRef>
+        </p:style>
+        <p:txBody>
+          <a:bodyPr rtlCol="0" anchor="ctr"/>
+          <a:lstStyle/>
+          <a:p>
+            <a:pPr algn="ctr"/>
+          </a:p>
+        </p:txBody>
+      </p:sp>
+      <p:sp>
+        <p:nvSpPr>
+          <p:cNvPr id="48" name="TextBox 47"/>
+          <p:cNvSpPr txBox="1"/>
+          <p:nvPr/>
+        </p:nvSpPr>
+        <p:spPr>
+          <a:xfrm>
+            <a:off x="475488" y="4379976"/>
+            <a:ext cx="2286000" cy="329184"/>
+          </a:xfrm>
+          <a:prstGeom prst="rect">
+            <a:avLst/>
+          </a:prstGeom>
+          <a:noFill/>
+        </p:spPr>
+        <p:txBody>
+          <a:bodyPr wrap="square">
+            <a:spAutoFit/>
+          </a:bodyPr>
+          <a:lstStyle/>
+          <a:p>
+            <a:pPr algn="l"/>
+            <a:r>
+              <a:rPr sz="1100" b="1" i="0">
+                <a:solidFill>
+                  <a:srgbClr val="002F6C"/>
+                </a:solidFill>
+              </a:rPr>
+              <a:t>Farmax / Brametal</a:t>
+            </a:r>
+          </a:p>
+        </p:txBody>
+      </p:sp>
+      <p:sp>
+        <p:nvSpPr>
+          <p:cNvPr id="49" name="TextBox 48"/>
+          <p:cNvSpPr txBox="1"/>
+          <p:nvPr/>
+        </p:nvSpPr>
+        <p:spPr>
+          <a:xfrm>
+            <a:off x="2834640" y="4379976"/>
+            <a:ext cx="2560320" cy="329184"/>
+          </a:xfrm>
+          <a:prstGeom prst="rect">
+            <a:avLst/>
+          </a:prstGeom>
+          <a:noFill/>
+        </p:spPr>
+        <p:txBody>
+          <a:bodyPr wrap="square">
+            <a:spAutoFit/>
+          </a:bodyPr>
+          <a:lstStyle/>
+          <a:p>
+            <a:pPr algn="l"/>
+            <a:r>
+              <a:rPr sz="1000" b="0" i="0">
+                <a:solidFill>
+                  <a:srgbClr val="444444"/>
+                </a:solidFill>
+              </a:rPr>
+              <a:t>Indústria</a:t>
+            </a:r>
+          </a:p>
+        </p:txBody>
+      </p:sp>
+      <p:sp>
+        <p:nvSpPr>
+          <p:cNvPr id="50" name="TextBox 49"/>
+          <p:cNvSpPr txBox="1"/>
+          <p:nvPr/>
+        </p:nvSpPr>
+        <p:spPr>
+          <a:xfrm>
+            <a:off x="5577840" y="4379976"/>
+            <a:ext cx="4389120" cy="329184"/>
+          </a:xfrm>
+          <a:prstGeom prst="rect">
+            <a:avLst/>
+          </a:prstGeom>
+          <a:noFill/>
+        </p:spPr>
+        <p:txBody>
+          <a:bodyPr wrap="square">
+            <a:spAutoFit/>
+          </a:bodyPr>
+          <a:lstStyle/>
+          <a:p>
+            <a:pPr algn="l"/>
+            <a:r>
+              <a:rPr sz="1000" b="0" i="1">
+                <a:solidFill>
+                  <a:srgbClr val="444444"/>
+                </a:solidFill>
+              </a:rPr>
+              <a:t>S4 sobrecarregado + RFC em risco</a:t>
+            </a:r>
+          </a:p>
+        </p:txBody>
+      </p:sp>
+      <p:sp>
+        <p:nvSpPr>
+          <p:cNvPr id="51" name="Rectangle 50"/>
+          <p:cNvSpPr/>
+          <p:nvPr/>
+        </p:nvSpPr>
+        <p:spPr>
+          <a:xfrm>
+            <a:off x="10149840" y="4361688"/>
+            <a:ext cx="1645920" cy="347472"/>
+          </a:xfrm>
+          <a:prstGeom prst="rect">
+            <a:avLst/>
+          </a:prstGeom>
+          <a:solidFill>
+            <a:srgbClr val="E67E22"/>
+          </a:solidFill>
+          <a:ln>
+            <a:noFill/>
+          </a:ln>
+        </p:spPr>
+        <p:style>
+          <a:lnRef idx="1">
+            <a:schemeClr val="accent1"/>
+          </a:lnRef>
+          <a:fillRef idx="3">
+            <a:schemeClr val="accent1"/>
+          </a:fillRef>
+          <a:effectRef idx="2">
+            <a:schemeClr val="accent1"/>
+          </a:effectRef>
+          <a:fontRef idx="minor">
+            <a:schemeClr val="lt1"/>
+          </a:fontRef>
+        </p:style>
+        <p:txBody>
+          <a:bodyPr rtlCol="0" anchor="ctr"/>
+          <a:lstStyle/>
+          <a:p>
+            <a:pPr algn="ctr"/>
+          </a:p>
+        </p:txBody>
+      </p:sp>
+      <p:sp>
+        <p:nvSpPr>
+          <p:cNvPr id="52" name="TextBox 51"/>
+          <p:cNvSpPr txBox="1"/>
+          <p:nvPr/>
+        </p:nvSpPr>
+        <p:spPr>
+          <a:xfrm>
+            <a:off x="10149840" y="4361688"/>
+            <a:ext cx="1645920" cy="347472"/>
+          </a:xfrm>
+          <a:prstGeom prst="rect">
+            <a:avLst/>
+          </a:prstGeom>
+          <a:noFill/>
+        </p:spPr>
+        <p:txBody>
+          <a:bodyPr wrap="square">
+            <a:spAutoFit/>
+          </a:bodyPr>
+          <a:lstStyle/>
+          <a:p>
+            <a:pPr algn="ctr"/>
+            <a:r>
+              <a:rPr sz="900" b="1" i="0">
+                <a:solidFill>
+                  <a:srgbClr val="FFFFFF"/>
+                </a:solidFill>
+              </a:rPr>
+              <a:t>S4 Pesado</a:t>
+            </a:r>
+          </a:p>
+        </p:txBody>
+      </p:sp>
+      <p:sp>
+        <p:nvSpPr>
+          <p:cNvPr id="53" name="Rectangle 52"/>
+          <p:cNvSpPr/>
+          <p:nvPr/>
+        </p:nvSpPr>
+        <p:spPr>
+          <a:xfrm>
+            <a:off x="365760" y="4846320"/>
+            <a:ext cx="11430000" cy="548640"/>
+          </a:xfrm>
+          <a:prstGeom prst="rect">
+            <a:avLst/>
+          </a:prstGeom>
+          <a:solidFill>
+            <a:srgbClr val="E8F0FE"/>
+          </a:solidFill>
+          <a:ln>
+            <a:noFill/>
+          </a:ln>
+        </p:spPr>
+        <p:style>
+          <a:lnRef idx="1">
+            <a:schemeClr val="accent1"/>
+          </a:lnRef>
+          <a:fillRef idx="3">
+            <a:schemeClr val="accent1"/>
+          </a:fillRef>
+          <a:effectRef idx="2">
+            <a:schemeClr val="accent1"/>
+          </a:effectRef>
+          <a:fontRef idx="minor">
+            <a:schemeClr val="lt1"/>
+          </a:fontRef>
+        </p:style>
+        <p:txBody>
+          <a:bodyPr rtlCol="0" anchor="ctr"/>
+          <a:lstStyle/>
+          <a:p>
+            <a:pPr algn="ctr"/>
+          </a:p>
+        </p:txBody>
+      </p:sp>
+      <p:sp>
+        <p:nvSpPr>
+          <p:cNvPr id="54" name="Rectangle 53"/>
+          <p:cNvSpPr/>
+          <p:nvPr/>
+        </p:nvSpPr>
+        <p:spPr>
+          <a:xfrm>
+            <a:off x="365760" y="4846320"/>
             <a:ext cx="54864" cy="548640"/>
           </a:xfrm>
           <a:prstGeom prst="rect">
@@ -9397,13 +10191,13 @@
       </p:sp>
       <p:sp>
         <p:nvSpPr>
-          <p:cNvPr id="34" name="TextBox 33"/>
-          <p:cNvSpPr txBox="1"/>
-          <p:nvPr/>
-        </p:nvSpPr>
-        <p:spPr>
-          <a:xfrm>
-            <a:off x="475488" y="3227832"/>
+          <p:cNvPr id="55" name="TextBox 54"/>
+          <p:cNvSpPr txBox="1"/>
+          <p:nvPr/>
+        </p:nvSpPr>
+        <p:spPr>
+          <a:xfrm>
+            <a:off x="475488" y="4956048"/>
             <a:ext cx="2286000" cy="329184"/>
           </a:xfrm>
           <a:prstGeom prst="rect">
@@ -9431,13 +10225,13 @@
       </p:sp>
       <p:sp>
         <p:nvSpPr>
-          <p:cNvPr id="35" name="TextBox 34"/>
-          <p:cNvSpPr txBox="1"/>
-          <p:nvPr/>
-        </p:nvSpPr>
-        <p:spPr>
-          <a:xfrm>
-            <a:off x="2834640" y="3227832"/>
+          <p:cNvPr id="56" name="TextBox 55"/>
+          <p:cNvSpPr txBox="1"/>
+          <p:nvPr/>
+        </p:nvSpPr>
+        <p:spPr>
+          <a:xfrm>
+            <a:off x="2834640" y="4956048"/>
             <a:ext cx="2560320" cy="329184"/>
           </a:xfrm>
           <a:prstGeom prst="rect">
@@ -9465,13 +10259,13 @@
       </p:sp>
       <p:sp>
         <p:nvSpPr>
-          <p:cNvPr id="36" name="TextBox 35"/>
-          <p:cNvSpPr txBox="1"/>
-          <p:nvPr/>
-        </p:nvSpPr>
-        <p:spPr>
-          <a:xfrm>
-            <a:off x="5577840" y="3227832"/>
+          <p:cNvPr id="57" name="TextBox 56"/>
+          <p:cNvSpPr txBox="1"/>
+          <p:nvPr/>
+        </p:nvSpPr>
+        <p:spPr>
+          <a:xfrm>
+            <a:off x="5577840" y="4956048"/>
             <a:ext cx="4389120" cy="329184"/>
           </a:xfrm>
           <a:prstGeom prst="rect">
@@ -9499,13 +10293,13 @@
       </p:sp>
       <p:sp>
         <p:nvSpPr>
-          <p:cNvPr id="37" name="Rectangle 36"/>
+          <p:cNvPr id="58" name="Rectangle 57"/>
           <p:cNvSpPr/>
           <p:nvPr/>
         </p:nvSpPr>
         <p:spPr>
           <a:xfrm>
-            <a:off x="10149840" y="3209544"/>
+            <a:off x="10149840" y="4937759"/>
             <a:ext cx="1645920" cy="347472"/>
           </a:xfrm>
           <a:prstGeom prst="rect">
@@ -9542,13 +10336,13 @@
       </p:sp>
       <p:sp>
         <p:nvSpPr>
-          <p:cNvPr id="38" name="TextBox 37"/>
-          <p:cNvSpPr txBox="1"/>
-          <p:nvPr/>
-        </p:nvSpPr>
-        <p:spPr>
-          <a:xfrm>
-            <a:off x="10149840" y="3209544"/>
+          <p:cNvPr id="59" name="TextBox 58"/>
+          <p:cNvSpPr txBox="1"/>
+          <p:nvPr/>
+        </p:nvSpPr>
+        <p:spPr>
+          <a:xfrm>
+            <a:off x="10149840" y="4937759"/>
             <a:ext cx="1645920" cy="347472"/>
           </a:xfrm>
           <a:prstGeom prst="rect">
@@ -9576,278 +10370,13 @@
       </p:sp>
       <p:sp>
         <p:nvSpPr>
-          <p:cNvPr id="39" name="Rectangle 38"/>
+          <p:cNvPr id="60" name="Rectangle 59"/>
           <p:cNvSpPr/>
           <p:nvPr/>
         </p:nvSpPr>
         <p:spPr>
           <a:xfrm>
-            <a:off x="365760" y="3694176"/>
-            <a:ext cx="11430000" cy="548640"/>
-          </a:xfrm>
-          <a:prstGeom prst="rect">
-            <a:avLst/>
-          </a:prstGeom>
-          <a:solidFill>
-            <a:srgbClr val="E8F0FE"/>
-          </a:solidFill>
-          <a:ln>
-            <a:noFill/>
-          </a:ln>
-        </p:spPr>
-        <p:style>
-          <a:lnRef idx="1">
-            <a:schemeClr val="accent1"/>
-          </a:lnRef>
-          <a:fillRef idx="3">
-            <a:schemeClr val="accent1"/>
-          </a:fillRef>
-          <a:effectRef idx="2">
-            <a:schemeClr val="accent1"/>
-          </a:effectRef>
-          <a:fontRef idx="minor">
-            <a:schemeClr val="lt1"/>
-          </a:fontRef>
-        </p:style>
-        <p:txBody>
-          <a:bodyPr rtlCol="0" anchor="ctr"/>
-          <a:lstStyle/>
-          <a:p>
-            <a:pPr algn="ctr"/>
-          </a:p>
-        </p:txBody>
-      </p:sp>
-      <p:sp>
-        <p:nvSpPr>
-          <p:cNvPr id="40" name="Rectangle 39"/>
-          <p:cNvSpPr/>
-          <p:nvPr/>
-        </p:nvSpPr>
-        <p:spPr>
-          <a:xfrm>
-            <a:off x="365760" y="3694176"/>
-            <a:ext cx="54864" cy="548640"/>
-          </a:xfrm>
-          <a:prstGeom prst="rect">
-            <a:avLst/>
-          </a:prstGeom>
-          <a:solidFill>
-            <a:srgbClr val="1A7A4A"/>
-          </a:solidFill>
-          <a:ln>
-            <a:noFill/>
-          </a:ln>
-        </p:spPr>
-        <p:style>
-          <a:lnRef idx="1">
-            <a:schemeClr val="accent1"/>
-          </a:lnRef>
-          <a:fillRef idx="3">
-            <a:schemeClr val="accent1"/>
-          </a:fillRef>
-          <a:effectRef idx="2">
-            <a:schemeClr val="accent1"/>
-          </a:effectRef>
-          <a:fontRef idx="minor">
-            <a:schemeClr val="lt1"/>
-          </a:fontRef>
-        </p:style>
-        <p:txBody>
-          <a:bodyPr rtlCol="0" anchor="ctr"/>
-          <a:lstStyle/>
-          <a:p>
-            <a:pPr algn="ctr"/>
-          </a:p>
-        </p:txBody>
-      </p:sp>
-      <p:sp>
-        <p:nvSpPr>
-          <p:cNvPr id="41" name="TextBox 40"/>
-          <p:cNvSpPr txBox="1"/>
-          <p:nvPr/>
-        </p:nvSpPr>
-        <p:spPr>
-          <a:xfrm>
-            <a:off x="475488" y="3803904"/>
-            <a:ext cx="2286000" cy="329184"/>
-          </a:xfrm>
-          <a:prstGeom prst="rect">
-            <a:avLst/>
-          </a:prstGeom>
-          <a:noFill/>
-        </p:spPr>
-        <p:txBody>
-          <a:bodyPr wrap="square">
-            <a:spAutoFit/>
-          </a:bodyPr>
-          <a:lstStyle/>
-          <a:p>
-            <a:pPr algn="l"/>
-            <a:r>
-              <a:rPr sz="1100" b="1" i="0">
-                <a:solidFill>
-                  <a:srgbClr val="002F6C"/>
-                </a:solidFill>
-              </a:rPr>
-              <a:t>VLI Logística</a:t>
-            </a:r>
-          </a:p>
-        </p:txBody>
-      </p:sp>
-      <p:sp>
-        <p:nvSpPr>
-          <p:cNvPr id="42" name="TextBox 41"/>
-          <p:cNvSpPr txBox="1"/>
-          <p:nvPr/>
-        </p:nvSpPr>
-        <p:spPr>
-          <a:xfrm>
-            <a:off x="2834640" y="3803904"/>
-            <a:ext cx="2560320" cy="329184"/>
-          </a:xfrm>
-          <a:prstGeom prst="rect">
-            <a:avLst/>
-          </a:prstGeom>
-          <a:noFill/>
-        </p:spPr>
-        <p:txBody>
-          <a:bodyPr wrap="square">
-            <a:spAutoFit/>
-          </a:bodyPr>
-          <a:lstStyle/>
-          <a:p>
-            <a:pPr algn="l"/>
-            <a:r>
-              <a:rPr sz="1000" b="0" i="0">
-                <a:solidFill>
-                  <a:srgbClr val="444444"/>
-                </a:solidFill>
-              </a:rPr>
-              <a:t>Logística</a:t>
-            </a:r>
-          </a:p>
-        </p:txBody>
-      </p:sp>
-      <p:sp>
-        <p:nvSpPr>
-          <p:cNvPr id="43" name="TextBox 42"/>
-          <p:cNvSpPr txBox="1"/>
-          <p:nvPr/>
-        </p:nvSpPr>
-        <p:spPr>
-          <a:xfrm>
-            <a:off x="5577840" y="3803904"/>
-            <a:ext cx="4389120" cy="329184"/>
-          </a:xfrm>
-          <a:prstGeom prst="rect">
-            <a:avLst/>
-          </a:prstGeom>
-          <a:noFill/>
-        </p:spPr>
-        <p:txBody>
-          <a:bodyPr wrap="square">
-            <a:spAutoFit/>
-          </a:bodyPr>
-          <a:lstStyle/>
-          <a:p>
-            <a:pPr algn="l"/>
-            <a:r>
-              <a:rPr sz="1000" b="0" i="1">
-                <a:solidFill>
-                  <a:srgbClr val="444444"/>
-                </a:solidFill>
-              </a:rPr>
-              <a:t>SAC só como BI — planning esperando</a:t>
-            </a:r>
-          </a:p>
-        </p:txBody>
-      </p:sp>
-      <p:sp>
-        <p:nvSpPr>
-          <p:cNvPr id="44" name="Rectangle 43"/>
-          <p:cNvSpPr/>
-          <p:nvPr/>
-        </p:nvSpPr>
-        <p:spPr>
-          <a:xfrm>
-            <a:off x="10149840" y="3785615"/>
-            <a:ext cx="1645920" cy="347472"/>
-          </a:xfrm>
-          <a:prstGeom prst="rect">
-            <a:avLst/>
-          </a:prstGeom>
-          <a:solidFill>
-            <a:srgbClr val="1A7A4A"/>
-          </a:solidFill>
-          <a:ln>
-            <a:noFill/>
-          </a:ln>
-        </p:spPr>
-        <p:style>
-          <a:lnRef idx="1">
-            <a:schemeClr val="accent1"/>
-          </a:lnRef>
-          <a:fillRef idx="3">
-            <a:schemeClr val="accent1"/>
-          </a:fillRef>
-          <a:effectRef idx="2">
-            <a:schemeClr val="accent1"/>
-          </a:effectRef>
-          <a:fontRef idx="minor">
-            <a:schemeClr val="lt1"/>
-          </a:fontRef>
-        </p:style>
-        <p:txBody>
-          <a:bodyPr rtlCol="0" anchor="ctr"/>
-          <a:lstStyle/>
-          <a:p>
-            <a:pPr algn="ctr"/>
-          </a:p>
-        </p:txBody>
-      </p:sp>
-      <p:sp>
-        <p:nvSpPr>
-          <p:cNvPr id="45" name="TextBox 44"/>
-          <p:cNvSpPr txBox="1"/>
-          <p:nvPr/>
-        </p:nvSpPr>
-        <p:spPr>
-          <a:xfrm>
-            <a:off x="10149840" y="3785615"/>
-            <a:ext cx="1645920" cy="347472"/>
-          </a:xfrm>
-          <a:prstGeom prst="rect">
-            <a:avLst/>
-          </a:prstGeom>
-          <a:noFill/>
-        </p:spPr>
-        <p:txBody>
-          <a:bodyPr wrap="square">
-            <a:spAutoFit/>
-          </a:bodyPr>
-          <a:lstStyle/>
-          <a:p>
-            <a:pPr algn="ctr"/>
-            <a:r>
-              <a:rPr sz="900" b="1" i="0">
-                <a:solidFill>
-                  <a:srgbClr val="FFFFFF"/>
-                </a:solidFill>
-              </a:rPr>
-              <a:t>Sem Parceiro</a:t>
-            </a:r>
-          </a:p>
-        </p:txBody>
-      </p:sp>
-      <p:sp>
-        <p:nvSpPr>
-          <p:cNvPr id="46" name="Rectangle 45"/>
-          <p:cNvSpPr/>
-          <p:nvPr/>
-        </p:nvSpPr>
-        <p:spPr>
-          <a:xfrm>
-            <a:off x="365760" y="4270248"/>
+            <a:off x="365760" y="5422392"/>
             <a:ext cx="11430000" cy="548640"/>
           </a:xfrm>
           <a:prstGeom prst="rect">
@@ -9884,20 +10413,20 @@
       </p:sp>
       <p:sp>
         <p:nvSpPr>
-          <p:cNvPr id="47" name="Rectangle 46"/>
+          <p:cNvPr id="61" name="Rectangle 60"/>
           <p:cNvSpPr/>
           <p:nvPr/>
         </p:nvSpPr>
         <p:spPr>
           <a:xfrm>
-            <a:off x="365760" y="4270248"/>
+            <a:off x="365760" y="5422392"/>
             <a:ext cx="54864" cy="548640"/>
           </a:xfrm>
           <a:prstGeom prst="rect">
             <a:avLst/>
           </a:prstGeom>
           <a:solidFill>
-            <a:srgbClr val="1A7A4A"/>
+            <a:srgbClr val="C0392B"/>
           </a:solidFill>
           <a:ln>
             <a:noFill/>
@@ -9927,13 +10456,13 @@
       </p:sp>
       <p:sp>
         <p:nvSpPr>
-          <p:cNvPr id="48" name="TextBox 47"/>
-          <p:cNvSpPr txBox="1"/>
-          <p:nvPr/>
-        </p:nvSpPr>
-        <p:spPr>
-          <a:xfrm>
-            <a:off x="475488" y="4379976"/>
+          <p:cNvPr id="62" name="TextBox 61"/>
+          <p:cNvSpPr txBox="1"/>
+          <p:nvPr/>
+        </p:nvSpPr>
+        <p:spPr>
+          <a:xfrm>
+            <a:off x="475488" y="5532120"/>
             <a:ext cx="2286000" cy="329184"/>
           </a:xfrm>
           <a:prstGeom prst="rect">
@@ -9954,20 +10483,20 @@
                   <a:srgbClr val="002F6C"/>
                 </a:solidFill>
               </a:rPr>
-              <a:t>Arteris</a:t>
-            </a:r>
-          </a:p>
-        </p:txBody>
-      </p:sp>
-      <p:sp>
-        <p:nvSpPr>
-          <p:cNvPr id="49" name="TextBox 48"/>
-          <p:cNvSpPr txBox="1"/>
-          <p:nvPr/>
-        </p:nvSpPr>
-        <p:spPr>
-          <a:xfrm>
-            <a:off x="2834640" y="4379976"/>
+              <a:t>Aliança / Petronas / Argo</a:t>
+            </a:r>
+          </a:p>
+        </p:txBody>
+      </p:sp>
+      <p:sp>
+        <p:nvSpPr>
+          <p:cNvPr id="63" name="TextBox 62"/>
+          <p:cNvSpPr txBox="1"/>
+          <p:nvPr/>
+        </p:nvSpPr>
+        <p:spPr>
+          <a:xfrm>
+            <a:off x="2834640" y="5532120"/>
             <a:ext cx="2560320" cy="329184"/>
           </a:xfrm>
           <a:prstGeom prst="rect">
@@ -9988,20 +10517,20 @@
                   <a:srgbClr val="444444"/>
                 </a:solidFill>
               </a:rPr>
-              <a:t>Infraestrutura</a:t>
-            </a:r>
-          </a:p>
-        </p:txBody>
-      </p:sp>
-      <p:sp>
-        <p:nvSpPr>
-          <p:cNvPr id="50" name="TextBox 49"/>
-          <p:cNvSpPr txBox="1"/>
-          <p:nvPr/>
-        </p:nvSpPr>
-        <p:spPr>
-          <a:xfrm>
-            <a:off x="5577840" y="4379976"/>
+              <a:t>Energia</a:t>
+            </a:r>
+          </a:p>
+        </p:txBody>
+      </p:sp>
+      <p:sp>
+        <p:nvSpPr>
+          <p:cNvPr id="64" name="TextBox 63"/>
+          <p:cNvSpPr txBox="1"/>
+          <p:nvPr/>
+        </p:nvSpPr>
+        <p:spPr>
+          <a:xfrm>
+            <a:off x="5577840" y="5532120"/>
             <a:ext cx="4389120" cy="329184"/>
           </a:xfrm>
           <a:prstGeom prst="rect">
@@ -10022,27 +10551,27 @@
                   <a:srgbClr val="444444"/>
                 </a:solidFill>
               </a:rPr>
-              <a:t>Sem parceiro técnico para o que vem depois</a:t>
-            </a:r>
-          </a:p>
-        </p:txBody>
-      </p:sp>
-      <p:sp>
-        <p:nvSpPr>
-          <p:cNvPr id="51" name="Rectangle 50"/>
+              <a:t>RFC urgente — arquitetura legada em risco</a:t>
+            </a:r>
+          </a:p>
+        </p:txBody>
+      </p:sp>
+      <p:sp>
+        <p:nvSpPr>
+          <p:cNvPr id="65" name="Rectangle 64"/>
           <p:cNvSpPr/>
           <p:nvPr/>
         </p:nvSpPr>
         <p:spPr>
           <a:xfrm>
-            <a:off x="10149840" y="4361688"/>
+            <a:off x="10149840" y="5513831"/>
             <a:ext cx="1645920" cy="347472"/>
           </a:xfrm>
           <a:prstGeom prst="rect">
             <a:avLst/>
           </a:prstGeom>
           <a:solidFill>
-            <a:srgbClr val="1A7A4A"/>
+            <a:srgbClr val="C0392B"/>
           </a:solidFill>
           <a:ln>
             <a:noFill/>
@@ -10072,495 +10601,8 @@
       </p:sp>
       <p:sp>
         <p:nvSpPr>
-          <p:cNvPr id="52" name="TextBox 51"/>
-          <p:cNvSpPr txBox="1"/>
-          <p:nvPr/>
-        </p:nvSpPr>
-        <p:spPr>
-          <a:xfrm>
-            <a:off x="10149840" y="4361688"/>
-            <a:ext cx="1645920" cy="347472"/>
-          </a:xfrm>
-          <a:prstGeom prst="rect">
-            <a:avLst/>
-          </a:prstGeom>
-          <a:noFill/>
-        </p:spPr>
-        <p:txBody>
-          <a:bodyPr wrap="square">
-            <a:spAutoFit/>
-          </a:bodyPr>
-          <a:lstStyle/>
-          <a:p>
-            <a:pPr algn="ctr"/>
-            <a:r>
-              <a:rPr sz="900" b="1" i="0">
-                <a:solidFill>
-                  <a:srgbClr val="FFFFFF"/>
-                </a:solidFill>
-              </a:rPr>
-              <a:t>Sem Parceiro</a:t>
-            </a:r>
-          </a:p>
-        </p:txBody>
-      </p:sp>
-      <p:sp>
-        <p:nvSpPr>
-          <p:cNvPr id="53" name="Rectangle 52"/>
-          <p:cNvSpPr/>
-          <p:nvPr/>
-        </p:nvSpPr>
-        <p:spPr>
-          <a:xfrm>
-            <a:off x="365760" y="4846320"/>
-            <a:ext cx="11430000" cy="548640"/>
-          </a:xfrm>
-          <a:prstGeom prst="rect">
-            <a:avLst/>
-          </a:prstGeom>
-          <a:solidFill>
-            <a:srgbClr val="E8F0FE"/>
-          </a:solidFill>
-          <a:ln>
-            <a:noFill/>
-          </a:ln>
-        </p:spPr>
-        <p:style>
-          <a:lnRef idx="1">
-            <a:schemeClr val="accent1"/>
-          </a:lnRef>
-          <a:fillRef idx="3">
-            <a:schemeClr val="accent1"/>
-          </a:fillRef>
-          <a:effectRef idx="2">
-            <a:schemeClr val="accent1"/>
-          </a:effectRef>
-          <a:fontRef idx="minor">
-            <a:schemeClr val="lt1"/>
-          </a:fontRef>
-        </p:style>
-        <p:txBody>
-          <a:bodyPr rtlCol="0" anchor="ctr"/>
-          <a:lstStyle/>
-          <a:p>
-            <a:pPr algn="ctr"/>
-          </a:p>
-        </p:txBody>
-      </p:sp>
-      <p:sp>
-        <p:nvSpPr>
-          <p:cNvPr id="54" name="Rectangle 53"/>
-          <p:cNvSpPr/>
-          <p:nvPr/>
-        </p:nvSpPr>
-        <p:spPr>
-          <a:xfrm>
-            <a:off x="365760" y="4846320"/>
-            <a:ext cx="54864" cy="548640"/>
-          </a:xfrm>
-          <a:prstGeom prst="rect">
-            <a:avLst/>
-          </a:prstGeom>
-          <a:solidFill>
-            <a:srgbClr val="F5A800"/>
-          </a:solidFill>
-          <a:ln>
-            <a:noFill/>
-          </a:ln>
-        </p:spPr>
-        <p:style>
-          <a:lnRef idx="1">
-            <a:schemeClr val="accent1"/>
-          </a:lnRef>
-          <a:fillRef idx="3">
-            <a:schemeClr val="accent1"/>
-          </a:fillRef>
-          <a:effectRef idx="2">
-            <a:schemeClr val="accent1"/>
-          </a:effectRef>
-          <a:fontRef idx="minor">
-            <a:schemeClr val="lt1"/>
-          </a:fontRef>
-        </p:style>
-        <p:txBody>
-          <a:bodyPr rtlCol="0" anchor="ctr"/>
-          <a:lstStyle/>
-          <a:p>
-            <a:pPr algn="ctr"/>
-          </a:p>
-        </p:txBody>
-      </p:sp>
-      <p:sp>
-        <p:nvSpPr>
-          <p:cNvPr id="55" name="TextBox 54"/>
-          <p:cNvSpPr txBox="1"/>
-          <p:nvPr/>
-        </p:nvSpPr>
-        <p:spPr>
-          <a:xfrm>
-            <a:off x="475488" y="4956048"/>
-            <a:ext cx="2286000" cy="329184"/>
-          </a:xfrm>
-          <a:prstGeom prst="rect">
-            <a:avLst/>
-          </a:prstGeom>
-          <a:noFill/>
-        </p:spPr>
-        <p:txBody>
-          <a:bodyPr wrap="square">
-            <a:spAutoFit/>
-          </a:bodyPr>
-          <a:lstStyle/>
-          <a:p>
-            <a:pPr algn="l"/>
-            <a:r>
-              <a:rPr sz="1100" b="1" i="0">
-                <a:solidFill>
-                  <a:srgbClr val="002F6C"/>
-                </a:solidFill>
-              </a:rPr>
-              <a:t>Grupo Cimed</a:t>
-            </a:r>
-          </a:p>
-        </p:txBody>
-      </p:sp>
-      <p:sp>
-        <p:nvSpPr>
-          <p:cNvPr id="56" name="TextBox 55"/>
-          <p:cNvSpPr txBox="1"/>
-          <p:nvPr/>
-        </p:nvSpPr>
-        <p:spPr>
-          <a:xfrm>
-            <a:off x="2834640" y="4956048"/>
-            <a:ext cx="2560320" cy="329184"/>
-          </a:xfrm>
-          <a:prstGeom prst="rect">
-            <a:avLst/>
-          </a:prstGeom>
-          <a:noFill/>
-        </p:spPr>
-        <p:txBody>
-          <a:bodyPr wrap="square">
-            <a:spAutoFit/>
-          </a:bodyPr>
-          <a:lstStyle/>
-          <a:p>
-            <a:pPr algn="l"/>
-            <a:r>
-              <a:rPr sz="1000" b="0" i="0">
-                <a:solidFill>
-                  <a:srgbClr val="444444"/>
-                </a:solidFill>
-              </a:rPr>
-              <a:t>Farma</a:t>
-            </a:r>
-          </a:p>
-        </p:txBody>
-      </p:sp>
-      <p:sp>
-        <p:nvSpPr>
-          <p:cNvPr id="57" name="TextBox 56"/>
-          <p:cNvSpPr txBox="1"/>
-          <p:nvPr/>
-        </p:nvSpPr>
-        <p:spPr>
-          <a:xfrm>
-            <a:off x="5577840" y="4956048"/>
-            <a:ext cx="4389120" cy="329184"/>
-          </a:xfrm>
-          <a:prstGeom prst="rect">
-            <a:avLst/>
-          </a:prstGeom>
-          <a:noFill/>
-        </p:spPr>
-        <p:txBody>
-          <a:bodyPr wrap="square">
-            <a:spAutoFit/>
-          </a:bodyPr>
-          <a:lstStyle/>
-          <a:p>
-            <a:pPr algn="l"/>
-            <a:r>
-              <a:rPr sz="1000" b="0" i="1">
-                <a:solidFill>
-                  <a:srgbClr val="444444"/>
-                </a:solidFill>
-              </a:rPr>
-              <a:t>SAC parado — licença paga, nada em uso</a:t>
-            </a:r>
-          </a:p>
-        </p:txBody>
-      </p:sp>
-      <p:sp>
-        <p:nvSpPr>
-          <p:cNvPr id="58" name="Rectangle 57"/>
-          <p:cNvSpPr/>
-          <p:nvPr/>
-        </p:nvSpPr>
-        <p:spPr>
-          <a:xfrm>
-            <a:off x="10149840" y="4937759"/>
-            <a:ext cx="1645920" cy="347472"/>
-          </a:xfrm>
-          <a:prstGeom prst="rect">
-            <a:avLst/>
-          </a:prstGeom>
-          <a:solidFill>
-            <a:srgbClr val="F5A800"/>
-          </a:solidFill>
-          <a:ln>
-            <a:noFill/>
-          </a:ln>
-        </p:spPr>
-        <p:style>
-          <a:lnRef idx="1">
-            <a:schemeClr val="accent1"/>
-          </a:lnRef>
-          <a:fillRef idx="3">
-            <a:schemeClr val="accent1"/>
-          </a:fillRef>
-          <a:effectRef idx="2">
-            <a:schemeClr val="accent1"/>
-          </a:effectRef>
-          <a:fontRef idx="minor">
-            <a:schemeClr val="lt1"/>
-          </a:fontRef>
-        </p:style>
-        <p:txBody>
-          <a:bodyPr rtlCol="0" anchor="ctr"/>
-          <a:lstStyle/>
-          <a:p>
-            <a:pPr algn="ctr"/>
-          </a:p>
-        </p:txBody>
-      </p:sp>
-      <p:sp>
-        <p:nvSpPr>
-          <p:cNvPr id="59" name="TextBox 58"/>
-          <p:cNvSpPr txBox="1"/>
-          <p:nvPr/>
-        </p:nvSpPr>
-        <p:spPr>
-          <a:xfrm>
-            <a:off x="10149840" y="4937759"/>
-            <a:ext cx="1645920" cy="347472"/>
-          </a:xfrm>
-          <a:prstGeom prst="rect">
-            <a:avLst/>
-          </a:prstGeom>
-          <a:noFill/>
-        </p:spPr>
-        <p:txBody>
-          <a:bodyPr wrap="square">
-            <a:spAutoFit/>
-          </a:bodyPr>
-          <a:lstStyle/>
-          <a:p>
-            <a:pPr algn="ctr"/>
-            <a:r>
-              <a:rPr sz="900" b="1" i="0">
-                <a:solidFill>
-                  <a:srgbClr val="002F6C"/>
-                </a:solidFill>
-              </a:rPr>
-              <a:t>SAC Parado</a:t>
-            </a:r>
-          </a:p>
-        </p:txBody>
-      </p:sp>
-      <p:sp>
-        <p:nvSpPr>
-          <p:cNvPr id="60" name="Rectangle 59"/>
-          <p:cNvSpPr/>
-          <p:nvPr/>
-        </p:nvSpPr>
-        <p:spPr>
-          <a:xfrm>
-            <a:off x="365760" y="5422392"/>
-            <a:ext cx="11430000" cy="548640"/>
-          </a:xfrm>
-          <a:prstGeom prst="rect">
-            <a:avLst/>
-          </a:prstGeom>
-          <a:solidFill>
-            <a:srgbClr val="FFFFFF"/>
-          </a:solidFill>
-          <a:ln>
-            <a:noFill/>
-          </a:ln>
-        </p:spPr>
-        <p:style>
-          <a:lnRef idx="1">
-            <a:schemeClr val="accent1"/>
-          </a:lnRef>
-          <a:fillRef idx="3">
-            <a:schemeClr val="accent1"/>
-          </a:fillRef>
-          <a:effectRef idx="2">
-            <a:schemeClr val="accent1"/>
-          </a:effectRef>
-          <a:fontRef idx="minor">
-            <a:schemeClr val="lt1"/>
-          </a:fontRef>
-        </p:style>
-        <p:txBody>
-          <a:bodyPr rtlCol="0" anchor="ctr"/>
-          <a:lstStyle/>
-          <a:p>
-            <a:pPr algn="ctr"/>
-          </a:p>
-        </p:txBody>
-      </p:sp>
-      <p:sp>
-        <p:nvSpPr>
-          <p:cNvPr id="61" name="Rectangle 60"/>
-          <p:cNvSpPr/>
-          <p:nvPr/>
-        </p:nvSpPr>
-        <p:spPr>
-          <a:xfrm>
-            <a:off x="365760" y="5422392"/>
-            <a:ext cx="54864" cy="548640"/>
-          </a:xfrm>
-          <a:prstGeom prst="rect">
-            <a:avLst/>
-          </a:prstGeom>
-          <a:solidFill>
-            <a:srgbClr val="E67E22"/>
-          </a:solidFill>
-          <a:ln>
-            <a:noFill/>
-          </a:ln>
-        </p:spPr>
-        <p:style>
-          <a:lnRef idx="1">
-            <a:schemeClr val="accent1"/>
-          </a:lnRef>
-          <a:fillRef idx="3">
-            <a:schemeClr val="accent1"/>
-          </a:fillRef>
-          <a:effectRef idx="2">
-            <a:schemeClr val="accent1"/>
-          </a:effectRef>
-          <a:fontRef idx="minor">
-            <a:schemeClr val="lt1"/>
-          </a:fontRef>
-        </p:style>
-        <p:txBody>
-          <a:bodyPr rtlCol="0" anchor="ctr"/>
-          <a:lstStyle/>
-          <a:p>
-            <a:pPr algn="ctr"/>
-          </a:p>
-        </p:txBody>
-      </p:sp>
-      <p:sp>
-        <p:nvSpPr>
-          <p:cNvPr id="62" name="TextBox 61"/>
-          <p:cNvSpPr txBox="1"/>
-          <p:nvPr/>
-        </p:nvSpPr>
-        <p:spPr>
-          <a:xfrm>
-            <a:off x="475488" y="5532120"/>
-            <a:ext cx="2286000" cy="329184"/>
-          </a:xfrm>
-          <a:prstGeom prst="rect">
-            <a:avLst/>
-          </a:prstGeom>
-          <a:noFill/>
-        </p:spPr>
-        <p:txBody>
-          <a:bodyPr wrap="square">
-            <a:spAutoFit/>
-          </a:bodyPr>
-          <a:lstStyle/>
-          <a:p>
-            <a:pPr algn="l"/>
-            <a:r>
-              <a:rPr sz="1100" b="1" i="0">
-                <a:solidFill>
-                  <a:srgbClr val="002F6C"/>
-                </a:solidFill>
-              </a:rPr>
-              <a:t>Grupo Jacto</a:t>
-            </a:r>
-          </a:p>
-        </p:txBody>
-      </p:sp>
-      <p:sp>
-        <p:nvSpPr>
-          <p:cNvPr id="63" name="TextBox 62"/>
-          <p:cNvSpPr txBox="1"/>
-          <p:nvPr/>
-        </p:nvSpPr>
-        <p:spPr>
-          <a:xfrm>
-            <a:off x="2834640" y="5532120"/>
-            <a:ext cx="2560320" cy="329184"/>
-          </a:xfrm>
-          <a:prstGeom prst="rect">
-            <a:avLst/>
-          </a:prstGeom>
-          <a:noFill/>
-        </p:spPr>
-        <p:txBody>
-          <a:bodyPr wrap="square">
-            <a:spAutoFit/>
-          </a:bodyPr>
-          <a:lstStyle/>
-          <a:p>
-            <a:pPr algn="l"/>
-            <a:r>
-              <a:rPr sz="1000" b="0" i="0">
-                <a:solidFill>
-                  <a:srgbClr val="444444"/>
-                </a:solidFill>
-              </a:rPr>
-              <a:t>Agro / Equipamentos</a:t>
-            </a:r>
-          </a:p>
-        </p:txBody>
-      </p:sp>
-      <p:sp>
-        <p:nvSpPr>
-          <p:cNvPr id="64" name="TextBox 63"/>
-          <p:cNvSpPr txBox="1"/>
-          <p:nvPr/>
-        </p:nvSpPr>
-        <p:spPr>
-          <a:xfrm>
-            <a:off x="5577840" y="5532120"/>
-            <a:ext cx="4389120" cy="329184"/>
-          </a:xfrm>
-          <a:prstGeom prst="rect">
-            <a:avLst/>
-          </a:prstGeom>
-          <a:noFill/>
-        </p:spPr>
-        <p:txBody>
-          <a:bodyPr wrap="square">
-            <a:spAutoFit/>
-          </a:bodyPr>
-          <a:lstStyle/>
-          <a:p>
-            <a:pPr algn="l"/>
-            <a:r>
-              <a:rPr sz="1000" b="0" i="1">
-                <a:solidFill>
-                  <a:srgbClr val="444444"/>
-                </a:solidFill>
-              </a:rPr>
-              <a:t>S4 pesado + SAC sem planning</a:t>
-            </a:r>
-          </a:p>
-        </p:txBody>
-      </p:sp>
-      <p:sp>
-        <p:nvSpPr>
-          <p:cNvPr id="65" name="Rectangle 64"/>
-          <p:cNvSpPr/>
+          <p:cNvPr id="66" name="TextBox 65"/>
+          <p:cNvSpPr txBox="1"/>
           <p:nvPr/>
         </p:nvSpPr>
         <p:spPr>
@@ -10571,49 +10613,6 @@
           <a:prstGeom prst="rect">
             <a:avLst/>
           </a:prstGeom>
-          <a:solidFill>
-            <a:srgbClr val="E67E22"/>
-          </a:solidFill>
-          <a:ln>
-            <a:noFill/>
-          </a:ln>
-        </p:spPr>
-        <p:style>
-          <a:lnRef idx="1">
-            <a:schemeClr val="accent1"/>
-          </a:lnRef>
-          <a:fillRef idx="3">
-            <a:schemeClr val="accent1"/>
-          </a:fillRef>
-          <a:effectRef idx="2">
-            <a:schemeClr val="accent1"/>
-          </a:effectRef>
-          <a:fontRef idx="minor">
-            <a:schemeClr val="lt1"/>
-          </a:fontRef>
-        </p:style>
-        <p:txBody>
-          <a:bodyPr rtlCol="0" anchor="ctr"/>
-          <a:lstStyle/>
-          <a:p>
-            <a:pPr algn="ctr"/>
-          </a:p>
-        </p:txBody>
-      </p:sp>
-      <p:sp>
-        <p:nvSpPr>
-          <p:cNvPr id="66" name="TextBox 65"/>
-          <p:cNvSpPr txBox="1"/>
-          <p:nvPr/>
-        </p:nvSpPr>
-        <p:spPr>
-          <a:xfrm>
-            <a:off x="10149840" y="5513831"/>
-            <a:ext cx="1645920" cy="347472"/>
-          </a:xfrm>
-          <a:prstGeom prst="rect">
-            <a:avLst/>
-          </a:prstGeom>
           <a:noFill/>
         </p:spPr>
         <p:txBody>
@@ -10629,7 +10628,7 @@
                   <a:srgbClr val="FFFFFF"/>
                 </a:solidFill>
               </a:rPr>
-              <a:t>S4 Pesado</a:t>
+              <a:t>RFC Urgente</a:t>
             </a:r>
           </a:p>
         </p:txBody>
@@ -16097,7 +16096,7 @@
                   <a:srgbClr val="444444"/>
                 </a:solidFill>
               </a:rPr>
-              <a:t>LinkedIn Ads — InMail (8 contas × R$100 × 3 meses)</a:t>
+              <a:t>LinkedIn Ads — InMail (31 contas × R$80 × 3 meses)</a:t>
             </a:r>
           </a:p>
         </p:txBody>
@@ -16131,7 +16130,7 @@
                   <a:srgbClr val="002F6C"/>
                 </a:solidFill>
               </a:rPr>
-              <a:t>R$ 2.400</a:t>
+              <a:t>R$ 7.440</a:t>
             </a:r>
           </a:p>
         </p:txBody>
@@ -16251,7 +16250,7 @@
                   <a:srgbClr val="444444"/>
                 </a:solidFill>
               </a:rPr>
-              <a:t>LinkedIn Ads — Sponsored Content (8 × R$150 × 3 meses)</a:t>
+              <a:t>LinkedIn Ads — Sponsored Content (31 × R$100 × 3 meses)</a:t>
             </a:r>
           </a:p>
         </p:txBody>
@@ -16285,7 +16284,7 @@
                   <a:srgbClr val="002F6C"/>
                 </a:solidFill>
               </a:rPr>
-              <a:t>R$ 3.600</a:t>
+              <a:t>R$ 9.300</a:t>
             </a:r>
           </a:p>
         </p:txBody>
@@ -16405,7 +16404,7 @@
                   <a:srgbClr val="444444"/>
                 </a:solidFill>
               </a:rPr>
-              <a:t>Produção de peças (8 banners + 8 InMails + 24 emails)</a:t>
+              <a:t>Produção de peças (5 variantes banner + InMails + emails)</a:t>
             </a:r>
           </a:p>
         </p:txBody>
@@ -16439,7 +16438,7 @@
                   <a:srgbClr val="002F6C"/>
                 </a:solidFill>
               </a:rPr>
-              <a:t>R$ 1.500–2.000</a:t>
+              <a:t>R$ 2.000–2.500</a:t>
             </a:r>
           </a:p>
         </p:txBody>
@@ -16550,7 +16549,7 @@
                   <a:srgbClr val="F5A800"/>
                 </a:solidFill>
               </a:rPr>
-              <a:t>R$ 7.500–8.000</a:t>
+              <a:t>R$ 18.740–19.240</a:t>
             </a:r>
           </a:p>
         </p:txBody>
